--- a/presenation_deck_das/RUOnlineCon_2026_Damian_Sian.pptx
+++ b/presenation_deck_das/RUOnlineCon_2026_Damian_Sian.pptx
@@ -5,10 +5,10 @@
     <p:sldMasterId id="2147483732" r:id="rId4"/>
   </p:sldMasterIdLst>
   <p:notesMasterIdLst>
-    <p:notesMasterId r:id="rId29"/>
+    <p:notesMasterId r:id="rId39"/>
   </p:notesMasterIdLst>
   <p:handoutMasterIdLst>
-    <p:handoutMasterId r:id="rId30"/>
+    <p:handoutMasterId r:id="rId40"/>
   </p:handoutMasterIdLst>
   <p:sldIdLst>
     <p:sldId id="269" r:id="rId5"/>
@@ -35,6 +35,16 @@
     <p:sldId id="295" r:id="rId26"/>
     <p:sldId id="293" r:id="rId27"/>
     <p:sldId id="294" r:id="rId28"/>
+    <p:sldId id="298" r:id="rId29"/>
+    <p:sldId id="299" r:id="rId30"/>
+    <p:sldId id="300" r:id="rId31"/>
+    <p:sldId id="303" r:id="rId32"/>
+    <p:sldId id="301" r:id="rId33"/>
+    <p:sldId id="305" r:id="rId34"/>
+    <p:sldId id="306" r:id="rId35"/>
+    <p:sldId id="302" r:id="rId36"/>
+    <p:sldId id="304" r:id="rId37"/>
+    <p:sldId id="307" r:id="rId38"/>
   </p:sldIdLst>
   <p:sldSz cx="9144000" cy="5143500" type="screen16x9"/>
   <p:notesSz cx="6858000" cy="9144000"/>
@@ -208,6 +218,16 @@
           <p14:sldIdLst>
             <p14:sldId id="293"/>
             <p14:sldId id="294"/>
+            <p14:sldId id="298"/>
+            <p14:sldId id="299"/>
+            <p14:sldId id="300"/>
+            <p14:sldId id="303"/>
+            <p14:sldId id="301"/>
+            <p14:sldId id="305"/>
+            <p14:sldId id="306"/>
+            <p14:sldId id="302"/>
+            <p14:sldId id="304"/>
+            <p14:sldId id="307"/>
           </p14:sldIdLst>
         </p14:section>
       </p14:sectionLst>
@@ -316,7 +336,7 @@
           <a:p>
             <a:fld id="{014770FF-BA1D-BE4E-8504-5165D62D5778}" type="datetimeFigureOut">
               <a:rPr lang="en-US" smtClean="0"/>
-              <a:t>2/28/26</a:t>
+              <a:t>3/6/26</a:t>
             </a:fld>
             <a:endParaRPr lang="en-US"/>
           </a:p>
@@ -493,7 +513,7 @@
           <a:p>
             <a:fld id="{21E02A63-8238-CF49-95F6-4E73F04318D6}" type="datetimeFigureOut">
               <a:rPr lang="en-US" smtClean="0"/>
-              <a:t>2/28/26</a:t>
+              <a:t>3/6/26</a:t>
             </a:fld>
             <a:endParaRPr lang="en-US"/>
           </a:p>
@@ -844,6 +864,114 @@
 </p:notes>
 </file>
 
+<file path=ppt/notesSlides/notesSlide2.xml><?xml version="1.0" encoding="utf-8"?>
+<p:notes xmlns:a="http://schemas.openxmlformats.org/drawingml/2006/main" xmlns:r="http://schemas.openxmlformats.org/officeDocument/2006/relationships" xmlns:p="http://schemas.openxmlformats.org/presentationml/2006/main">
+  <p:cSld>
+    <p:spTree>
+      <p:nvGrpSpPr>
+        <p:cNvPr id="1" name="">
+          <a:extLst>
+            <a:ext uri="{FF2B5EF4-FFF2-40B4-BE49-F238E27FC236}">
+              <a16:creationId xmlns:a16="http://schemas.microsoft.com/office/drawing/2014/main" id="{41ED6843-21F3-561C-0157-DDA024E5BD9B}"/>
+            </a:ext>
+          </a:extLst>
+        </p:cNvPr>
+        <p:cNvGrpSpPr/>
+        <p:nvPr/>
+      </p:nvGrpSpPr>
+      <p:grpSpPr>
+        <a:xfrm>
+          <a:off x="0" y="0"/>
+          <a:ext cx="0" cy="0"/>
+          <a:chOff x="0" y="0"/>
+          <a:chExt cx="0" cy="0"/>
+        </a:xfrm>
+      </p:grpSpPr>
+      <p:sp>
+        <p:nvSpPr>
+          <p:cNvPr id="2" name="Slide Image Placeholder 1">
+            <a:extLst>
+              <a:ext uri="{FF2B5EF4-FFF2-40B4-BE49-F238E27FC236}">
+                <a16:creationId xmlns:a16="http://schemas.microsoft.com/office/drawing/2014/main" id="{072C3463-CBA5-CF5C-A7C6-4ADCD9E26196}"/>
+              </a:ext>
+            </a:extLst>
+          </p:cNvPr>
+          <p:cNvSpPr>
+            <a:spLocks noGrp="1" noRot="1" noChangeAspect="1"/>
+          </p:cNvSpPr>
+          <p:nvPr>
+            <p:ph type="sldImg"/>
+          </p:nvPr>
+        </p:nvSpPr>
+        <p:spPr/>
+      </p:sp>
+      <p:sp>
+        <p:nvSpPr>
+          <p:cNvPr id="3" name="Notes Placeholder 2">
+            <a:extLst>
+              <a:ext uri="{FF2B5EF4-FFF2-40B4-BE49-F238E27FC236}">
+                <a16:creationId xmlns:a16="http://schemas.microsoft.com/office/drawing/2014/main" id="{35771037-0860-3B7D-6A74-A4F866E34F7F}"/>
+              </a:ext>
+            </a:extLst>
+          </p:cNvPr>
+          <p:cNvSpPr>
+            <a:spLocks noGrp="1"/>
+          </p:cNvSpPr>
+          <p:nvPr>
+            <p:ph type="body" idx="1"/>
+          </p:nvPr>
+        </p:nvSpPr>
+        <p:spPr/>
+        <p:txBody>
+          <a:bodyPr/>
+          <a:lstStyle/>
+          <a:p>
+            <a:endParaRPr lang="en-US" dirty="0"/>
+          </a:p>
+        </p:txBody>
+      </p:sp>
+      <p:sp>
+        <p:nvSpPr>
+          <p:cNvPr id="4" name="Slide Number Placeholder 3">
+            <a:extLst>
+              <a:ext uri="{FF2B5EF4-FFF2-40B4-BE49-F238E27FC236}">
+                <a16:creationId xmlns:a16="http://schemas.microsoft.com/office/drawing/2014/main" id="{73B99AA2-ADBA-C5C9-AE65-0E1E40E0DB36}"/>
+              </a:ext>
+            </a:extLst>
+          </p:cNvPr>
+          <p:cNvSpPr>
+            <a:spLocks noGrp="1"/>
+          </p:cNvSpPr>
+          <p:nvPr>
+            <p:ph type="sldNum" sz="quarter" idx="5"/>
+          </p:nvPr>
+        </p:nvSpPr>
+        <p:spPr/>
+        <p:txBody>
+          <a:bodyPr/>
+          <a:lstStyle/>
+          <a:p>
+            <a:fld id="{82FB5D43-6794-0847-9F6F-8A7B2FD27330}" type="slidenum">
+              <a:rPr lang="en-US" smtClean="0"/>
+              <a:t>27</a:t>
+            </a:fld>
+            <a:endParaRPr lang="en-US"/>
+          </a:p>
+        </p:txBody>
+      </p:sp>
+    </p:spTree>
+    <p:extLst>
+      <p:ext uri="{BB962C8B-B14F-4D97-AF65-F5344CB8AC3E}">
+        <p14:creationId xmlns:p14="http://schemas.microsoft.com/office/powerpoint/2010/main" val="3591847657"/>
+      </p:ext>
+    </p:extLst>
+  </p:cSld>
+  <p:clrMapOvr>
+    <a:masterClrMapping/>
+  </p:clrMapOvr>
+</p:notes>
+</file>
+
 <file path=ppt/slideLayouts/slideLayout1.xml><?xml version="1.0" encoding="utf-8"?>
 <p:sldLayout xmlns:a="http://schemas.openxmlformats.org/drawingml/2006/main" xmlns:r="http://schemas.openxmlformats.org/officeDocument/2006/relationships" xmlns:p="http://schemas.openxmlformats.org/presentationml/2006/main" showMasterSp="0" preserve="1" userDrawn="1">
   <p:cSld name="1_Theme Graphic">
@@ -4348,14 +4476,14 @@
           </a:ln>
           <a:extLst>
             <a:ext uri="{909E8E84-426E-40dd-AFC4-6F175D3DCCD1}">
-              <a14:hiddenFill xmlns="" xmlns:a14="http://schemas.microsoft.com/office/drawing/2010/main">
+              <a14:hiddenFill xmlns:a14="http://schemas.microsoft.com/office/drawing/2010/main" xmlns="">
                 <a:solidFill>
                   <a:srgbClr val="FFFFFF"/>
                 </a:solidFill>
               </a14:hiddenFill>
             </a:ext>
             <a:ext uri="{91240B29-F687-4f45-9708-019B960494DF}">
-              <a14:hiddenLine xmlns="" xmlns:a14="http://schemas.microsoft.com/office/drawing/2010/main" w="9525">
+              <a14:hiddenLine xmlns:a14="http://schemas.microsoft.com/office/drawing/2010/main" xmlns="" w="9525">
                 <a:solidFill>
                   <a:srgbClr val="000000"/>
                 </a:solidFill>
@@ -4365,7 +4493,7 @@
               </a14:hiddenLine>
             </a:ext>
             <a:ext uri="{FAA26D3D-D897-4be2-8F04-BA451C77F1D7}">
-              <ma14:placeholderFlag xmlns="" xmlns:ma14="http://schemas.microsoft.com/office/mac/drawingml/2011/main" val="1"/>
+              <ma14:placeholderFlag xmlns:ma14="http://schemas.microsoft.com/office/mac/drawingml/2011/main" xmlns="" val="1"/>
             </a:ext>
           </a:extLst>
         </p:spPr>
@@ -4409,14 +4537,14 @@
           </a:ln>
           <a:extLst>
             <a:ext uri="{909E8E84-426E-40dd-AFC4-6F175D3DCCD1}">
-              <a14:hiddenFill xmlns="" xmlns:a14="http://schemas.microsoft.com/office/drawing/2010/main">
+              <a14:hiddenFill xmlns:a14="http://schemas.microsoft.com/office/drawing/2010/main" xmlns="">
                 <a:solidFill>
                   <a:srgbClr val="FFFFFF"/>
                 </a:solidFill>
               </a14:hiddenFill>
             </a:ext>
             <a:ext uri="{91240B29-F687-4f45-9708-019B960494DF}">
-              <a14:hiddenLine xmlns="" xmlns:a14="http://schemas.microsoft.com/office/drawing/2010/main" w="9525">
+              <a14:hiddenLine xmlns:a14="http://schemas.microsoft.com/office/drawing/2010/main" xmlns="" w="9525">
                 <a:solidFill>
                   <a:srgbClr val="000000"/>
                 </a:solidFill>
@@ -4426,7 +4554,7 @@
               </a14:hiddenLine>
             </a:ext>
             <a:ext uri="{FAA26D3D-D897-4be2-8F04-BA451C77F1D7}">
-              <ma14:placeholderFlag xmlns="" xmlns:ma14="http://schemas.microsoft.com/office/mac/drawingml/2011/main" val="1"/>
+              <ma14:placeholderFlag xmlns:ma14="http://schemas.microsoft.com/office/mac/drawingml/2011/main" xmlns="" val="1"/>
             </a:ext>
           </a:extLst>
         </p:spPr>
@@ -5157,14 +5285,14 @@
           <a:effectLst/>
           <a:extLst>
             <a:ext uri="{909E8E84-426E-40dd-AFC4-6F175D3DCCD1}">
-              <a14:hiddenFill xmlns="" xmlns:a14="http://schemas.microsoft.com/office/drawing/2010/main">
+              <a14:hiddenFill xmlns:a14="http://schemas.microsoft.com/office/drawing/2010/main" xmlns="">
                 <a:solidFill>
                   <a:srgbClr val="FFFFFF"/>
                 </a:solidFill>
               </a14:hiddenFill>
             </a:ext>
             <a:ext uri="{91240B29-F687-4f45-9708-019B960494DF}">
-              <a14:hiddenLine xmlns="" xmlns:a14="http://schemas.microsoft.com/office/drawing/2010/main" w="9525">
+              <a14:hiddenLine xmlns:a14="http://schemas.microsoft.com/office/drawing/2010/main" xmlns="" w="9525">
                 <a:solidFill>
                   <a:srgbClr val="000000"/>
                 </a:solidFill>
@@ -5174,7 +5302,7 @@
               </a14:hiddenLine>
             </a:ext>
             <a:ext uri="{FAA26D3D-D897-4be2-8F04-BA451C77F1D7}">
-              <ma14:placeholderFlag xmlns="" xmlns:ma14="http://schemas.microsoft.com/office/mac/drawingml/2011/main" val="1"/>
+              <ma14:placeholderFlag xmlns:ma14="http://schemas.microsoft.com/office/mac/drawingml/2011/main" xmlns="" val="1"/>
             </a:ext>
           </a:extLst>
         </p:spPr>
@@ -6172,14 +6300,14 @@
           </a:ln>
           <a:extLst>
             <a:ext uri="{909E8E84-426E-40dd-AFC4-6F175D3DCCD1}">
-              <a14:hiddenFill xmlns="" xmlns:a14="http://schemas.microsoft.com/office/drawing/2010/main">
+              <a14:hiddenFill xmlns:a14="http://schemas.microsoft.com/office/drawing/2010/main" xmlns="">
                 <a:solidFill>
                   <a:srgbClr val="FFFFFF"/>
                 </a:solidFill>
               </a14:hiddenFill>
             </a:ext>
             <a:ext uri="{91240B29-F687-4f45-9708-019B960494DF}">
-              <a14:hiddenLine xmlns="" xmlns:a14="http://schemas.microsoft.com/office/drawing/2010/main" w="9525">
+              <a14:hiddenLine xmlns:a14="http://schemas.microsoft.com/office/drawing/2010/main" xmlns="" w="9525">
                 <a:solidFill>
                   <a:srgbClr val="000000"/>
                 </a:solidFill>
@@ -6189,7 +6317,7 @@
               </a14:hiddenLine>
             </a:ext>
             <a:ext uri="{FAA26D3D-D897-4be2-8F04-BA451C77F1D7}">
-              <ma14:placeholderFlag xmlns="" xmlns:ma14="http://schemas.microsoft.com/office/mac/drawingml/2011/main" val="1"/>
+              <ma14:placeholderFlag xmlns:ma14="http://schemas.microsoft.com/office/mac/drawingml/2011/main" xmlns="" val="1"/>
             </a:ext>
           </a:extLst>
         </p:spPr>
@@ -6487,14 +6615,14 @@
           </a:ln>
           <a:extLst>
             <a:ext uri="{909E8E84-426E-40dd-AFC4-6F175D3DCCD1}">
-              <a14:hiddenFill xmlns="" xmlns:a14="http://schemas.microsoft.com/office/drawing/2010/main">
+              <a14:hiddenFill xmlns:a14="http://schemas.microsoft.com/office/drawing/2010/main" xmlns="">
                 <a:solidFill>
                   <a:srgbClr val="FFFFFF"/>
                 </a:solidFill>
               </a14:hiddenFill>
             </a:ext>
             <a:ext uri="{91240B29-F687-4f45-9708-019B960494DF}">
-              <a14:hiddenLine xmlns="" xmlns:a14="http://schemas.microsoft.com/office/drawing/2010/main" w="9525">
+              <a14:hiddenLine xmlns:a14="http://schemas.microsoft.com/office/drawing/2010/main" xmlns="" w="9525">
                 <a:solidFill>
                   <a:srgbClr val="000000"/>
                 </a:solidFill>
@@ -6504,7 +6632,7 @@
               </a14:hiddenLine>
             </a:ext>
             <a:ext uri="{FAA26D3D-D897-4be2-8F04-BA451C77F1D7}">
-              <ma14:placeholderFlag xmlns="" xmlns:ma14="http://schemas.microsoft.com/office/mac/drawingml/2011/main" val="1"/>
+              <ma14:placeholderFlag xmlns:ma14="http://schemas.microsoft.com/office/mac/drawingml/2011/main" xmlns="" val="1"/>
             </a:ext>
           </a:extLst>
         </p:spPr>
@@ -6869,7 +6997,7 @@
       </p:sp>
       <p:pic>
         <p:nvPicPr>
-          <p:cNvPr id="6" name="Picture 5" descr="Canvas course accessibility dashboard. ">
+          <p:cNvPr id="6" name="Picture 5" descr="Accessibility score dashboard of Ally in Canvas. ">
             <a:extLst>
               <a:ext uri="{FF2B5EF4-FFF2-40B4-BE49-F238E27FC236}">
                 <a16:creationId xmlns:a16="http://schemas.microsoft.com/office/drawing/2014/main" id="{C9FBF324-A41C-B742-1C3F-5E14DFA44CFD}"/>
@@ -6882,15 +7010,20 @@
           <p:nvPr/>
         </p:nvPicPr>
         <p:blipFill>
-          <a:blip r:embed="rId2"/>
-          <a:stretch>
-            <a:fillRect/>
-          </a:stretch>
+          <a:blip r:embed="rId2">
+            <a:extLst>
+              <a:ext uri="{28A0092B-C50C-407E-A947-70E740481C1C}">
+                <a14:useLocalDpi xmlns:a14="http://schemas.microsoft.com/office/drawing/2010/main" val="0"/>
+              </a:ext>
+            </a:extLst>
+          </a:blip>
+          <a:srcRect/>
+          <a:stretch/>
         </p:blipFill>
         <p:spPr>
           <a:xfrm>
-            <a:off x="2139097" y="1954736"/>
-            <a:ext cx="5065226" cy="2674284"/>
+            <a:off x="2149907" y="1954736"/>
+            <a:ext cx="5043605" cy="2674284"/>
           </a:xfrm>
           <a:prstGeom prst="rect">
             <a:avLst/>
@@ -7150,15 +7283,20 @@
           <p:nvPr/>
         </p:nvPicPr>
         <p:blipFill>
-          <a:blip r:embed="rId2"/>
-          <a:stretch>
-            <a:fillRect/>
-          </a:stretch>
+          <a:blip r:embed="rId2">
+            <a:extLst>
+              <a:ext uri="{28A0092B-C50C-407E-A947-70E740481C1C}">
+                <a14:useLocalDpi xmlns:a14="http://schemas.microsoft.com/office/drawing/2010/main" val="0"/>
+              </a:ext>
+            </a:extLst>
+          </a:blip>
+          <a:srcRect/>
+          <a:stretch/>
         </p:blipFill>
         <p:spPr>
           <a:xfrm>
-            <a:off x="3246941" y="403053"/>
-            <a:ext cx="4496393" cy="4247657"/>
+            <a:off x="3246941" y="406990"/>
+            <a:ext cx="4496393" cy="4239784"/>
           </a:xfrm>
           <a:prstGeom prst="rect">
             <a:avLst/>
@@ -8719,7 +8857,7 @@
             <p:ph idx="1"/>
             <p:extLst>
               <p:ext uri="{D42A27DB-BD31-4B8C-83A1-F6EECF244321}">
-                <p14:modId xmlns:p14="http://schemas.microsoft.com/office/powerpoint/2010/main" val="2203813981"/>
+                <p14:modId xmlns:p14="http://schemas.microsoft.com/office/powerpoint/2010/main" val="706458340"/>
               </p:ext>
             </p:extLst>
           </p:nvPr>
@@ -9150,7 +9288,7 @@
                       <a:prstDash val="solid"/>
                     </a:lnBlToTr>
                     <a:solidFill>
-                      <a:srgbClr val="008F00"/>
+                      <a:srgbClr val="037404"/>
                     </a:solidFill>
                   </a:tcPr>
                 </a:tc>
@@ -9253,7 +9391,7 @@
                       <a:prstDash val="solid"/>
                     </a:lnBlToTr>
                     <a:solidFill>
-                      <a:srgbClr val="008F00"/>
+                      <a:srgbClr val="037404"/>
                     </a:solidFill>
                   </a:tcPr>
                 </a:tc>
@@ -9350,7 +9488,7 @@
                       <a:prstDash val="solid"/>
                     </a:lnBlToTr>
                     <a:solidFill>
-                      <a:srgbClr val="008F00"/>
+                      <a:srgbClr val="037404"/>
                     </a:solidFill>
                   </a:tcPr>
                 </a:tc>
@@ -9642,7 +9780,7 @@
                       <a:prstDash val="solid"/>
                     </a:lnBlToTr>
                     <a:solidFill>
-                      <a:srgbClr val="008F00"/>
+                      <a:srgbClr val="037404"/>
                     </a:solidFill>
                   </a:tcPr>
                 </a:tc>
@@ -11138,7 +11276,7 @@
                       <a:prstDash val="solid"/>
                     </a:lnBlToTr>
                     <a:solidFill>
-                      <a:srgbClr val="008F00"/>
+                      <a:srgbClr val="037404"/>
                     </a:solidFill>
                   </a:tcPr>
                 </a:tc>
@@ -11243,7 +11381,7 @@
                       <a:prstDash val="solid"/>
                     </a:lnBlToTr>
                     <a:solidFill>
-                      <a:srgbClr val="008F00"/>
+                      <a:srgbClr val="037404"/>
                     </a:solidFill>
                   </a:tcPr>
                 </a:tc>
@@ -12570,21 +12708,98 @@
           </a:p>
         </p:txBody>
       </p:sp>
-      <p:pic>
-        <p:nvPicPr>
-          <p:cNvPr id="7" name="Content Placeholder 6">
+      <p:sp>
+        <p:nvSpPr>
+          <p:cNvPr id="12" name="Content Placeholder 11">
             <a:extLst>
               <a:ext uri="{FF2B5EF4-FFF2-40B4-BE49-F238E27FC236}">
-                <a16:creationId xmlns:a16="http://schemas.microsoft.com/office/drawing/2014/main" id="{E3B73978-14D9-BC04-17B0-F8C05D370D73}"/>
+                <a16:creationId xmlns:a16="http://schemas.microsoft.com/office/drawing/2014/main" id="{1891190F-B28C-AA70-86E4-4ED5E7C0A4BD}"/>
               </a:ext>
             </a:extLst>
           </p:cNvPr>
-          <p:cNvPicPr>
-            <a:picLocks noGrp="1" noChangeAspect="1"/>
-          </p:cNvPicPr>
+          <p:cNvSpPr>
+            <a:spLocks noGrp="1"/>
+          </p:cNvSpPr>
           <p:nvPr>
             <p:ph idx="1"/>
           </p:nvPr>
+        </p:nvSpPr>
+        <p:spPr>
+          <a:xfrm>
+            <a:off x="457201" y="1268651"/>
+            <a:ext cx="4722668" cy="3365694"/>
+          </a:xfrm>
+        </p:spPr>
+        <p:txBody>
+          <a:bodyPr/>
+          <a:lstStyle/>
+          <a:p>
+            <a:pPr marL="4763" indent="0">
+              <a:buNone/>
+            </a:pPr>
+            <a:r>
+              <a:rPr lang="en-US" sz="1600" b="1" dirty="0"/>
+              <a:t>Image contrast</a:t>
+            </a:r>
+          </a:p>
+          <a:p>
+            <a:pPr marL="517525"/>
+            <a:r>
+              <a:rPr lang="en-US" sz="1400" dirty="0"/>
+              <a:t>Contrast checks require information like font size and usage (i.e., text or graphic). </a:t>
+            </a:r>
+          </a:p>
+          <a:p>
+            <a:pPr marL="517525"/>
+            <a:r>
+              <a:rPr lang="en-US" sz="1400" dirty="0"/>
+              <a:t>There may be ways to determine those factors, but the tool is NOT doing that today. </a:t>
+            </a:r>
+          </a:p>
+          <a:p>
+            <a:pPr marL="517525"/>
+            <a:r>
+              <a:rPr lang="en-US" sz="1400" dirty="0"/>
+              <a:t>This feature is entirely unreliable and these results can largely be ignored. </a:t>
+            </a:r>
+          </a:p>
+          <a:p>
+            <a:pPr marL="4763" indent="0">
+              <a:spcBef>
+                <a:spcPts val="1000"/>
+              </a:spcBef>
+              <a:buNone/>
+            </a:pPr>
+            <a:r>
+              <a:rPr lang="en-US" sz="1600" b="1" dirty="0"/>
+              <a:t>Text contrast PowerPoint files</a:t>
+            </a:r>
+          </a:p>
+          <a:p>
+            <a:pPr marL="517525"/>
+            <a:r>
+              <a:rPr lang="en-US" sz="1400" dirty="0"/>
+              <a:t>Ally is rendering the PPTX files and in that rendering its misinterpreting colors and some text gets wrapped. </a:t>
+            </a:r>
+          </a:p>
+          <a:p>
+            <a:endParaRPr lang="en-US" sz="1600" dirty="0"/>
+          </a:p>
+        </p:txBody>
+      </p:sp>
+      <p:pic>
+        <p:nvPicPr>
+          <p:cNvPr id="6" name="Picture 5" descr="Image has contrast issues; guidance is not available yet. We are updating the guidance on this issue. ">
+            <a:extLst>
+              <a:ext uri="{FF2B5EF4-FFF2-40B4-BE49-F238E27FC236}">
+                <a16:creationId xmlns:a16="http://schemas.microsoft.com/office/drawing/2014/main" id="{26C5CA59-5E36-DD1E-77E0-487AA20BF900}"/>
+              </a:ext>
+            </a:extLst>
+          </p:cNvPr>
+          <p:cNvPicPr>
+            <a:picLocks noChangeAspect="1"/>
+          </p:cNvPicPr>
+          <p:nvPr/>
         </p:nvPicPr>
         <p:blipFill>
           <a:blip r:embed="rId2"/>
@@ -12594,96 +12809,7 @@
         </p:blipFill>
         <p:spPr>
           <a:xfrm>
-            <a:off x="3596709" y="1251987"/>
-            <a:ext cx="1654091" cy="2104463"/>
-          </a:xfrm>
-          <a:prstGeom prst="rect">
-            <a:avLst/>
-          </a:prstGeom>
-        </p:spPr>
-      </p:pic>
-      <p:sp>
-        <p:nvSpPr>
-          <p:cNvPr id="4" name="Footer Placeholder 3">
-            <a:extLst>
-              <a:ext uri="{FF2B5EF4-FFF2-40B4-BE49-F238E27FC236}">
-                <a16:creationId xmlns:a16="http://schemas.microsoft.com/office/drawing/2014/main" id="{62F395F9-8B4A-C8EF-45C6-3F3C8DC61A99}"/>
-              </a:ext>
-            </a:extLst>
-          </p:cNvPr>
-          <p:cNvSpPr>
-            <a:spLocks noGrp="1"/>
-          </p:cNvSpPr>
-          <p:nvPr>
-            <p:ph type="ftr" sz="quarter" idx="3"/>
-          </p:nvPr>
-        </p:nvSpPr>
-        <p:spPr/>
-        <p:txBody>
-          <a:bodyPr/>
-          <a:lstStyle/>
-          <a:p>
-            <a:r>
-              <a:rPr lang="en-US"/>
-              <a:t>Getting to 100: Fixing Your Anthology Ally Errors</a:t>
-            </a:r>
-            <a:endParaRPr lang="en-US" dirty="0"/>
-          </a:p>
-        </p:txBody>
-      </p:sp>
-      <p:sp>
-        <p:nvSpPr>
-          <p:cNvPr id="5" name="Slide Number Placeholder 4">
-            <a:extLst>
-              <a:ext uri="{FF2B5EF4-FFF2-40B4-BE49-F238E27FC236}">
-                <a16:creationId xmlns:a16="http://schemas.microsoft.com/office/drawing/2014/main" id="{D2F60278-CF6D-7C03-10AB-F0383BF6DC19}"/>
-              </a:ext>
-            </a:extLst>
-          </p:cNvPr>
-          <p:cNvSpPr>
-            <a:spLocks noGrp="1"/>
-          </p:cNvSpPr>
-          <p:nvPr>
-            <p:ph type="sldNum" sz="quarter" idx="4"/>
-          </p:nvPr>
-        </p:nvSpPr>
-        <p:spPr/>
-        <p:txBody>
-          <a:bodyPr/>
-          <a:lstStyle/>
-          <a:p>
-            <a:fld id="{E2D72577-C5EA-2248-880D-8FE657DD8266}" type="slidenum">
-              <a:rPr lang="en-US" smtClean="0"/>
-              <a:pPr/>
-              <a:t>20</a:t>
-            </a:fld>
-            <a:endParaRPr lang="en-US"/>
-          </a:p>
-        </p:txBody>
-      </p:sp>
-      <p:pic>
-        <p:nvPicPr>
-          <p:cNvPr id="6" name="Picture 5">
-            <a:extLst>
-              <a:ext uri="{FF2B5EF4-FFF2-40B4-BE49-F238E27FC236}">
-                <a16:creationId xmlns:a16="http://schemas.microsoft.com/office/drawing/2014/main" id="{26C5CA59-5E36-DD1E-77E0-487AA20BF900}"/>
-              </a:ext>
-            </a:extLst>
-          </p:cNvPr>
-          <p:cNvPicPr>
-            <a:picLocks noChangeAspect="1"/>
-          </p:cNvPicPr>
-          <p:nvPr/>
-        </p:nvPicPr>
-        <p:blipFill>
-          <a:blip r:embed="rId3"/>
-          <a:stretch>
-            <a:fillRect/>
-          </a:stretch>
-        </p:blipFill>
-        <p:spPr>
-          <a:xfrm>
-            <a:off x="5289283" y="1253702"/>
+            <a:off x="5393192" y="1347220"/>
             <a:ext cx="1856609" cy="2975397"/>
           </a:xfrm>
           <a:prstGeom prst="rect">
@@ -12693,7 +12819,43 @@
       </p:pic>
       <p:pic>
         <p:nvPicPr>
-          <p:cNvPr id="8" name="Picture 7">
+          <p:cNvPr id="10" name="Picture 9" descr="Text rendered gray on first slide when it’s actually whte. ">
+            <a:extLst>
+              <a:ext uri="{FF2B5EF4-FFF2-40B4-BE49-F238E27FC236}">
+                <a16:creationId xmlns:a16="http://schemas.microsoft.com/office/drawing/2014/main" id="{A24824FD-E4CC-2529-7A61-6B5E6017C5C8}"/>
+              </a:ext>
+            </a:extLst>
+          </p:cNvPr>
+          <p:cNvPicPr>
+            <a:picLocks noChangeAspect="1"/>
+          </p:cNvPicPr>
+          <p:nvPr/>
+        </p:nvPicPr>
+        <p:blipFill>
+          <a:blip r:embed="rId3">
+            <a:extLst>
+              <a:ext uri="{28A0092B-C50C-407E-A947-70E740481C1C}">
+                <a14:useLocalDpi xmlns:a14="http://schemas.microsoft.com/office/drawing/2010/main" val="0"/>
+              </a:ext>
+            </a:extLst>
+          </a:blip>
+          <a:stretch>
+            <a:fillRect/>
+          </a:stretch>
+        </p:blipFill>
+        <p:spPr>
+          <a:xfrm>
+            <a:off x="9394853" y="-187018"/>
+            <a:ext cx="7772400" cy="2929078"/>
+          </a:xfrm>
+          <a:prstGeom prst="rect">
+            <a:avLst/>
+          </a:prstGeom>
+        </p:spPr>
+      </p:pic>
+      <p:pic>
+        <p:nvPicPr>
+          <p:cNvPr id="8" name="Picture 7" descr="Text reflows causing contrast issues that cannot occur in a PPTX file. ">
             <a:extLst>
               <a:ext uri="{FF2B5EF4-FFF2-40B4-BE49-F238E27FC236}">
                 <a16:creationId xmlns:a16="http://schemas.microsoft.com/office/drawing/2014/main" id="{7406EACD-32F6-E791-25D2-D3ACBBE369F1}"/>
@@ -12713,7 +12875,7 @@
         </p:blipFill>
         <p:spPr>
           <a:xfrm>
-            <a:off x="739186" y="3025448"/>
+            <a:off x="10231144" y="3082093"/>
             <a:ext cx="4504926" cy="1879289"/>
           </a:xfrm>
           <a:prstGeom prst="rect">
@@ -12721,42 +12883,71 @@
           </a:prstGeom>
         </p:spPr>
       </p:pic>
-      <p:pic>
-        <p:nvPicPr>
-          <p:cNvPr id="10" name="Picture 9" descr="A screenshot of a computer&#10;&#10;AI-generated content may be incorrect.">
+      <p:sp>
+        <p:nvSpPr>
+          <p:cNvPr id="4" name="Footer Placeholder 3">
             <a:extLst>
               <a:ext uri="{FF2B5EF4-FFF2-40B4-BE49-F238E27FC236}">
-                <a16:creationId xmlns:a16="http://schemas.microsoft.com/office/drawing/2014/main" id="{A24824FD-E4CC-2529-7A61-6B5E6017C5C8}"/>
+                <a16:creationId xmlns:a16="http://schemas.microsoft.com/office/drawing/2014/main" id="{62F395F9-8B4A-C8EF-45C6-3F3C8DC61A99}"/>
+              </a:ext>
+              <a:ext uri="{C183D7F6-B498-43B3-948B-1728B52AA6E4}">
+                <adec:decorative xmlns:adec="http://schemas.microsoft.com/office/drawing/2017/decorative" val="1"/>
               </a:ext>
             </a:extLst>
           </p:cNvPr>
-          <p:cNvPicPr>
-            <a:picLocks noChangeAspect="1"/>
-          </p:cNvPicPr>
-          <p:nvPr/>
-        </p:nvPicPr>
-        <p:blipFill>
-          <a:blip r:embed="rId5">
-            <a:extLst>
-              <a:ext uri="{28A0092B-C50C-407E-A947-70E740481C1C}">
-                <a14:useLocalDpi xmlns:a14="http://schemas.microsoft.com/office/drawing/2010/main" val="0"/>
-              </a:ext>
-            </a:extLst>
-          </a:blip>
-          <a:stretch>
-            <a:fillRect/>
-          </a:stretch>
-        </p:blipFill>
-        <p:spPr>
-          <a:xfrm>
-            <a:off x="0" y="848762"/>
-            <a:ext cx="7772400" cy="2929078"/>
-          </a:xfrm>
-          <a:prstGeom prst="rect">
-            <a:avLst/>
-          </a:prstGeom>
-        </p:spPr>
-      </p:pic>
+          <p:cNvSpPr>
+            <a:spLocks noGrp="1"/>
+          </p:cNvSpPr>
+          <p:nvPr>
+            <p:ph type="ftr" sz="quarter" idx="3"/>
+          </p:nvPr>
+        </p:nvSpPr>
+        <p:spPr/>
+        <p:txBody>
+          <a:bodyPr/>
+          <a:lstStyle/>
+          <a:p>
+            <a:r>
+              <a:rPr lang="en-US"/>
+              <a:t>Getting to 100: Fixing Your Anthology Ally Errors</a:t>
+            </a:r>
+            <a:endParaRPr lang="en-US" dirty="0"/>
+          </a:p>
+        </p:txBody>
+      </p:sp>
+      <p:sp>
+        <p:nvSpPr>
+          <p:cNvPr id="5" name="Slide Number Placeholder 4">
+            <a:extLst>
+              <a:ext uri="{FF2B5EF4-FFF2-40B4-BE49-F238E27FC236}">
+                <a16:creationId xmlns:a16="http://schemas.microsoft.com/office/drawing/2014/main" id="{D2F60278-CF6D-7C03-10AB-F0383BF6DC19}"/>
+              </a:ext>
+              <a:ext uri="{C183D7F6-B498-43B3-948B-1728B52AA6E4}">
+                <adec:decorative xmlns:adec="http://schemas.microsoft.com/office/drawing/2017/decorative" val="1"/>
+              </a:ext>
+            </a:extLst>
+          </p:cNvPr>
+          <p:cNvSpPr>
+            <a:spLocks noGrp="1"/>
+          </p:cNvSpPr>
+          <p:nvPr>
+            <p:ph type="sldNum" sz="quarter" idx="4"/>
+          </p:nvPr>
+        </p:nvSpPr>
+        <p:spPr/>
+        <p:txBody>
+          <a:bodyPr/>
+          <a:lstStyle/>
+          <a:p>
+            <a:fld id="{E2D72577-C5EA-2248-880D-8FE657DD8266}" type="slidenum">
+              <a:rPr lang="en-US" smtClean="0"/>
+              <a:pPr/>
+              <a:t>20</a:t>
+            </a:fld>
+            <a:endParaRPr lang="en-US"/>
+          </a:p>
+        </p:txBody>
+      </p:sp>
     </p:spTree>
     <p:extLst>
       <p:ext uri="{BB962C8B-B14F-4D97-AF65-F5344CB8AC3E}">
@@ -13119,10 +13310,9 @@
           <a:lstStyle/>
           <a:p>
             <a:r>
-              <a:rPr lang="en-US"/>
-              <a:t>Section three: Scope of the challenge</a:t>
-            </a:r>
-            <a:endParaRPr lang="en-US" dirty="0"/>
+              <a:rPr lang="en-US" dirty="0"/>
+              <a:t>Section three: Text alternatives</a:t>
+            </a:r>
           </a:p>
         </p:txBody>
       </p:sp>
@@ -13153,10 +13343,9 @@
           <a:lstStyle/>
           <a:p>
             <a:r>
-              <a:rPr lang="en-US"/>
-              <a:t>The scope and limitations of automated testing. </a:t>
-            </a:r>
-            <a:endParaRPr lang="en-US" dirty="0"/>
+              <a:rPr lang="en-US" dirty="0"/>
+              <a:t>High likelihood of occurrence, high impact for non-conformance. </a:t>
+            </a:r>
           </a:p>
         </p:txBody>
       </p:sp>
@@ -13280,7 +13469,7 @@
           <a:p>
             <a:r>
               <a:rPr lang="en-US" dirty="0"/>
-              <a:t>Covered in section three</a:t>
+              <a:t>Covered in section four</a:t>
             </a:r>
           </a:p>
         </p:txBody>
@@ -13321,7 +13510,7 @@
             </a:pPr>
             <a:r>
               <a:rPr lang="en-US" dirty="0"/>
-              <a:t>What is Ally actually testing? </a:t>
+              <a:t>Overview</a:t>
             </a:r>
           </a:p>
           <a:p>
@@ -13331,7 +13520,7 @@
             </a:pPr>
             <a:r>
               <a:rPr lang="en-US" dirty="0"/>
-              <a:t>What is it missing? </a:t>
+              <a:t>Impact to students with disabilities</a:t>
             </a:r>
           </a:p>
           <a:p>
@@ -13341,11 +13530,18 @@
             </a:pPr>
             <a:r>
               <a:rPr lang="en-US" dirty="0"/>
-              <a:t>What is it getting wrong (false positives)?</a:t>
-            </a:r>
-          </a:p>
-          <a:p>
-            <a:endParaRPr lang="en-US" dirty="0"/>
+              <a:t>Forcing errors in Ally (using sample files)</a:t>
+            </a:r>
+          </a:p>
+          <a:p>
+            <a:pPr marL="625475" lvl="1" indent="-342900">
+              <a:buFont typeface="+mj-lt"/>
+              <a:buAutoNum type="arabicPeriod"/>
+            </a:pPr>
+            <a:r>
+              <a:rPr lang="en-US" dirty="0"/>
+              <a:t>Fixing issues (fixing sample files)</a:t>
+            </a:r>
           </a:p>
         </p:txBody>
       </p:sp>
@@ -13388,6 +13584,9 @@
               <a:ext uri="{FF2B5EF4-FFF2-40B4-BE49-F238E27FC236}">
                 <a16:creationId xmlns:a16="http://schemas.microsoft.com/office/drawing/2014/main" id="{EBF16CA2-8D94-C976-D306-EBCC79A105EC}"/>
               </a:ext>
+              <a:ext uri="{C183D7F6-B498-43B3-948B-1728B52AA6E4}">
+                <adec:decorative xmlns:adec="http://schemas.microsoft.com/office/drawing/2017/decorative" val="1"/>
+              </a:ext>
             </a:extLst>
           </p:cNvPr>
           <p:cNvSpPr>
@@ -13415,6 +13614,5509 @@
     <p:extLst>
       <p:ext uri="{BB962C8B-B14F-4D97-AF65-F5344CB8AC3E}">
         <p14:creationId xmlns:p14="http://schemas.microsoft.com/office/powerpoint/2010/main" val="48182066"/>
+      </p:ext>
+    </p:extLst>
+  </p:cSld>
+  <p:clrMapOvr>
+    <a:masterClrMapping/>
+  </p:clrMapOvr>
+</p:sld>
+</file>
+
+<file path=ppt/slides/slide25.xml><?xml version="1.0" encoding="utf-8"?>
+<p:sld xmlns:a="http://schemas.openxmlformats.org/drawingml/2006/main" xmlns:r="http://schemas.openxmlformats.org/officeDocument/2006/relationships" xmlns:p="http://schemas.openxmlformats.org/presentationml/2006/main">
+  <p:cSld>
+    <p:spTree>
+      <p:nvGrpSpPr>
+        <p:cNvPr id="1" name=""/>
+        <p:cNvGrpSpPr/>
+        <p:nvPr/>
+      </p:nvGrpSpPr>
+      <p:grpSpPr>
+        <a:xfrm>
+          <a:off x="0" y="0"/>
+          <a:ext cx="0" cy="0"/>
+          <a:chOff x="0" y="0"/>
+          <a:chExt cx="0" cy="0"/>
+        </a:xfrm>
+      </p:grpSpPr>
+      <p:sp>
+        <p:nvSpPr>
+          <p:cNvPr id="2" name="Title 1">
+            <a:extLst>
+              <a:ext uri="{FF2B5EF4-FFF2-40B4-BE49-F238E27FC236}">
+                <a16:creationId xmlns:a16="http://schemas.microsoft.com/office/drawing/2014/main" id="{125B2A20-FC07-4AEB-BD90-116DFD11BE17}"/>
+              </a:ext>
+            </a:extLst>
+          </p:cNvPr>
+          <p:cNvSpPr>
+            <a:spLocks noGrp="1"/>
+          </p:cNvSpPr>
+          <p:nvPr>
+            <p:ph type="title"/>
+          </p:nvPr>
+        </p:nvSpPr>
+        <p:spPr/>
+        <p:txBody>
+          <a:bodyPr/>
+          <a:lstStyle/>
+          <a:p>
+            <a:r>
+              <a:rPr lang="en-US" dirty="0"/>
+              <a:t>Overview</a:t>
+            </a:r>
+          </a:p>
+        </p:txBody>
+      </p:sp>
+      <p:sp>
+        <p:nvSpPr>
+          <p:cNvPr id="3" name="Content Placeholder 2">
+            <a:extLst>
+              <a:ext uri="{FF2B5EF4-FFF2-40B4-BE49-F238E27FC236}">
+                <a16:creationId xmlns:a16="http://schemas.microsoft.com/office/drawing/2014/main" id="{0FD81D2C-9244-5020-F0AA-4C048A1AFC70}"/>
+              </a:ext>
+            </a:extLst>
+          </p:cNvPr>
+          <p:cNvSpPr>
+            <a:spLocks noGrp="1"/>
+          </p:cNvSpPr>
+          <p:nvPr>
+            <p:ph sz="half" idx="1"/>
+          </p:nvPr>
+        </p:nvSpPr>
+        <p:spPr/>
+        <p:txBody>
+          <a:bodyPr/>
+          <a:lstStyle/>
+          <a:p>
+            <a:pPr marL="0" indent="0">
+              <a:buNone/>
+            </a:pPr>
+            <a:r>
+              <a:rPr lang="en-US" b="1" dirty="0"/>
+              <a:t>Concept</a:t>
+            </a:r>
+          </a:p>
+          <a:p>
+            <a:pPr marL="346075" indent="-227013"/>
+            <a:r>
+              <a:rPr lang="en-US" sz="1400" dirty="0"/>
+              <a:t>Images, graphics, and non-text content need text descriptions so screen readers can convey meaning to students who cannot see them.</a:t>
+            </a:r>
+          </a:p>
+          <a:p>
+            <a:pPr marL="0" indent="0">
+              <a:spcBef>
+                <a:spcPts val="1000"/>
+              </a:spcBef>
+              <a:buNone/>
+            </a:pPr>
+            <a:r>
+              <a:rPr lang="en-US" b="1" dirty="0"/>
+              <a:t>Severity and likelihood</a:t>
+            </a:r>
+          </a:p>
+          <a:p>
+            <a:pPr marL="346075" indent="-227013"/>
+            <a:r>
+              <a:rPr lang="en-US" sz="1400" dirty="0"/>
+              <a:t>High likelihood</a:t>
+            </a:r>
+          </a:p>
+          <a:p>
+            <a:pPr marL="346075" indent="-227013"/>
+            <a:r>
+              <a:rPr lang="en-US" sz="1400" dirty="0"/>
+              <a:t>High severity</a:t>
+            </a:r>
+          </a:p>
+        </p:txBody>
+      </p:sp>
+      <p:sp>
+        <p:nvSpPr>
+          <p:cNvPr id="6" name="Content Placeholder 5">
+            <a:extLst>
+              <a:ext uri="{FF2B5EF4-FFF2-40B4-BE49-F238E27FC236}">
+                <a16:creationId xmlns:a16="http://schemas.microsoft.com/office/drawing/2014/main" id="{98DF5660-44DB-E6D4-39B9-90A1D39B3A37}"/>
+              </a:ext>
+            </a:extLst>
+          </p:cNvPr>
+          <p:cNvSpPr>
+            <a:spLocks noGrp="1"/>
+          </p:cNvSpPr>
+          <p:nvPr>
+            <p:ph sz="half" idx="2"/>
+          </p:nvPr>
+        </p:nvSpPr>
+        <p:spPr/>
+        <p:txBody>
+          <a:bodyPr/>
+          <a:lstStyle/>
+          <a:p>
+            <a:pPr marL="0" indent="0">
+              <a:buNone/>
+            </a:pPr>
+            <a:r>
+              <a:rPr lang="en-US" b="1" dirty="0"/>
+              <a:t>What content gets tested?</a:t>
+            </a:r>
+          </a:p>
+          <a:p>
+            <a:pPr marL="346075" indent="-227013"/>
+            <a:r>
+              <a:rPr lang="en-US" sz="1400" dirty="0"/>
+              <a:t>Word documents</a:t>
+            </a:r>
+          </a:p>
+          <a:p>
+            <a:pPr marL="346075" indent="-227013"/>
+            <a:r>
+              <a:rPr lang="en-US" sz="1400" dirty="0"/>
+              <a:t>PowerPoint presentations</a:t>
+            </a:r>
+          </a:p>
+          <a:p>
+            <a:pPr marL="346075" indent="-227013"/>
+            <a:r>
+              <a:rPr lang="en-US" sz="1400" dirty="0"/>
+              <a:t>PDF documents</a:t>
+            </a:r>
+          </a:p>
+          <a:p>
+            <a:pPr marL="346075" indent="-227013"/>
+            <a:r>
+              <a:rPr lang="en-US" sz="1400" dirty="0"/>
+              <a:t>Canvas Rich Content Editor (RCE)</a:t>
+            </a:r>
+          </a:p>
+          <a:p>
+            <a:pPr marL="346075" indent="-227013"/>
+            <a:r>
+              <a:rPr lang="en-US" sz="1400" dirty="0"/>
+              <a:t>Image uploads</a:t>
+            </a:r>
+          </a:p>
+          <a:p>
+            <a:pPr marL="0" indent="0">
+              <a:spcBef>
+                <a:spcPts val="1000"/>
+              </a:spcBef>
+              <a:buNone/>
+            </a:pPr>
+            <a:r>
+              <a:rPr lang="en-US" sz="1400" b="1" dirty="0"/>
+              <a:t>Associated WCAG</a:t>
+            </a:r>
+          </a:p>
+          <a:p>
+            <a:pPr marL="346075" indent="-227013"/>
+            <a:r>
+              <a:rPr lang="en-US" sz="1200" dirty="0">
+                <a:hlinkClick r:id="rId2"/>
+              </a:rPr>
+              <a:t>SC 1.1.1:Non-text Content (Level A)</a:t>
+            </a:r>
+            <a:endParaRPr lang="en-US" sz="1200" dirty="0"/>
+          </a:p>
+        </p:txBody>
+      </p:sp>
+      <p:sp>
+        <p:nvSpPr>
+          <p:cNvPr id="4" name="Footer Placeholder 3">
+            <a:extLst>
+              <a:ext uri="{FF2B5EF4-FFF2-40B4-BE49-F238E27FC236}">
+                <a16:creationId xmlns:a16="http://schemas.microsoft.com/office/drawing/2014/main" id="{F2BD070D-C68F-54E5-310E-EF9AE74F75EC}"/>
+              </a:ext>
+            </a:extLst>
+          </p:cNvPr>
+          <p:cNvSpPr>
+            <a:spLocks noGrp="1"/>
+          </p:cNvSpPr>
+          <p:nvPr>
+            <p:ph type="ftr" sz="quarter" idx="3"/>
+          </p:nvPr>
+        </p:nvSpPr>
+        <p:spPr/>
+        <p:txBody>
+          <a:bodyPr/>
+          <a:lstStyle/>
+          <a:p>
+            <a:r>
+              <a:rPr lang="en-US"/>
+              <a:t>Getting to 100: Fixing Your Anthology Ally Errors</a:t>
+            </a:r>
+            <a:endParaRPr lang="en-US" dirty="0"/>
+          </a:p>
+        </p:txBody>
+      </p:sp>
+      <p:sp>
+        <p:nvSpPr>
+          <p:cNvPr id="5" name="Slide Number Placeholder 4">
+            <a:extLst>
+              <a:ext uri="{FF2B5EF4-FFF2-40B4-BE49-F238E27FC236}">
+                <a16:creationId xmlns:a16="http://schemas.microsoft.com/office/drawing/2014/main" id="{3440425A-CABC-D91C-1A34-605C39540B55}"/>
+              </a:ext>
+            </a:extLst>
+          </p:cNvPr>
+          <p:cNvSpPr>
+            <a:spLocks noGrp="1"/>
+          </p:cNvSpPr>
+          <p:nvPr>
+            <p:ph type="sldNum" sz="quarter" idx="4"/>
+          </p:nvPr>
+        </p:nvSpPr>
+        <p:spPr/>
+        <p:txBody>
+          <a:bodyPr/>
+          <a:lstStyle/>
+          <a:p>
+            <a:fld id="{E2D72577-C5EA-2248-880D-8FE657DD8266}" type="slidenum">
+              <a:rPr lang="en-US" smtClean="0"/>
+              <a:pPr/>
+              <a:t>25</a:t>
+            </a:fld>
+            <a:endParaRPr lang="en-US"/>
+          </a:p>
+        </p:txBody>
+      </p:sp>
+    </p:spTree>
+    <p:extLst>
+      <p:ext uri="{BB962C8B-B14F-4D97-AF65-F5344CB8AC3E}">
+        <p14:creationId xmlns:p14="http://schemas.microsoft.com/office/powerpoint/2010/main" val="3459773592"/>
+      </p:ext>
+    </p:extLst>
+  </p:cSld>
+  <p:clrMapOvr>
+    <a:masterClrMapping/>
+  </p:clrMapOvr>
+</p:sld>
+</file>
+
+<file path=ppt/slides/slide26.xml><?xml version="1.0" encoding="utf-8"?>
+<p:sld xmlns:a="http://schemas.openxmlformats.org/drawingml/2006/main" xmlns:r="http://schemas.openxmlformats.org/officeDocument/2006/relationships" xmlns:p="http://schemas.openxmlformats.org/presentationml/2006/main">
+  <p:cSld>
+    <p:spTree>
+      <p:nvGrpSpPr>
+        <p:cNvPr id="1" name=""/>
+        <p:cNvGrpSpPr/>
+        <p:nvPr/>
+      </p:nvGrpSpPr>
+      <p:grpSpPr>
+        <a:xfrm>
+          <a:off x="0" y="0"/>
+          <a:ext cx="0" cy="0"/>
+          <a:chOff x="0" y="0"/>
+          <a:chExt cx="0" cy="0"/>
+        </a:xfrm>
+      </p:grpSpPr>
+      <p:sp>
+        <p:nvSpPr>
+          <p:cNvPr id="2" name="Title 1">
+            <a:extLst>
+              <a:ext uri="{FF2B5EF4-FFF2-40B4-BE49-F238E27FC236}">
+                <a16:creationId xmlns:a16="http://schemas.microsoft.com/office/drawing/2014/main" id="{036CAFC0-8CBD-A47B-F5CF-8699B80A705C}"/>
+              </a:ext>
+            </a:extLst>
+          </p:cNvPr>
+          <p:cNvSpPr>
+            <a:spLocks noGrp="1"/>
+          </p:cNvSpPr>
+          <p:nvPr>
+            <p:ph type="title"/>
+          </p:nvPr>
+        </p:nvSpPr>
+        <p:spPr/>
+        <p:txBody>
+          <a:bodyPr/>
+          <a:lstStyle/>
+          <a:p>
+            <a:r>
+              <a:rPr lang="en-US" dirty="0"/>
+              <a:t>Student impact – alt text</a:t>
+            </a:r>
+          </a:p>
+        </p:txBody>
+      </p:sp>
+      <p:pic>
+        <p:nvPicPr>
+          <p:cNvPr id="8" name="Content Placeholder 7" descr="Grouped bar graph comparing Quiz 1 and Quiz 2 averages across three sections. Section 1: 85% and 82%. Section 2: 83% and 81%. Section 3: 85% and 82%.”">
+            <a:extLst>
+              <a:ext uri="{FF2B5EF4-FFF2-40B4-BE49-F238E27FC236}">
+                <a16:creationId xmlns:a16="http://schemas.microsoft.com/office/drawing/2014/main" id="{DB631E34-D482-D899-541F-A700D0BF4244}"/>
+              </a:ext>
+            </a:extLst>
+          </p:cNvPr>
+          <p:cNvPicPr>
+            <a:picLocks noGrp="1" noChangeAspect="1"/>
+          </p:cNvPicPr>
+          <p:nvPr>
+            <p:ph sz="half" idx="1"/>
+          </p:nvPr>
+        </p:nvPicPr>
+        <p:blipFill>
+          <a:blip r:embed="rId6">
+            <a:extLst>
+              <a:ext uri="{28A0092B-C50C-407E-A947-70E740481C1C}">
+                <a14:useLocalDpi xmlns:a14="http://schemas.microsoft.com/office/drawing/2010/main" val="0"/>
+              </a:ext>
+            </a:extLst>
+          </a:blip>
+          <a:stretch>
+            <a:fillRect/>
+          </a:stretch>
+        </p:blipFill>
+        <p:spPr bwMode="auto">
+          <a:xfrm>
+            <a:off x="457200" y="1245642"/>
+            <a:ext cx="3278188" cy="1672007"/>
+          </a:xfrm>
+          <a:prstGeom prst="rect">
+            <a:avLst/>
+          </a:prstGeom>
+          <a:noFill/>
+          <a:ln>
+            <a:noFill/>
+          </a:ln>
+          <a:extLst>
+            <a:ext uri="{909E8E84-426E-40dd-AFC4-6F175D3DCCD1}">
+              <a14:hiddenFill xmlns:a14="http://schemas.microsoft.com/office/drawing/2010/main" xmlns="">
+                <a:solidFill>
+                  <a:srgbClr val="FFFFFF"/>
+                </a:solidFill>
+              </a14:hiddenFill>
+            </a:ext>
+            <a:ext uri="{91240B29-F687-4f45-9708-019B960494DF}">
+              <a14:hiddenLine xmlns:a14="http://schemas.microsoft.com/office/drawing/2010/main" xmlns="" w="9525">
+                <a:solidFill>
+                  <a:srgbClr val="000000"/>
+                </a:solidFill>
+                <a:miter lim="800000"/>
+                <a:headEnd/>
+                <a:tailEnd/>
+              </a14:hiddenLine>
+            </a:ext>
+            <a:ext uri="{FAA26D3D-D897-4be2-8F04-BA451C77F1D7}">
+              <ma14:placeholderFlag xmlns:ma14="http://schemas.microsoft.com/office/mac/drawingml/2011/main" xmlns="" val="1"/>
+            </a:ext>
+          </a:extLst>
+        </p:spPr>
+      </p:pic>
+      <p:sp>
+        <p:nvSpPr>
+          <p:cNvPr id="13" name="Content Placeholder 3">
+            <a:extLst>
+              <a:ext uri="{FF2B5EF4-FFF2-40B4-BE49-F238E27FC236}">
+                <a16:creationId xmlns:a16="http://schemas.microsoft.com/office/drawing/2014/main" id="{F2B349B7-F420-9D26-1041-C7A688807419}"/>
+              </a:ext>
+            </a:extLst>
+          </p:cNvPr>
+          <p:cNvSpPr txBox="1">
+            <a:spLocks/>
+          </p:cNvSpPr>
+          <p:nvPr/>
+        </p:nvSpPr>
+        <p:spPr bwMode="auto">
+          <a:xfrm>
+            <a:off x="462396" y="2971800"/>
+            <a:ext cx="3257550" cy="1595005"/>
+          </a:xfrm>
+          <a:prstGeom prst="rect">
+            <a:avLst/>
+          </a:prstGeom>
+          <a:noFill/>
+          <a:ln>
+            <a:noFill/>
+          </a:ln>
+          <a:extLst>
+            <a:ext uri="{909E8E84-426E-40dd-AFC4-6F175D3DCCD1}">
+              <a14:hiddenFill xmlns:a14="http://schemas.microsoft.com/office/drawing/2010/main" xmlns="">
+                <a:solidFill>
+                  <a:srgbClr val="FFFFFF"/>
+                </a:solidFill>
+              </a14:hiddenFill>
+            </a:ext>
+            <a:ext uri="{91240B29-F687-4f45-9708-019B960494DF}">
+              <a14:hiddenLine xmlns:a14="http://schemas.microsoft.com/office/drawing/2010/main" xmlns="" w="9525">
+                <a:solidFill>
+                  <a:srgbClr val="000000"/>
+                </a:solidFill>
+                <a:miter lim="800000"/>
+                <a:headEnd/>
+                <a:tailEnd/>
+              </a14:hiddenLine>
+            </a:ext>
+            <a:ext uri="{FAA26D3D-D897-4be2-8F04-BA451C77F1D7}">
+              <ma14:placeholderFlag xmlns:ma14="http://schemas.microsoft.com/office/mac/drawingml/2011/main" xmlns="" val="1"/>
+            </a:ext>
+          </a:extLst>
+        </p:spPr>
+        <p:txBody>
+          <a:bodyPr vert="horz" wrap="square" lIns="91440" tIns="45720" rIns="91440" bIns="45720" numCol="1" anchor="t" anchorCtr="0" compatLnSpc="1">
+            <a:prstTxWarp prst="textNoShape">
+              <a:avLst/>
+            </a:prstTxWarp>
+          </a:bodyPr>
+          <a:lstStyle>
+            <a:lvl1pPr marL="285750" indent="-285750" algn="l" rtl="0" eaLnBrk="1" fontAlgn="base" hangingPunct="1">
+              <a:spcBef>
+                <a:spcPts val="0"/>
+              </a:spcBef>
+              <a:spcAft>
+                <a:spcPts val="800"/>
+              </a:spcAft>
+              <a:buClr>
+                <a:schemeClr val="tx1"/>
+              </a:buClr>
+              <a:buFont typeface="Arial" panose="020B0604020202020204" pitchFamily="34" charset="0"/>
+              <a:buChar char="•"/>
+              <a:defRPr lang="en-US" sz="1600" dirty="0">
+                <a:solidFill>
+                  <a:schemeClr val="tx1">
+                    <a:lumMod val="95000"/>
+                    <a:lumOff val="5000"/>
+                  </a:schemeClr>
+                </a:solidFill>
+                <a:latin typeface="Aptos" panose="020B0004020202020204" pitchFamily="34" charset="0"/>
+                <a:ea typeface="Aptos" panose="020B0004020202020204" pitchFamily="34" charset="0"/>
+                <a:cs typeface="Aptos" panose="020B0004020202020204" pitchFamily="34" charset="0"/>
+              </a:defRPr>
+            </a:lvl1pPr>
+            <a:lvl2pPr marL="742950" indent="-285750" algn="l" rtl="0" eaLnBrk="1" fontAlgn="base" hangingPunct="1">
+              <a:spcBef>
+                <a:spcPts val="0"/>
+              </a:spcBef>
+              <a:spcAft>
+                <a:spcPts val="800"/>
+              </a:spcAft>
+              <a:buClr>
+                <a:schemeClr val="tx1"/>
+              </a:buClr>
+              <a:buFont typeface="Arial" panose="020B0604020202020204" pitchFamily="34" charset="0"/>
+              <a:buChar char="•"/>
+              <a:defRPr lang="en-US" sz="1600" dirty="0">
+                <a:solidFill>
+                  <a:schemeClr val="tx1">
+                    <a:lumMod val="95000"/>
+                    <a:lumOff val="5000"/>
+                  </a:schemeClr>
+                </a:solidFill>
+                <a:latin typeface="Aptos" panose="020B0004020202020204" pitchFamily="34" charset="0"/>
+                <a:ea typeface="Geneva" charset="0"/>
+                <a:cs typeface="Aptos" panose="020B0004020202020204" pitchFamily="34" charset="0"/>
+              </a:defRPr>
+            </a:lvl2pPr>
+            <a:lvl3pPr marL="1200150" indent="-285750" algn="l" rtl="0" eaLnBrk="1" fontAlgn="base" hangingPunct="1">
+              <a:spcBef>
+                <a:spcPts val="0"/>
+              </a:spcBef>
+              <a:spcAft>
+                <a:spcPts val="800"/>
+              </a:spcAft>
+              <a:buClr>
+                <a:schemeClr val="tx1"/>
+              </a:buClr>
+              <a:buFont typeface="Arial" panose="020B0604020202020204" pitchFamily="34" charset="0"/>
+              <a:buChar char="•"/>
+              <a:defRPr lang="en-US" sz="1600" dirty="0">
+                <a:solidFill>
+                  <a:schemeClr val="tx1">
+                    <a:lumMod val="95000"/>
+                    <a:lumOff val="5000"/>
+                  </a:schemeClr>
+                </a:solidFill>
+                <a:latin typeface="Aptos" panose="020B0004020202020204" pitchFamily="34" charset="0"/>
+                <a:ea typeface="Geneva" charset="0"/>
+                <a:cs typeface="Aptos" panose="020B0004020202020204" pitchFamily="34" charset="0"/>
+              </a:defRPr>
+            </a:lvl3pPr>
+            <a:lvl4pPr marL="1543050" indent="-171450" algn="l" rtl="0" eaLnBrk="1" fontAlgn="base" hangingPunct="1">
+              <a:spcBef>
+                <a:spcPts val="0"/>
+              </a:spcBef>
+              <a:spcAft>
+                <a:spcPts val="800"/>
+              </a:spcAft>
+              <a:buClr>
+                <a:schemeClr val="tx1"/>
+              </a:buClr>
+              <a:buFont typeface="Arial" panose="020B0604020202020204" pitchFamily="34" charset="0"/>
+              <a:buChar char="•"/>
+              <a:defRPr lang="en-US" sz="1600" dirty="0">
+                <a:solidFill>
+                  <a:schemeClr val="tx1">
+                    <a:lumMod val="95000"/>
+                    <a:lumOff val="5000"/>
+                  </a:schemeClr>
+                </a:solidFill>
+                <a:latin typeface="Aptos" panose="020B0004020202020204" pitchFamily="34" charset="0"/>
+                <a:ea typeface="Geneva" charset="0"/>
+                <a:cs typeface="Aptos" panose="020B0004020202020204" pitchFamily="34" charset="0"/>
+              </a:defRPr>
+            </a:lvl4pPr>
+            <a:lvl5pPr marL="2000250" indent="-171450" algn="l" rtl="0" eaLnBrk="1" fontAlgn="base" hangingPunct="1">
+              <a:spcBef>
+                <a:spcPts val="0"/>
+              </a:spcBef>
+              <a:spcAft>
+                <a:spcPts val="800"/>
+              </a:spcAft>
+              <a:buClr>
+                <a:schemeClr val="tx1"/>
+              </a:buClr>
+              <a:buFont typeface="Arial" panose="020B0604020202020204" pitchFamily="34" charset="0"/>
+              <a:buChar char="•"/>
+              <a:defRPr lang="en-US" sz="1600" dirty="0">
+                <a:solidFill>
+                  <a:schemeClr val="tx1">
+                    <a:lumMod val="95000"/>
+                    <a:lumOff val="5000"/>
+                  </a:schemeClr>
+                </a:solidFill>
+                <a:latin typeface="Aptos" panose="020B0004020202020204" pitchFamily="34" charset="0"/>
+                <a:ea typeface="Geneva" charset="0"/>
+                <a:cs typeface="Aptos" panose="020B0004020202020204" pitchFamily="34" charset="0"/>
+              </a:defRPr>
+            </a:lvl5pPr>
+            <a:lvl6pPr marL="2514600" indent="-228600" algn="l" rtl="0" eaLnBrk="1" fontAlgn="base" hangingPunct="1">
+              <a:spcBef>
+                <a:spcPct val="20000"/>
+              </a:spcBef>
+              <a:spcAft>
+                <a:spcPct val="0"/>
+              </a:spcAft>
+              <a:buChar char="»"/>
+              <a:defRPr sz="1400">
+                <a:solidFill>
+                  <a:srgbClr val="5F5F5F"/>
+                </a:solidFill>
+                <a:latin typeface="+mn-lt"/>
+              </a:defRPr>
+            </a:lvl6pPr>
+            <a:lvl7pPr marL="2971800" indent="-228600" algn="l" rtl="0" eaLnBrk="1" fontAlgn="base" hangingPunct="1">
+              <a:spcBef>
+                <a:spcPct val="20000"/>
+              </a:spcBef>
+              <a:spcAft>
+                <a:spcPct val="0"/>
+              </a:spcAft>
+              <a:buChar char="»"/>
+              <a:defRPr sz="1400">
+                <a:solidFill>
+                  <a:srgbClr val="5F5F5F"/>
+                </a:solidFill>
+                <a:latin typeface="+mn-lt"/>
+              </a:defRPr>
+            </a:lvl7pPr>
+            <a:lvl8pPr marL="3429000" indent="-228600" algn="l" rtl="0" eaLnBrk="1" fontAlgn="base" hangingPunct="1">
+              <a:spcBef>
+                <a:spcPct val="20000"/>
+              </a:spcBef>
+              <a:spcAft>
+                <a:spcPct val="0"/>
+              </a:spcAft>
+              <a:buChar char="»"/>
+              <a:defRPr sz="1400">
+                <a:solidFill>
+                  <a:srgbClr val="5F5F5F"/>
+                </a:solidFill>
+                <a:latin typeface="+mn-lt"/>
+              </a:defRPr>
+            </a:lvl8pPr>
+            <a:lvl9pPr marL="3886200" indent="-228600" algn="l" rtl="0" eaLnBrk="1" fontAlgn="base" hangingPunct="1">
+              <a:spcBef>
+                <a:spcPct val="20000"/>
+              </a:spcBef>
+              <a:spcAft>
+                <a:spcPct val="0"/>
+              </a:spcAft>
+              <a:buChar char="»"/>
+              <a:defRPr sz="1400">
+                <a:solidFill>
+                  <a:srgbClr val="5F5F5F"/>
+                </a:solidFill>
+                <a:latin typeface="+mn-lt"/>
+              </a:defRPr>
+            </a:lvl9pPr>
+          </a:lstStyle>
+          <a:p>
+            <a:pPr marL="0" indent="0">
+              <a:buFont typeface="Arial" panose="020B0604020202020204" pitchFamily="34" charset="0"/>
+              <a:buNone/>
+            </a:pPr>
+            <a:r>
+              <a:rPr lang="en-US" sz="1400" b="1" kern="0" dirty="0"/>
+              <a:t>Alt text should be</a:t>
+            </a:r>
+          </a:p>
+          <a:p>
+            <a:pPr marL="0" indent="0">
+              <a:buNone/>
+            </a:pPr>
+            <a:r>
+              <a:rPr lang="en-US" sz="1200" dirty="0"/>
+              <a:t>“Grouped bar graph comparing Quiz 1 and Quiz 2 averages across three sections. Section 1: 85% and 82%. Section 2: 83% and 81%. Section 3: 85% and 82%.”</a:t>
+            </a:r>
+            <a:endParaRPr lang="en-US" sz="1200" kern="0" dirty="0"/>
+          </a:p>
+          <a:p>
+            <a:pPr marL="0" indent="0">
+              <a:buFont typeface="Arial" panose="020B0604020202020204" pitchFamily="34" charset="0"/>
+              <a:buNone/>
+            </a:pPr>
+            <a:endParaRPr lang="en-US" sz="1400" kern="0" dirty="0"/>
+          </a:p>
+        </p:txBody>
+      </p:sp>
+      <p:pic>
+        <p:nvPicPr>
+          <p:cNvPr id="10" name="word-alt-text-before" descr="No alt text screen reader preview.">
+            <a:hlinkClick r:id="" action="ppaction://media"/>
+            <a:extLst>
+              <a:ext uri="{FF2B5EF4-FFF2-40B4-BE49-F238E27FC236}">
+                <a16:creationId xmlns:a16="http://schemas.microsoft.com/office/drawing/2014/main" id="{27FF4884-3F44-D7FB-C15E-6638F378B65A}"/>
+              </a:ext>
+            </a:extLst>
+          </p:cNvPr>
+          <p:cNvPicPr>
+            <a:picLocks noChangeAspect="1"/>
+          </p:cNvPicPr>
+          <p:nvPr>
+            <a:audioFile r:link="rId2"/>
+            <p:extLst>
+              <p:ext uri="{DAA4B4D4-6D71-4841-9C94-3DE7FCFB9230}">
+                <p14:media xmlns:p14="http://schemas.microsoft.com/office/powerpoint/2010/main" r:embed="rId1">
+                  <p14:extLst>
+                    <p:ext uri="{3AFAAA56-56D3-431D-BCD4-E75A35582382}">
+                      <p173:tracksInfo xmlns:p173="http://schemas.microsoft.com/office/powerpoint/2017/3/main" displayLoc="slide">
+                        <p173:trackLst>
+                          <p173:track id="{3968BD7F-90CE-F04C-819F-F9C679D5E5B9}" label="English caption" lang="en-us" r:embed="rId7"/>
+                        </p173:trackLst>
+                      </p173:tracksInfo>
+                    </p:ext>
+                  </p14:extLst>
+                </p14:media>
+              </p:ext>
+            </p:extLst>
+          </p:nvPr>
+        </p:nvPicPr>
+        <p:blipFill>
+          <a:blip r:embed="rId8">
+            <a:duotone>
+              <a:prstClr val="black"/>
+              <a:schemeClr val="accent2">
+                <a:tint val="45000"/>
+                <a:satMod val="400000"/>
+              </a:schemeClr>
+            </a:duotone>
+          </a:blip>
+          <a:stretch>
+            <a:fillRect/>
+          </a:stretch>
+        </p:blipFill>
+        <p:spPr>
+          <a:xfrm>
+            <a:off x="4159105" y="1246475"/>
+            <a:ext cx="812800" cy="812800"/>
+          </a:xfrm>
+          <a:prstGeom prst="rect">
+            <a:avLst/>
+          </a:prstGeom>
+          <a:ln>
+            <a:solidFill>
+              <a:schemeClr val="tx1"/>
+            </a:solidFill>
+          </a:ln>
+        </p:spPr>
+      </p:pic>
+      <p:sp>
+        <p:nvSpPr>
+          <p:cNvPr id="15" name="Content Placeholder 3">
+            <a:extLst>
+              <a:ext uri="{FF2B5EF4-FFF2-40B4-BE49-F238E27FC236}">
+                <a16:creationId xmlns:a16="http://schemas.microsoft.com/office/drawing/2014/main" id="{5173A117-9E6A-B78A-4036-CFA12D826E41}"/>
+              </a:ext>
+            </a:extLst>
+          </p:cNvPr>
+          <p:cNvSpPr txBox="1">
+            <a:spLocks/>
+          </p:cNvSpPr>
+          <p:nvPr/>
+        </p:nvSpPr>
+        <p:spPr bwMode="auto">
+          <a:xfrm>
+            <a:off x="5018809" y="1153391"/>
+            <a:ext cx="2434590" cy="1023505"/>
+          </a:xfrm>
+          <a:prstGeom prst="rect">
+            <a:avLst/>
+          </a:prstGeom>
+          <a:noFill/>
+          <a:ln>
+            <a:noFill/>
+          </a:ln>
+          <a:extLst>
+            <a:ext uri="{909E8E84-426E-40dd-AFC4-6F175D3DCCD1}">
+              <a14:hiddenFill xmlns:a14="http://schemas.microsoft.com/office/drawing/2010/main" xmlns="">
+                <a:solidFill>
+                  <a:srgbClr val="FFFFFF"/>
+                </a:solidFill>
+              </a14:hiddenFill>
+            </a:ext>
+            <a:ext uri="{91240B29-F687-4f45-9708-019B960494DF}">
+              <a14:hiddenLine xmlns:a14="http://schemas.microsoft.com/office/drawing/2010/main" xmlns="" w="9525">
+                <a:solidFill>
+                  <a:srgbClr val="000000"/>
+                </a:solidFill>
+                <a:miter lim="800000"/>
+                <a:headEnd/>
+                <a:tailEnd/>
+              </a14:hiddenLine>
+            </a:ext>
+            <a:ext uri="{FAA26D3D-D897-4be2-8F04-BA451C77F1D7}">
+              <ma14:placeholderFlag xmlns:ma14="http://schemas.microsoft.com/office/mac/drawingml/2011/main" xmlns="" val="1"/>
+            </a:ext>
+          </a:extLst>
+        </p:spPr>
+        <p:txBody>
+          <a:bodyPr vert="horz" wrap="square" lIns="91440" tIns="45720" rIns="91440" bIns="45720" numCol="1" anchor="t" anchorCtr="0" compatLnSpc="1">
+            <a:prstTxWarp prst="textNoShape">
+              <a:avLst/>
+            </a:prstTxWarp>
+          </a:bodyPr>
+          <a:lstStyle>
+            <a:lvl1pPr marL="285750" indent="-285750" algn="l" rtl="0" eaLnBrk="1" fontAlgn="base" hangingPunct="1">
+              <a:spcBef>
+                <a:spcPts val="0"/>
+              </a:spcBef>
+              <a:spcAft>
+                <a:spcPts val="800"/>
+              </a:spcAft>
+              <a:buClr>
+                <a:schemeClr val="tx1"/>
+              </a:buClr>
+              <a:buFont typeface="Arial" panose="020B0604020202020204" pitchFamily="34" charset="0"/>
+              <a:buChar char="•"/>
+              <a:defRPr lang="en-US" sz="1600" dirty="0">
+                <a:solidFill>
+                  <a:schemeClr val="tx1">
+                    <a:lumMod val="95000"/>
+                    <a:lumOff val="5000"/>
+                  </a:schemeClr>
+                </a:solidFill>
+                <a:latin typeface="Aptos" panose="020B0004020202020204" pitchFamily="34" charset="0"/>
+                <a:ea typeface="Aptos" panose="020B0004020202020204" pitchFamily="34" charset="0"/>
+                <a:cs typeface="Aptos" panose="020B0004020202020204" pitchFamily="34" charset="0"/>
+              </a:defRPr>
+            </a:lvl1pPr>
+            <a:lvl2pPr marL="742950" indent="-285750" algn="l" rtl="0" eaLnBrk="1" fontAlgn="base" hangingPunct="1">
+              <a:spcBef>
+                <a:spcPts val="0"/>
+              </a:spcBef>
+              <a:spcAft>
+                <a:spcPts val="800"/>
+              </a:spcAft>
+              <a:buClr>
+                <a:schemeClr val="tx1"/>
+              </a:buClr>
+              <a:buFont typeface="Arial" panose="020B0604020202020204" pitchFamily="34" charset="0"/>
+              <a:buChar char="•"/>
+              <a:defRPr lang="en-US" sz="1600" dirty="0">
+                <a:solidFill>
+                  <a:schemeClr val="tx1">
+                    <a:lumMod val="95000"/>
+                    <a:lumOff val="5000"/>
+                  </a:schemeClr>
+                </a:solidFill>
+                <a:latin typeface="Aptos" panose="020B0004020202020204" pitchFamily="34" charset="0"/>
+                <a:ea typeface="Geneva" charset="0"/>
+                <a:cs typeface="Aptos" panose="020B0004020202020204" pitchFamily="34" charset="0"/>
+              </a:defRPr>
+            </a:lvl2pPr>
+            <a:lvl3pPr marL="1200150" indent="-285750" algn="l" rtl="0" eaLnBrk="1" fontAlgn="base" hangingPunct="1">
+              <a:spcBef>
+                <a:spcPts val="0"/>
+              </a:spcBef>
+              <a:spcAft>
+                <a:spcPts val="800"/>
+              </a:spcAft>
+              <a:buClr>
+                <a:schemeClr val="tx1"/>
+              </a:buClr>
+              <a:buFont typeface="Arial" panose="020B0604020202020204" pitchFamily="34" charset="0"/>
+              <a:buChar char="•"/>
+              <a:defRPr lang="en-US" sz="1600" dirty="0">
+                <a:solidFill>
+                  <a:schemeClr val="tx1">
+                    <a:lumMod val="95000"/>
+                    <a:lumOff val="5000"/>
+                  </a:schemeClr>
+                </a:solidFill>
+                <a:latin typeface="Aptos" panose="020B0004020202020204" pitchFamily="34" charset="0"/>
+                <a:ea typeface="Geneva" charset="0"/>
+                <a:cs typeface="Aptos" panose="020B0004020202020204" pitchFamily="34" charset="0"/>
+              </a:defRPr>
+            </a:lvl3pPr>
+            <a:lvl4pPr marL="1543050" indent="-171450" algn="l" rtl="0" eaLnBrk="1" fontAlgn="base" hangingPunct="1">
+              <a:spcBef>
+                <a:spcPts val="0"/>
+              </a:spcBef>
+              <a:spcAft>
+                <a:spcPts val="800"/>
+              </a:spcAft>
+              <a:buClr>
+                <a:schemeClr val="tx1"/>
+              </a:buClr>
+              <a:buFont typeface="Arial" panose="020B0604020202020204" pitchFamily="34" charset="0"/>
+              <a:buChar char="•"/>
+              <a:defRPr lang="en-US" sz="1600" dirty="0">
+                <a:solidFill>
+                  <a:schemeClr val="tx1">
+                    <a:lumMod val="95000"/>
+                    <a:lumOff val="5000"/>
+                  </a:schemeClr>
+                </a:solidFill>
+                <a:latin typeface="Aptos" panose="020B0004020202020204" pitchFamily="34" charset="0"/>
+                <a:ea typeface="Geneva" charset="0"/>
+                <a:cs typeface="Aptos" panose="020B0004020202020204" pitchFamily="34" charset="0"/>
+              </a:defRPr>
+            </a:lvl4pPr>
+            <a:lvl5pPr marL="2000250" indent="-171450" algn="l" rtl="0" eaLnBrk="1" fontAlgn="base" hangingPunct="1">
+              <a:spcBef>
+                <a:spcPts val="0"/>
+              </a:spcBef>
+              <a:spcAft>
+                <a:spcPts val="800"/>
+              </a:spcAft>
+              <a:buClr>
+                <a:schemeClr val="tx1"/>
+              </a:buClr>
+              <a:buFont typeface="Arial" panose="020B0604020202020204" pitchFamily="34" charset="0"/>
+              <a:buChar char="•"/>
+              <a:defRPr lang="en-US" sz="1600" dirty="0">
+                <a:solidFill>
+                  <a:schemeClr val="tx1">
+                    <a:lumMod val="95000"/>
+                    <a:lumOff val="5000"/>
+                  </a:schemeClr>
+                </a:solidFill>
+                <a:latin typeface="Aptos" panose="020B0004020202020204" pitchFamily="34" charset="0"/>
+                <a:ea typeface="Geneva" charset="0"/>
+                <a:cs typeface="Aptos" panose="020B0004020202020204" pitchFamily="34" charset="0"/>
+              </a:defRPr>
+            </a:lvl5pPr>
+            <a:lvl6pPr marL="2514600" indent="-228600" algn="l" rtl="0" eaLnBrk="1" fontAlgn="base" hangingPunct="1">
+              <a:spcBef>
+                <a:spcPct val="20000"/>
+              </a:spcBef>
+              <a:spcAft>
+                <a:spcPct val="0"/>
+              </a:spcAft>
+              <a:buChar char="»"/>
+              <a:defRPr sz="1400">
+                <a:solidFill>
+                  <a:srgbClr val="5F5F5F"/>
+                </a:solidFill>
+                <a:latin typeface="+mn-lt"/>
+              </a:defRPr>
+            </a:lvl6pPr>
+            <a:lvl7pPr marL="2971800" indent="-228600" algn="l" rtl="0" eaLnBrk="1" fontAlgn="base" hangingPunct="1">
+              <a:spcBef>
+                <a:spcPct val="20000"/>
+              </a:spcBef>
+              <a:spcAft>
+                <a:spcPct val="0"/>
+              </a:spcAft>
+              <a:buChar char="»"/>
+              <a:defRPr sz="1400">
+                <a:solidFill>
+                  <a:srgbClr val="5F5F5F"/>
+                </a:solidFill>
+                <a:latin typeface="+mn-lt"/>
+              </a:defRPr>
+            </a:lvl7pPr>
+            <a:lvl8pPr marL="3429000" indent="-228600" algn="l" rtl="0" eaLnBrk="1" fontAlgn="base" hangingPunct="1">
+              <a:spcBef>
+                <a:spcPct val="20000"/>
+              </a:spcBef>
+              <a:spcAft>
+                <a:spcPct val="0"/>
+              </a:spcAft>
+              <a:buChar char="»"/>
+              <a:defRPr sz="1400">
+                <a:solidFill>
+                  <a:srgbClr val="5F5F5F"/>
+                </a:solidFill>
+                <a:latin typeface="+mn-lt"/>
+              </a:defRPr>
+            </a:lvl8pPr>
+            <a:lvl9pPr marL="3886200" indent="-228600" algn="l" rtl="0" eaLnBrk="1" fontAlgn="base" hangingPunct="1">
+              <a:spcBef>
+                <a:spcPct val="20000"/>
+              </a:spcBef>
+              <a:spcAft>
+                <a:spcPct val="0"/>
+              </a:spcAft>
+              <a:buChar char="»"/>
+              <a:defRPr sz="1400">
+                <a:solidFill>
+                  <a:srgbClr val="5F5F5F"/>
+                </a:solidFill>
+                <a:latin typeface="+mn-lt"/>
+              </a:defRPr>
+            </a:lvl9pPr>
+          </a:lstStyle>
+          <a:p>
+            <a:pPr marL="0" indent="0">
+              <a:buNone/>
+            </a:pPr>
+            <a:r>
+              <a:rPr lang="en-US" sz="1400" b="1" dirty="0"/>
+              <a:t>With no alt text </a:t>
+            </a:r>
+          </a:p>
+          <a:p>
+            <a:pPr marL="0" indent="0">
+              <a:buFont typeface="Arial" panose="020B0604020202020204" pitchFamily="34" charset="0"/>
+              <a:buNone/>
+            </a:pPr>
+            <a:r>
+              <a:rPr lang="en-US" sz="1200" kern="0" dirty="0"/>
+              <a:t>What’s happening – the screen reader reads the file name as there was no text alternative provided. </a:t>
+            </a:r>
+          </a:p>
+        </p:txBody>
+      </p:sp>
+      <p:pic>
+        <p:nvPicPr>
+          <p:cNvPr id="9" name="word-alt-text-after" descr="Good alt text screen reader preview.">
+            <a:hlinkClick r:id="" action="ppaction://media"/>
+            <a:extLst>
+              <a:ext uri="{FF2B5EF4-FFF2-40B4-BE49-F238E27FC236}">
+                <a16:creationId xmlns:a16="http://schemas.microsoft.com/office/drawing/2014/main" id="{13AE8421-A8EC-86E2-06E7-3D7EE61D32FB}"/>
+              </a:ext>
+            </a:extLst>
+          </p:cNvPr>
+          <p:cNvPicPr>
+            <a:picLocks noChangeAspect="1"/>
+          </p:cNvPicPr>
+          <p:nvPr>
+            <a:audioFile r:link="rId4"/>
+            <p:extLst>
+              <p:ext uri="{DAA4B4D4-6D71-4841-9C94-3DE7FCFB9230}">
+                <p14:media xmlns:p14="http://schemas.microsoft.com/office/powerpoint/2010/main" r:embed="rId3">
+                  <p14:extLst>
+                    <p:ext uri="{3AFAAA56-56D3-431D-BCD4-E75A35582382}">
+                      <p173:tracksInfo xmlns:p173="http://schemas.microsoft.com/office/powerpoint/2017/3/main" displayLoc="slide">
+                        <p173:trackLst>
+                          <p173:track id="{AB9BD8C9-880D-0145-B1E5-C35FC303986C}" label="" lang="en-us" r:embed="rId9"/>
+                        </p173:trackLst>
+                      </p173:tracksInfo>
+                    </p:ext>
+                  </p14:extLst>
+                </p14:media>
+              </p:ext>
+            </p:extLst>
+          </p:nvPr>
+        </p:nvPicPr>
+        <p:blipFill>
+          <a:blip r:embed="rId8">
+            <a:duotone>
+              <a:prstClr val="black"/>
+              <a:schemeClr val="accent2">
+                <a:tint val="45000"/>
+                <a:satMod val="400000"/>
+              </a:schemeClr>
+            </a:duotone>
+          </a:blip>
+          <a:stretch>
+            <a:fillRect/>
+          </a:stretch>
+        </p:blipFill>
+        <p:spPr>
+          <a:xfrm>
+            <a:off x="4159105" y="2595707"/>
+            <a:ext cx="812800" cy="812800"/>
+          </a:xfrm>
+          <a:prstGeom prst="rect">
+            <a:avLst/>
+          </a:prstGeom>
+          <a:ln>
+            <a:solidFill>
+              <a:schemeClr val="tx1"/>
+            </a:solidFill>
+          </a:ln>
+        </p:spPr>
+      </p:pic>
+      <p:sp>
+        <p:nvSpPr>
+          <p:cNvPr id="5" name="Footer Placeholder 4">
+            <a:extLst>
+              <a:ext uri="{FF2B5EF4-FFF2-40B4-BE49-F238E27FC236}">
+                <a16:creationId xmlns:a16="http://schemas.microsoft.com/office/drawing/2014/main" id="{B236F037-25F8-5235-F68E-D0FFFCE9F9D3}"/>
+              </a:ext>
+            </a:extLst>
+          </p:cNvPr>
+          <p:cNvSpPr>
+            <a:spLocks noGrp="1"/>
+          </p:cNvSpPr>
+          <p:nvPr>
+            <p:ph type="ftr" sz="quarter" idx="3"/>
+          </p:nvPr>
+        </p:nvSpPr>
+        <p:spPr/>
+        <p:txBody>
+          <a:bodyPr/>
+          <a:lstStyle/>
+          <a:p>
+            <a:r>
+              <a:rPr lang="en-US"/>
+              <a:t>Getting to 100: Fixing Your Anthology Ally Errors</a:t>
+            </a:r>
+            <a:endParaRPr lang="en-US" dirty="0"/>
+          </a:p>
+        </p:txBody>
+      </p:sp>
+      <p:sp>
+        <p:nvSpPr>
+          <p:cNvPr id="14" name="Content Placeholder 3">
+            <a:extLst>
+              <a:ext uri="{FF2B5EF4-FFF2-40B4-BE49-F238E27FC236}">
+                <a16:creationId xmlns:a16="http://schemas.microsoft.com/office/drawing/2014/main" id="{2E53870B-487B-12DB-71C8-1BFCC382CE69}"/>
+              </a:ext>
+              <a:ext uri="{C183D7F6-B498-43B3-948B-1728B52AA6E4}">
+                <adec:decorative xmlns:adec="http://schemas.microsoft.com/office/drawing/2017/decorative" val="1"/>
+              </a:ext>
+            </a:extLst>
+          </p:cNvPr>
+          <p:cNvSpPr txBox="1">
+            <a:spLocks/>
+          </p:cNvSpPr>
+          <p:nvPr/>
+        </p:nvSpPr>
+        <p:spPr bwMode="auto">
+          <a:xfrm>
+            <a:off x="5018809" y="2514600"/>
+            <a:ext cx="2434590" cy="1023505"/>
+          </a:xfrm>
+          <a:prstGeom prst="rect">
+            <a:avLst/>
+          </a:prstGeom>
+          <a:noFill/>
+          <a:ln>
+            <a:noFill/>
+          </a:ln>
+          <a:extLst>
+            <a:ext uri="{909E8E84-426E-40dd-AFC4-6F175D3DCCD1}">
+              <a14:hiddenFill xmlns:a14="http://schemas.microsoft.com/office/drawing/2010/main" xmlns="">
+                <a:solidFill>
+                  <a:srgbClr val="FFFFFF"/>
+                </a:solidFill>
+              </a14:hiddenFill>
+            </a:ext>
+            <a:ext uri="{91240B29-F687-4f45-9708-019B960494DF}">
+              <a14:hiddenLine xmlns:a14="http://schemas.microsoft.com/office/drawing/2010/main" xmlns="" w="9525">
+                <a:solidFill>
+                  <a:srgbClr val="000000"/>
+                </a:solidFill>
+                <a:miter lim="800000"/>
+                <a:headEnd/>
+                <a:tailEnd/>
+              </a14:hiddenLine>
+            </a:ext>
+            <a:ext uri="{FAA26D3D-D897-4be2-8F04-BA451C77F1D7}">
+              <ma14:placeholderFlag xmlns:ma14="http://schemas.microsoft.com/office/mac/drawingml/2011/main" xmlns="" val="1"/>
+            </a:ext>
+          </a:extLst>
+        </p:spPr>
+        <p:txBody>
+          <a:bodyPr vert="horz" wrap="square" lIns="91440" tIns="45720" rIns="91440" bIns="45720" numCol="1" anchor="t" anchorCtr="0" compatLnSpc="1">
+            <a:prstTxWarp prst="textNoShape">
+              <a:avLst/>
+            </a:prstTxWarp>
+          </a:bodyPr>
+          <a:lstStyle>
+            <a:lvl1pPr marL="285750" indent="-285750" algn="l" rtl="0" eaLnBrk="1" fontAlgn="base" hangingPunct="1">
+              <a:spcBef>
+                <a:spcPts val="0"/>
+              </a:spcBef>
+              <a:spcAft>
+                <a:spcPts val="800"/>
+              </a:spcAft>
+              <a:buClr>
+                <a:schemeClr val="tx1"/>
+              </a:buClr>
+              <a:buFont typeface="Arial" panose="020B0604020202020204" pitchFamily="34" charset="0"/>
+              <a:buChar char="•"/>
+              <a:defRPr lang="en-US" sz="1600" dirty="0">
+                <a:solidFill>
+                  <a:schemeClr val="tx1">
+                    <a:lumMod val="95000"/>
+                    <a:lumOff val="5000"/>
+                  </a:schemeClr>
+                </a:solidFill>
+                <a:latin typeface="Aptos" panose="020B0004020202020204" pitchFamily="34" charset="0"/>
+                <a:ea typeface="Aptos" panose="020B0004020202020204" pitchFamily="34" charset="0"/>
+                <a:cs typeface="Aptos" panose="020B0004020202020204" pitchFamily="34" charset="0"/>
+              </a:defRPr>
+            </a:lvl1pPr>
+            <a:lvl2pPr marL="742950" indent="-285750" algn="l" rtl="0" eaLnBrk="1" fontAlgn="base" hangingPunct="1">
+              <a:spcBef>
+                <a:spcPts val="0"/>
+              </a:spcBef>
+              <a:spcAft>
+                <a:spcPts val="800"/>
+              </a:spcAft>
+              <a:buClr>
+                <a:schemeClr val="tx1"/>
+              </a:buClr>
+              <a:buFont typeface="Arial" panose="020B0604020202020204" pitchFamily="34" charset="0"/>
+              <a:buChar char="•"/>
+              <a:defRPr lang="en-US" sz="1600" dirty="0">
+                <a:solidFill>
+                  <a:schemeClr val="tx1">
+                    <a:lumMod val="95000"/>
+                    <a:lumOff val="5000"/>
+                  </a:schemeClr>
+                </a:solidFill>
+                <a:latin typeface="Aptos" panose="020B0004020202020204" pitchFamily="34" charset="0"/>
+                <a:ea typeface="Geneva" charset="0"/>
+                <a:cs typeface="Aptos" panose="020B0004020202020204" pitchFamily="34" charset="0"/>
+              </a:defRPr>
+            </a:lvl2pPr>
+            <a:lvl3pPr marL="1200150" indent="-285750" algn="l" rtl="0" eaLnBrk="1" fontAlgn="base" hangingPunct="1">
+              <a:spcBef>
+                <a:spcPts val="0"/>
+              </a:spcBef>
+              <a:spcAft>
+                <a:spcPts val="800"/>
+              </a:spcAft>
+              <a:buClr>
+                <a:schemeClr val="tx1"/>
+              </a:buClr>
+              <a:buFont typeface="Arial" panose="020B0604020202020204" pitchFamily="34" charset="0"/>
+              <a:buChar char="•"/>
+              <a:defRPr lang="en-US" sz="1600" dirty="0">
+                <a:solidFill>
+                  <a:schemeClr val="tx1">
+                    <a:lumMod val="95000"/>
+                    <a:lumOff val="5000"/>
+                  </a:schemeClr>
+                </a:solidFill>
+                <a:latin typeface="Aptos" panose="020B0004020202020204" pitchFamily="34" charset="0"/>
+                <a:ea typeface="Geneva" charset="0"/>
+                <a:cs typeface="Aptos" panose="020B0004020202020204" pitchFamily="34" charset="0"/>
+              </a:defRPr>
+            </a:lvl3pPr>
+            <a:lvl4pPr marL="1543050" indent="-171450" algn="l" rtl="0" eaLnBrk="1" fontAlgn="base" hangingPunct="1">
+              <a:spcBef>
+                <a:spcPts val="0"/>
+              </a:spcBef>
+              <a:spcAft>
+                <a:spcPts val="800"/>
+              </a:spcAft>
+              <a:buClr>
+                <a:schemeClr val="tx1"/>
+              </a:buClr>
+              <a:buFont typeface="Arial" panose="020B0604020202020204" pitchFamily="34" charset="0"/>
+              <a:buChar char="•"/>
+              <a:defRPr lang="en-US" sz="1600" dirty="0">
+                <a:solidFill>
+                  <a:schemeClr val="tx1">
+                    <a:lumMod val="95000"/>
+                    <a:lumOff val="5000"/>
+                  </a:schemeClr>
+                </a:solidFill>
+                <a:latin typeface="Aptos" panose="020B0004020202020204" pitchFamily="34" charset="0"/>
+                <a:ea typeface="Geneva" charset="0"/>
+                <a:cs typeface="Aptos" panose="020B0004020202020204" pitchFamily="34" charset="0"/>
+              </a:defRPr>
+            </a:lvl4pPr>
+            <a:lvl5pPr marL="2000250" indent="-171450" algn="l" rtl="0" eaLnBrk="1" fontAlgn="base" hangingPunct="1">
+              <a:spcBef>
+                <a:spcPts val="0"/>
+              </a:spcBef>
+              <a:spcAft>
+                <a:spcPts val="800"/>
+              </a:spcAft>
+              <a:buClr>
+                <a:schemeClr val="tx1"/>
+              </a:buClr>
+              <a:buFont typeface="Arial" panose="020B0604020202020204" pitchFamily="34" charset="0"/>
+              <a:buChar char="•"/>
+              <a:defRPr lang="en-US" sz="1600" dirty="0">
+                <a:solidFill>
+                  <a:schemeClr val="tx1">
+                    <a:lumMod val="95000"/>
+                    <a:lumOff val="5000"/>
+                  </a:schemeClr>
+                </a:solidFill>
+                <a:latin typeface="Aptos" panose="020B0004020202020204" pitchFamily="34" charset="0"/>
+                <a:ea typeface="Geneva" charset="0"/>
+                <a:cs typeface="Aptos" panose="020B0004020202020204" pitchFamily="34" charset="0"/>
+              </a:defRPr>
+            </a:lvl5pPr>
+            <a:lvl6pPr marL="2514600" indent="-228600" algn="l" rtl="0" eaLnBrk="1" fontAlgn="base" hangingPunct="1">
+              <a:spcBef>
+                <a:spcPct val="20000"/>
+              </a:spcBef>
+              <a:spcAft>
+                <a:spcPct val="0"/>
+              </a:spcAft>
+              <a:buChar char="»"/>
+              <a:defRPr sz="1400">
+                <a:solidFill>
+                  <a:srgbClr val="5F5F5F"/>
+                </a:solidFill>
+                <a:latin typeface="+mn-lt"/>
+              </a:defRPr>
+            </a:lvl6pPr>
+            <a:lvl7pPr marL="2971800" indent="-228600" algn="l" rtl="0" eaLnBrk="1" fontAlgn="base" hangingPunct="1">
+              <a:spcBef>
+                <a:spcPct val="20000"/>
+              </a:spcBef>
+              <a:spcAft>
+                <a:spcPct val="0"/>
+              </a:spcAft>
+              <a:buChar char="»"/>
+              <a:defRPr sz="1400">
+                <a:solidFill>
+                  <a:srgbClr val="5F5F5F"/>
+                </a:solidFill>
+                <a:latin typeface="+mn-lt"/>
+              </a:defRPr>
+            </a:lvl7pPr>
+            <a:lvl8pPr marL="3429000" indent="-228600" algn="l" rtl="0" eaLnBrk="1" fontAlgn="base" hangingPunct="1">
+              <a:spcBef>
+                <a:spcPct val="20000"/>
+              </a:spcBef>
+              <a:spcAft>
+                <a:spcPct val="0"/>
+              </a:spcAft>
+              <a:buChar char="»"/>
+              <a:defRPr sz="1400">
+                <a:solidFill>
+                  <a:srgbClr val="5F5F5F"/>
+                </a:solidFill>
+                <a:latin typeface="+mn-lt"/>
+              </a:defRPr>
+            </a:lvl8pPr>
+            <a:lvl9pPr marL="3886200" indent="-228600" algn="l" rtl="0" eaLnBrk="1" fontAlgn="base" hangingPunct="1">
+              <a:spcBef>
+                <a:spcPct val="20000"/>
+              </a:spcBef>
+              <a:spcAft>
+                <a:spcPct val="0"/>
+              </a:spcAft>
+              <a:buChar char="»"/>
+              <a:defRPr sz="1400">
+                <a:solidFill>
+                  <a:srgbClr val="5F5F5F"/>
+                </a:solidFill>
+                <a:latin typeface="+mn-lt"/>
+              </a:defRPr>
+            </a:lvl9pPr>
+          </a:lstStyle>
+          <a:p>
+            <a:pPr marL="0" indent="0">
+              <a:buNone/>
+            </a:pPr>
+            <a:r>
+              <a:rPr lang="en-US" sz="1400" b="1" kern="0" dirty="0"/>
+              <a:t>With good alt text</a:t>
+            </a:r>
+          </a:p>
+          <a:p>
+            <a:pPr marL="0" indent="0">
+              <a:buFont typeface="Arial" panose="020B0604020202020204" pitchFamily="34" charset="0"/>
+              <a:buNone/>
+            </a:pPr>
+            <a:r>
+              <a:rPr lang="en-US" sz="1200" kern="0" dirty="0"/>
+              <a:t>What’s happening – the screen reader provides full context to the image’s purpose and managing. </a:t>
+            </a:r>
+          </a:p>
+        </p:txBody>
+      </p:sp>
+      <p:sp>
+        <p:nvSpPr>
+          <p:cNvPr id="6" name="Slide Number Placeholder 5">
+            <a:extLst>
+              <a:ext uri="{FF2B5EF4-FFF2-40B4-BE49-F238E27FC236}">
+                <a16:creationId xmlns:a16="http://schemas.microsoft.com/office/drawing/2014/main" id="{6D9EFF23-FDF1-8E57-9064-414F3B7F2952}"/>
+              </a:ext>
+              <a:ext uri="{C183D7F6-B498-43B3-948B-1728B52AA6E4}">
+                <adec:decorative xmlns:adec="http://schemas.microsoft.com/office/drawing/2017/decorative" val="1"/>
+              </a:ext>
+            </a:extLst>
+          </p:cNvPr>
+          <p:cNvSpPr>
+            <a:spLocks noGrp="1"/>
+          </p:cNvSpPr>
+          <p:nvPr>
+            <p:ph type="sldNum" sz="quarter" idx="4"/>
+          </p:nvPr>
+        </p:nvSpPr>
+        <p:spPr/>
+        <p:txBody>
+          <a:bodyPr/>
+          <a:lstStyle/>
+          <a:p>
+            <a:fld id="{E2D72577-C5EA-2248-880D-8FE657DD8266}" type="slidenum">
+              <a:rPr lang="en-US" smtClean="0"/>
+              <a:pPr/>
+              <a:t>26</a:t>
+            </a:fld>
+            <a:endParaRPr lang="en-US"/>
+          </a:p>
+        </p:txBody>
+      </p:sp>
+    </p:spTree>
+    <p:extLst>
+      <p:ext uri="{BB962C8B-B14F-4D97-AF65-F5344CB8AC3E}">
+        <p14:creationId xmlns:p14="http://schemas.microsoft.com/office/powerpoint/2010/main" val="1941974311"/>
+      </p:ext>
+    </p:extLst>
+  </p:cSld>
+  <p:clrMapOvr>
+    <a:masterClrMapping/>
+  </p:clrMapOvr>
+  <p:timing>
+    <p:tnLst>
+      <p:par>
+        <p:cTn id="1" dur="indefinite" restart="never" nodeType="tmRoot">
+          <p:childTnLst>
+            <p:seq concurrent="1" nextAc="seek">
+              <p:cTn id="2" dur="indefinite" nodeType="mainSeq">
+                <p:childTnLst>
+                  <p:par>
+                    <p:cTn id="3" fill="hold">
+                      <p:stCondLst>
+                        <p:cond delay="indefinite"/>
+                      </p:stCondLst>
+                      <p:childTnLst>
+                        <p:par>
+                          <p:cTn id="4" fill="hold">
+                            <p:stCondLst>
+                              <p:cond delay="0"/>
+                            </p:stCondLst>
+                            <p:childTnLst>
+                              <p:par>
+                                <p:cTn id="5" presetID="1" presetClass="mediacall" presetSubtype="0" fill="hold" nodeType="clickEffect">
+                                  <p:stCondLst>
+                                    <p:cond delay="0"/>
+                                  </p:stCondLst>
+                                  <p:childTnLst>
+                                    <p:cmd type="call" cmd="playFrom(0.0)">
+                                      <p:cBhvr>
+                                        <p:cTn id="6" dur="9473" fill="hold"/>
+                                        <p:tgtEl>
+                                          <p:spTgt spid="9"/>
+                                        </p:tgtEl>
+                                      </p:cBhvr>
+                                    </p:cmd>
+                                  </p:childTnLst>
+                                </p:cTn>
+                              </p:par>
+                            </p:childTnLst>
+                          </p:cTn>
+                        </p:par>
+                      </p:childTnLst>
+                    </p:cTn>
+                  </p:par>
+                  <p:par>
+                    <p:cTn id="7" fill="hold">
+                      <p:stCondLst>
+                        <p:cond delay="indefinite"/>
+                      </p:stCondLst>
+                      <p:childTnLst>
+                        <p:par>
+                          <p:cTn id="8" fill="hold">
+                            <p:stCondLst>
+                              <p:cond delay="0"/>
+                            </p:stCondLst>
+                            <p:childTnLst>
+                              <p:par>
+                                <p:cTn id="9" presetID="1" presetClass="mediacall" presetSubtype="0" fill="hold" nodeType="clickEffect">
+                                  <p:stCondLst>
+                                    <p:cond delay="0"/>
+                                  </p:stCondLst>
+                                  <p:childTnLst>
+                                    <p:cmd type="call" cmd="playFrom(0.0)">
+                                      <p:cBhvr>
+                                        <p:cTn id="10" dur="2460" fill="hold"/>
+                                        <p:tgtEl>
+                                          <p:spTgt spid="10"/>
+                                        </p:tgtEl>
+                                      </p:cBhvr>
+                                    </p:cmd>
+                                  </p:childTnLst>
+                                </p:cTn>
+                              </p:par>
+                            </p:childTnLst>
+                          </p:cTn>
+                        </p:par>
+                      </p:childTnLst>
+                    </p:cTn>
+                  </p:par>
+                </p:childTnLst>
+              </p:cTn>
+              <p:prevCondLst>
+                <p:cond evt="onPrev" delay="0">
+                  <p:tgtEl>
+                    <p:sldTgt/>
+                  </p:tgtEl>
+                </p:cond>
+              </p:prevCondLst>
+              <p:nextCondLst>
+                <p:cond evt="onNext" delay="0">
+                  <p:tgtEl>
+                    <p:sldTgt/>
+                  </p:tgtEl>
+                </p:cond>
+              </p:nextCondLst>
+            </p:seq>
+            <p:audio>
+              <p:cMediaNode vol="80000">
+                <p:cTn id="11" fill="hold" display="0">
+                  <p:stCondLst>
+                    <p:cond delay="indefinite"/>
+                  </p:stCondLst>
+                  <p:endCondLst>
+                    <p:cond evt="onStopAudio" delay="0">
+                      <p:tgtEl>
+                        <p:sldTgt/>
+                      </p:tgtEl>
+                    </p:cond>
+                  </p:endCondLst>
+                </p:cTn>
+                <p:tgtEl>
+                  <p:spTgt spid="9"/>
+                </p:tgtEl>
+              </p:cMediaNode>
+            </p:audio>
+            <p:audio>
+              <p:cMediaNode vol="80000">
+                <p:cTn id="12" fill="hold" display="0">
+                  <p:stCondLst>
+                    <p:cond delay="indefinite"/>
+                  </p:stCondLst>
+                  <p:endCondLst>
+                    <p:cond evt="onStopAudio" delay="0">
+                      <p:tgtEl>
+                        <p:sldTgt/>
+                      </p:tgtEl>
+                    </p:cond>
+                  </p:endCondLst>
+                </p:cTn>
+                <p:tgtEl>
+                  <p:spTgt spid="10"/>
+                </p:tgtEl>
+              </p:cMediaNode>
+            </p:audio>
+          </p:childTnLst>
+        </p:cTn>
+      </p:par>
+    </p:tnLst>
+  </p:timing>
+</p:sld>
+</file>
+
+<file path=ppt/slides/slide27.xml><?xml version="1.0" encoding="utf-8"?>
+<p:sld xmlns:a="http://schemas.openxmlformats.org/drawingml/2006/main" xmlns:r="http://schemas.openxmlformats.org/officeDocument/2006/relationships" xmlns:p="http://schemas.openxmlformats.org/presentationml/2006/main">
+  <p:cSld>
+    <p:spTree>
+      <p:nvGrpSpPr>
+        <p:cNvPr id="1" name="">
+          <a:extLst>
+            <a:ext uri="{FF2B5EF4-FFF2-40B4-BE49-F238E27FC236}">
+              <a16:creationId xmlns:a16="http://schemas.microsoft.com/office/drawing/2014/main" id="{5D74ECD8-F790-2310-1D35-0D7478402394}"/>
+            </a:ext>
+          </a:extLst>
+        </p:cNvPr>
+        <p:cNvGrpSpPr/>
+        <p:nvPr/>
+      </p:nvGrpSpPr>
+      <p:grpSpPr>
+        <a:xfrm>
+          <a:off x="0" y="0"/>
+          <a:ext cx="0" cy="0"/>
+          <a:chOff x="0" y="0"/>
+          <a:chExt cx="0" cy="0"/>
+        </a:xfrm>
+      </p:grpSpPr>
+      <p:sp>
+        <p:nvSpPr>
+          <p:cNvPr id="2" name="Title 1">
+            <a:extLst>
+              <a:ext uri="{FF2B5EF4-FFF2-40B4-BE49-F238E27FC236}">
+                <a16:creationId xmlns:a16="http://schemas.microsoft.com/office/drawing/2014/main" id="{BE71CE76-6832-06AF-1EAD-75EA9A80B831}"/>
+              </a:ext>
+            </a:extLst>
+          </p:cNvPr>
+          <p:cNvSpPr>
+            <a:spLocks noGrp="1"/>
+          </p:cNvSpPr>
+          <p:nvPr>
+            <p:ph type="title"/>
+          </p:nvPr>
+        </p:nvSpPr>
+        <p:spPr/>
+        <p:txBody>
+          <a:bodyPr/>
+          <a:lstStyle/>
+          <a:p>
+            <a:r>
+              <a:rPr lang="en-US" dirty="0"/>
+              <a:t>Forcing errors</a:t>
+            </a:r>
+          </a:p>
+        </p:txBody>
+      </p:sp>
+      <p:graphicFrame>
+        <p:nvGraphicFramePr>
+          <p:cNvPr id="9" name="Content Placeholder 8">
+            <a:extLst>
+              <a:ext uri="{FF2B5EF4-FFF2-40B4-BE49-F238E27FC236}">
+                <a16:creationId xmlns:a16="http://schemas.microsoft.com/office/drawing/2014/main" id="{03C96F90-FE7E-0B8C-4A25-403118C3E1AF}"/>
+              </a:ext>
+            </a:extLst>
+          </p:cNvPr>
+          <p:cNvGraphicFramePr>
+            <a:graphicFrameLocks noGrp="1"/>
+          </p:cNvGraphicFramePr>
+          <p:nvPr>
+            <p:ph idx="1"/>
+          </p:nvPr>
+        </p:nvGraphicFramePr>
+        <p:xfrm>
+          <a:off x="454460" y="1336008"/>
+          <a:ext cx="6852636" cy="3326516"/>
+        </p:xfrm>
+        <a:graphic>
+          <a:graphicData uri="http://schemas.openxmlformats.org/drawingml/2006/table">
+            <a:tbl>
+              <a:tblPr firstRow="1" firstCol="1">
+                <a:tableStyleId>{91EBBBCC-DAD2-459C-BE2E-F6DE35CF9A28}</a:tableStyleId>
+              </a:tblPr>
+              <a:tblGrid>
+                <a:gridCol w="2682972">
+                  <a:extLst>
+                    <a:ext uri="{9D8B030D-6E8A-4147-A177-3AD203B41FA5}">
+                      <a16:colId xmlns:a16="http://schemas.microsoft.com/office/drawing/2014/main" val="1645096873"/>
+                    </a:ext>
+                  </a:extLst>
+                </a:gridCol>
+                <a:gridCol w="1389888">
+                  <a:extLst>
+                    <a:ext uri="{9D8B030D-6E8A-4147-A177-3AD203B41FA5}">
+                      <a16:colId xmlns:a16="http://schemas.microsoft.com/office/drawing/2014/main" val="507284935"/>
+                    </a:ext>
+                  </a:extLst>
+                </a:gridCol>
+                <a:gridCol w="1389888">
+                  <a:extLst>
+                    <a:ext uri="{9D8B030D-6E8A-4147-A177-3AD203B41FA5}">
+                      <a16:colId xmlns:a16="http://schemas.microsoft.com/office/drawing/2014/main" val="2939605529"/>
+                    </a:ext>
+                  </a:extLst>
+                </a:gridCol>
+                <a:gridCol w="1389888">
+                  <a:extLst>
+                    <a:ext uri="{9D8B030D-6E8A-4147-A177-3AD203B41FA5}">
+                      <a16:colId xmlns:a16="http://schemas.microsoft.com/office/drawing/2014/main" val="3684929455"/>
+                    </a:ext>
+                  </a:extLst>
+                </a:gridCol>
+              </a:tblGrid>
+              <a:tr h="400436">
+                <a:tc>
+                  <a:txBody>
+                    <a:bodyPr/>
+                    <a:lstStyle/>
+                    <a:p>
+                      <a:pPr algn="l">
+                        <a:buNone/>
+                      </a:pPr>
+                      <a:r>
+                        <a:rPr lang="en-US" sz="1200" b="1" dirty="0">
+                          <a:solidFill>
+                            <a:schemeClr val="bg1"/>
+                          </a:solidFill>
+                          <a:effectLst/>
+                        </a:rPr>
+                        <a:t>Type of test</a:t>
+                      </a:r>
+                      <a:endParaRPr lang="en-US" sz="1200" b="1" dirty="0">
+                        <a:solidFill>
+                          <a:schemeClr val="bg1"/>
+                        </a:solidFill>
+                        <a:effectLst/>
+                        <a:latin typeface="Aptos" panose="020B0004020202020204" pitchFamily="34" charset="0"/>
+                      </a:endParaRPr>
+                    </a:p>
+                  </a:txBody>
+                  <a:tcPr marL="122950" marR="31510" marT="17506" marB="17506" anchor="ctr">
+                    <a:lnR w="12700" cap="flat" cmpd="sng" algn="ctr">
+                      <a:solidFill>
+                        <a:schemeClr val="bg1"/>
+                      </a:solidFill>
+                      <a:prstDash val="solid"/>
+                      <a:round/>
+                      <a:headEnd type="none" w="med" len="med"/>
+                      <a:tailEnd type="none" w="med" len="med"/>
+                    </a:lnR>
+                    <a:lnB w="12700" cap="flat" cmpd="sng" algn="ctr">
+                      <a:noFill/>
+                      <a:prstDash val="solid"/>
+                      <a:round/>
+                      <a:headEnd type="none" w="med" len="med"/>
+                      <a:tailEnd type="none" w="med" len="med"/>
+                    </a:lnB>
+                    <a:solidFill>
+                      <a:srgbClr val="C00000"/>
+                    </a:solidFill>
+                  </a:tcPr>
+                </a:tc>
+                <a:tc>
+                  <a:txBody>
+                    <a:bodyPr/>
+                    <a:lstStyle/>
+                    <a:p>
+                      <a:pPr algn="l">
+                        <a:buNone/>
+                      </a:pPr>
+                      <a:r>
+                        <a:rPr lang="en-US" sz="1200" b="1" dirty="0">
+                          <a:solidFill>
+                            <a:schemeClr val="bg1"/>
+                          </a:solidFill>
+                          <a:effectLst/>
+                        </a:rPr>
+                        <a:t>Ally</a:t>
+                      </a:r>
+                      <a:endParaRPr lang="en-US" sz="1200" b="1" dirty="0">
+                        <a:solidFill>
+                          <a:schemeClr val="bg1"/>
+                        </a:solidFill>
+                        <a:effectLst/>
+                        <a:latin typeface="Aptos" panose="020B0004020202020204" pitchFamily="34" charset="0"/>
+                      </a:endParaRPr>
+                    </a:p>
+                  </a:txBody>
+                  <a:tcPr marL="122950" marR="31510" marT="17506" marB="17506" anchor="ctr">
+                    <a:lnL w="12700" cap="flat" cmpd="sng" algn="ctr">
+                      <a:solidFill>
+                        <a:schemeClr val="bg1"/>
+                      </a:solidFill>
+                      <a:prstDash val="solid"/>
+                      <a:round/>
+                      <a:headEnd type="none" w="med" len="med"/>
+                      <a:tailEnd type="none" w="med" len="med"/>
+                    </a:lnL>
+                    <a:lnR w="12700" cap="flat" cmpd="sng" algn="ctr">
+                      <a:solidFill>
+                        <a:schemeClr val="bg1"/>
+                      </a:solidFill>
+                      <a:prstDash val="solid"/>
+                      <a:round/>
+                      <a:headEnd type="none" w="med" len="med"/>
+                      <a:tailEnd type="none" w="med" len="med"/>
+                    </a:lnR>
+                    <a:lnB w="12700" cap="flat" cmpd="sng" algn="ctr">
+                      <a:noFill/>
+                      <a:prstDash val="solid"/>
+                      <a:round/>
+                      <a:headEnd type="none" w="med" len="med"/>
+                      <a:tailEnd type="none" w="med" len="med"/>
+                    </a:lnB>
+                    <a:solidFill>
+                      <a:srgbClr val="C00000"/>
+                    </a:solidFill>
+                  </a:tcPr>
+                </a:tc>
+                <a:tc>
+                  <a:txBody>
+                    <a:bodyPr/>
+                    <a:lstStyle/>
+                    <a:p>
+                      <a:pPr algn="l">
+                        <a:buNone/>
+                      </a:pPr>
+                      <a:r>
+                        <a:rPr lang="en-US" sz="1200" b="1" dirty="0">
+                          <a:solidFill>
+                            <a:schemeClr val="bg1"/>
+                          </a:solidFill>
+                          <a:effectLst/>
+                        </a:rPr>
+                        <a:t>MS Office</a:t>
+                      </a:r>
+                      <a:endParaRPr lang="en-US" sz="1200" b="1" dirty="0">
+                        <a:solidFill>
+                          <a:schemeClr val="bg1"/>
+                        </a:solidFill>
+                        <a:effectLst/>
+                        <a:latin typeface="Aptos" panose="020B0004020202020204" pitchFamily="34" charset="0"/>
+                      </a:endParaRPr>
+                    </a:p>
+                  </a:txBody>
+                  <a:tcPr marL="122950" marR="31510" marT="17506" marB="17506" anchor="ctr">
+                    <a:lnL w="12700" cap="flat" cmpd="sng" algn="ctr">
+                      <a:solidFill>
+                        <a:schemeClr val="bg1"/>
+                      </a:solidFill>
+                      <a:prstDash val="solid"/>
+                      <a:round/>
+                      <a:headEnd type="none" w="med" len="med"/>
+                      <a:tailEnd type="none" w="med" len="med"/>
+                    </a:lnL>
+                    <a:lnR w="12700" cap="flat" cmpd="sng" algn="ctr">
+                      <a:solidFill>
+                        <a:schemeClr val="bg1"/>
+                      </a:solidFill>
+                      <a:prstDash val="solid"/>
+                      <a:round/>
+                      <a:headEnd type="none" w="med" len="med"/>
+                      <a:tailEnd type="none" w="med" len="med"/>
+                    </a:lnR>
+                    <a:lnB w="12700" cap="flat" cmpd="sng" algn="ctr">
+                      <a:noFill/>
+                      <a:prstDash val="solid"/>
+                      <a:round/>
+                      <a:headEnd type="none" w="med" len="med"/>
+                      <a:tailEnd type="none" w="med" len="med"/>
+                    </a:lnB>
+                    <a:solidFill>
+                      <a:srgbClr val="C00000"/>
+                    </a:solidFill>
+                  </a:tcPr>
+                </a:tc>
+                <a:tc>
+                  <a:txBody>
+                    <a:bodyPr/>
+                    <a:lstStyle/>
+                    <a:p>
+                      <a:pPr algn="l">
+                        <a:buNone/>
+                      </a:pPr>
+                      <a:r>
+                        <a:rPr lang="en-US" sz="1200" b="1" dirty="0">
+                          <a:solidFill>
+                            <a:schemeClr val="bg1"/>
+                          </a:solidFill>
+                          <a:effectLst/>
+                        </a:rPr>
+                        <a:t>Acrobat</a:t>
+                      </a:r>
+                      <a:endParaRPr lang="en-US" sz="1200" b="1" dirty="0">
+                        <a:solidFill>
+                          <a:schemeClr val="bg1"/>
+                        </a:solidFill>
+                        <a:effectLst/>
+                        <a:latin typeface="Aptos" panose="020B0004020202020204" pitchFamily="34" charset="0"/>
+                      </a:endParaRPr>
+                    </a:p>
+                  </a:txBody>
+                  <a:tcPr marL="122950" marR="31510" marT="17506" marB="17506" anchor="ctr">
+                    <a:lnL w="12700" cap="flat" cmpd="sng" algn="ctr">
+                      <a:solidFill>
+                        <a:schemeClr val="bg1"/>
+                      </a:solidFill>
+                      <a:prstDash val="solid"/>
+                      <a:round/>
+                      <a:headEnd type="none" w="med" len="med"/>
+                      <a:tailEnd type="none" w="med" len="med"/>
+                    </a:lnL>
+                    <a:lnB w="12700" cap="flat" cmpd="sng" algn="ctr">
+                      <a:noFill/>
+                      <a:prstDash val="solid"/>
+                      <a:round/>
+                      <a:headEnd type="none" w="med" len="med"/>
+                      <a:tailEnd type="none" w="med" len="med"/>
+                    </a:lnB>
+                    <a:solidFill>
+                      <a:srgbClr val="C00000"/>
+                    </a:solidFill>
+                  </a:tcPr>
+                </a:tc>
+                <a:extLst>
+                  <a:ext uri="{0D108BD9-81ED-4DB2-BD59-A6C34878D82A}">
+                    <a16:rowId xmlns:a16="http://schemas.microsoft.com/office/drawing/2014/main" val="3048299183"/>
+                  </a:ext>
+                </a:extLst>
+              </a:tr>
+              <a:tr h="365760">
+                <a:tc>
+                  <a:txBody>
+                    <a:bodyPr/>
+                    <a:lstStyle/>
+                    <a:p>
+                      <a:pPr algn="l">
+                        <a:buNone/>
+                      </a:pPr>
+                      <a:r>
+                        <a:rPr lang="en-US" sz="1200" b="0" dirty="0">
+                          <a:effectLst/>
+                        </a:rPr>
+                        <a:t>No text alternative</a:t>
+                      </a:r>
+                      <a:endParaRPr lang="en-US" sz="1200" b="0" dirty="0">
+                        <a:effectLst/>
+                        <a:latin typeface="Aptos" panose="020B0004020202020204" pitchFamily="34" charset="0"/>
+                      </a:endParaRPr>
+                    </a:p>
+                  </a:txBody>
+                  <a:tcPr marL="31510" marR="31510" marT="17506" marB="17506" anchor="ctr">
+                    <a:lnL>
+                      <a:noFill/>
+                    </a:lnL>
+                    <a:lnR w="12700" cap="flat" cmpd="sng" algn="ctr">
+                      <a:solidFill>
+                        <a:schemeClr val="tx1">
+                          <a:lumMod val="50000"/>
+                          <a:lumOff val="50000"/>
+                        </a:schemeClr>
+                      </a:solidFill>
+                      <a:prstDash val="solid"/>
+                      <a:round/>
+                      <a:headEnd type="none" w="med" len="med"/>
+                      <a:tailEnd type="none" w="med" len="med"/>
+                    </a:lnR>
+                    <a:lnT w="12700" cap="flat" cmpd="sng" algn="ctr">
+                      <a:noFill/>
+                      <a:prstDash val="solid"/>
+                      <a:round/>
+                      <a:headEnd type="none" w="med" len="med"/>
+                      <a:tailEnd type="none" w="med" len="med"/>
+                    </a:lnT>
+                    <a:lnB w="12700" cap="flat" cmpd="sng" algn="ctr">
+                      <a:solidFill>
+                        <a:schemeClr val="tx1">
+                          <a:lumMod val="50000"/>
+                          <a:lumOff val="50000"/>
+                        </a:schemeClr>
+                      </a:solidFill>
+                      <a:prstDash val="solid"/>
+                      <a:round/>
+                      <a:headEnd type="none" w="med" len="med"/>
+                      <a:tailEnd type="none" w="med" len="med"/>
+                    </a:lnB>
+                    <a:lnTlToBr w="12700" cmpd="sng">
+                      <a:noFill/>
+                      <a:prstDash val="solid"/>
+                    </a:lnTlToBr>
+                    <a:lnBlToTr w="12700" cmpd="sng">
+                      <a:noFill/>
+                      <a:prstDash val="solid"/>
+                    </a:lnBlToTr>
+                    <a:noFill/>
+                  </a:tcPr>
+                </a:tc>
+                <a:tc>
+                  <a:txBody>
+                    <a:bodyPr/>
+                    <a:lstStyle/>
+                    <a:p>
+                      <a:pPr marL="0" marR="0" lvl="0" indent="0" algn="ctr" defTabSz="914400" rtl="0" eaLnBrk="1" fontAlgn="auto" latinLnBrk="0" hangingPunct="1">
+                        <a:lnSpc>
+                          <a:spcPct val="100000"/>
+                        </a:lnSpc>
+                        <a:spcBef>
+                          <a:spcPts val="0"/>
+                        </a:spcBef>
+                        <a:spcAft>
+                          <a:spcPts val="0"/>
+                        </a:spcAft>
+                        <a:buClrTx/>
+                        <a:buSzTx/>
+                        <a:buFontTx/>
+                        <a:buNone/>
+                        <a:tabLst/>
+                        <a:defRPr/>
+                      </a:pPr>
+                      <a:r>
+                        <a:rPr kumimoji="0" lang="en-US" sz="1400" b="0" i="0" u="none" strike="noStrike" kern="1200" cap="none" spc="0" normalizeH="0" baseline="0" noProof="0" dirty="0">
+                          <a:ln>
+                            <a:noFill/>
+                          </a:ln>
+                          <a:solidFill>
+                            <a:schemeClr val="bg1"/>
+                          </a:solidFill>
+                          <a:effectLst/>
+                          <a:uLnTx/>
+                          <a:uFillTx/>
+                          <a:latin typeface="Arial"/>
+                          <a:ea typeface="+mn-ea"/>
+                          <a:cs typeface="+mn-cs"/>
+                        </a:rPr>
+                        <a:t>✓</a:t>
+                      </a:r>
+                      <a:endParaRPr kumimoji="0" lang="en-US" sz="1400" b="0" i="0" u="none" strike="noStrike" kern="1200" cap="none" spc="0" normalizeH="0" baseline="0" noProof="0" dirty="0">
+                        <a:ln>
+                          <a:noFill/>
+                        </a:ln>
+                        <a:solidFill>
+                          <a:schemeClr val="bg1"/>
+                        </a:solidFill>
+                        <a:effectLst/>
+                        <a:uLnTx/>
+                        <a:uFillTx/>
+                        <a:latin typeface="Symbol" pitchFamily="2" charset="2"/>
+                        <a:ea typeface="+mn-ea"/>
+                        <a:cs typeface="+mn-cs"/>
+                      </a:endParaRPr>
+                    </a:p>
+                  </a:txBody>
+                  <a:tcPr marL="31510" marR="31510" marT="17506" marB="17506" anchor="ctr">
+                    <a:lnL w="12700" cap="flat" cmpd="sng" algn="ctr">
+                      <a:solidFill>
+                        <a:schemeClr val="tx1">
+                          <a:lumMod val="50000"/>
+                          <a:lumOff val="50000"/>
+                        </a:schemeClr>
+                      </a:solidFill>
+                      <a:prstDash val="solid"/>
+                      <a:round/>
+                      <a:headEnd type="none" w="med" len="med"/>
+                      <a:tailEnd type="none" w="med" len="med"/>
+                    </a:lnL>
+                    <a:lnR w="12700" cap="flat" cmpd="sng" algn="ctr">
+                      <a:solidFill>
+                        <a:schemeClr val="bg1"/>
+                      </a:solidFill>
+                      <a:prstDash val="solid"/>
+                      <a:round/>
+                      <a:headEnd type="none" w="med" len="med"/>
+                      <a:tailEnd type="none" w="med" len="med"/>
+                    </a:lnR>
+                    <a:lnT w="12700" cap="flat" cmpd="sng" algn="ctr">
+                      <a:noFill/>
+                      <a:prstDash val="solid"/>
+                      <a:round/>
+                      <a:headEnd type="none" w="med" len="med"/>
+                      <a:tailEnd type="none" w="med" len="med"/>
+                    </a:lnT>
+                    <a:lnB w="12700" cap="flat" cmpd="sng" algn="ctr">
+                      <a:solidFill>
+                        <a:schemeClr val="bg1"/>
+                      </a:solidFill>
+                      <a:prstDash val="solid"/>
+                      <a:round/>
+                      <a:headEnd type="none" w="med" len="med"/>
+                      <a:tailEnd type="none" w="med" len="med"/>
+                    </a:lnB>
+                    <a:lnTlToBr w="12700" cmpd="sng">
+                      <a:noFill/>
+                      <a:prstDash val="solid"/>
+                    </a:lnTlToBr>
+                    <a:lnBlToTr w="12700" cmpd="sng">
+                      <a:noFill/>
+                      <a:prstDash val="solid"/>
+                    </a:lnBlToTr>
+                    <a:solidFill>
+                      <a:srgbClr val="037404"/>
+                    </a:solidFill>
+                  </a:tcPr>
+                </a:tc>
+                <a:tc>
+                  <a:txBody>
+                    <a:bodyPr/>
+                    <a:lstStyle/>
+                    <a:p>
+                      <a:pPr marL="0" marR="0" lvl="0" indent="0" algn="ctr" defTabSz="914400" rtl="0" eaLnBrk="1" fontAlgn="auto" latinLnBrk="0" hangingPunct="1">
+                        <a:lnSpc>
+                          <a:spcPct val="100000"/>
+                        </a:lnSpc>
+                        <a:spcBef>
+                          <a:spcPts val="0"/>
+                        </a:spcBef>
+                        <a:spcAft>
+                          <a:spcPts val="0"/>
+                        </a:spcAft>
+                        <a:buClrTx/>
+                        <a:buSzTx/>
+                        <a:buFontTx/>
+                        <a:buNone/>
+                        <a:tabLst/>
+                        <a:defRPr/>
+                      </a:pPr>
+                      <a:r>
+                        <a:rPr kumimoji="0" lang="en-US" sz="1400" b="0" i="0" u="none" strike="noStrike" kern="1200" cap="none" spc="0" normalizeH="0" baseline="0" noProof="0" dirty="0">
+                          <a:ln>
+                            <a:noFill/>
+                          </a:ln>
+                          <a:solidFill>
+                            <a:schemeClr val="bg1"/>
+                          </a:solidFill>
+                          <a:effectLst/>
+                          <a:uLnTx/>
+                          <a:uFillTx/>
+                          <a:latin typeface="Arial"/>
+                          <a:ea typeface="+mn-ea"/>
+                          <a:cs typeface="+mn-cs"/>
+                        </a:rPr>
+                        <a:t>✓</a:t>
+                      </a:r>
+                      <a:endParaRPr kumimoji="0" lang="en-US" sz="1400" b="0" i="0" u="none" strike="noStrike" kern="1200" cap="none" spc="0" normalizeH="0" baseline="0" noProof="0" dirty="0">
+                        <a:ln>
+                          <a:noFill/>
+                        </a:ln>
+                        <a:solidFill>
+                          <a:schemeClr val="bg1"/>
+                        </a:solidFill>
+                        <a:effectLst/>
+                        <a:uLnTx/>
+                        <a:uFillTx/>
+                        <a:latin typeface="Symbol" pitchFamily="2" charset="2"/>
+                        <a:ea typeface="+mn-ea"/>
+                        <a:cs typeface="+mn-cs"/>
+                      </a:endParaRPr>
+                    </a:p>
+                  </a:txBody>
+                  <a:tcPr marL="31510" marR="31510" marT="17506" marB="17506" anchor="ctr">
+                    <a:lnL w="12700" cap="flat" cmpd="sng" algn="ctr">
+                      <a:solidFill>
+                        <a:schemeClr val="bg1"/>
+                      </a:solidFill>
+                      <a:prstDash val="solid"/>
+                      <a:round/>
+                      <a:headEnd type="none" w="med" len="med"/>
+                      <a:tailEnd type="none" w="med" len="med"/>
+                    </a:lnL>
+                    <a:lnR w="12700" cap="flat" cmpd="sng" algn="ctr">
+                      <a:solidFill>
+                        <a:schemeClr val="bg1"/>
+                      </a:solidFill>
+                      <a:prstDash val="solid"/>
+                      <a:round/>
+                      <a:headEnd type="none" w="med" len="med"/>
+                      <a:tailEnd type="none" w="med" len="med"/>
+                    </a:lnR>
+                    <a:lnT w="12700" cap="flat" cmpd="sng" algn="ctr">
+                      <a:noFill/>
+                      <a:prstDash val="solid"/>
+                      <a:round/>
+                      <a:headEnd type="none" w="med" len="med"/>
+                      <a:tailEnd type="none" w="med" len="med"/>
+                    </a:lnT>
+                    <a:lnB w="12700" cap="flat" cmpd="sng" algn="ctr">
+                      <a:solidFill>
+                        <a:schemeClr val="bg1"/>
+                      </a:solidFill>
+                      <a:prstDash val="solid"/>
+                      <a:round/>
+                      <a:headEnd type="none" w="med" len="med"/>
+                      <a:tailEnd type="none" w="med" len="med"/>
+                    </a:lnB>
+                    <a:lnTlToBr w="12700" cmpd="sng">
+                      <a:noFill/>
+                      <a:prstDash val="solid"/>
+                    </a:lnTlToBr>
+                    <a:lnBlToTr w="12700" cmpd="sng">
+                      <a:noFill/>
+                      <a:prstDash val="solid"/>
+                    </a:lnBlToTr>
+                    <a:solidFill>
+                      <a:srgbClr val="037404"/>
+                    </a:solidFill>
+                  </a:tcPr>
+                </a:tc>
+                <a:tc>
+                  <a:txBody>
+                    <a:bodyPr/>
+                    <a:lstStyle/>
+                    <a:p>
+                      <a:pPr marL="0" marR="0" lvl="0" indent="0" algn="ctr" defTabSz="914400" rtl="0" eaLnBrk="1" fontAlgn="auto" latinLnBrk="0" hangingPunct="1">
+                        <a:lnSpc>
+                          <a:spcPct val="100000"/>
+                        </a:lnSpc>
+                        <a:spcBef>
+                          <a:spcPts val="0"/>
+                        </a:spcBef>
+                        <a:spcAft>
+                          <a:spcPts val="0"/>
+                        </a:spcAft>
+                        <a:buClrTx/>
+                        <a:buSzTx/>
+                        <a:buFontTx/>
+                        <a:buNone/>
+                        <a:tabLst/>
+                        <a:defRPr/>
+                      </a:pPr>
+                      <a:r>
+                        <a:rPr kumimoji="0" lang="en-US" sz="1400" b="0" i="0" u="none" strike="noStrike" kern="1200" cap="none" spc="0" normalizeH="0" baseline="0" noProof="0" dirty="0">
+                          <a:ln>
+                            <a:noFill/>
+                          </a:ln>
+                          <a:solidFill>
+                            <a:schemeClr val="bg1"/>
+                          </a:solidFill>
+                          <a:effectLst/>
+                          <a:uLnTx/>
+                          <a:uFillTx/>
+                          <a:latin typeface="Arial"/>
+                          <a:ea typeface="+mn-ea"/>
+                          <a:cs typeface="+mn-cs"/>
+                        </a:rPr>
+                        <a:t>✓</a:t>
+                      </a:r>
+                      <a:endParaRPr kumimoji="0" lang="en-US" sz="1400" b="0" i="0" u="none" strike="noStrike" kern="1200" cap="none" spc="0" normalizeH="0" baseline="0" noProof="0" dirty="0">
+                        <a:ln>
+                          <a:noFill/>
+                        </a:ln>
+                        <a:solidFill>
+                          <a:schemeClr val="bg1"/>
+                        </a:solidFill>
+                        <a:effectLst/>
+                        <a:uLnTx/>
+                        <a:uFillTx/>
+                        <a:latin typeface="Symbol" pitchFamily="2" charset="2"/>
+                        <a:ea typeface="+mn-ea"/>
+                        <a:cs typeface="+mn-cs"/>
+                      </a:endParaRPr>
+                    </a:p>
+                  </a:txBody>
+                  <a:tcPr marL="31510" marR="31510" marT="17506" marB="17506" anchor="ctr">
+                    <a:lnL w="12700" cap="flat" cmpd="sng" algn="ctr">
+                      <a:solidFill>
+                        <a:schemeClr val="bg1"/>
+                      </a:solidFill>
+                      <a:prstDash val="solid"/>
+                      <a:round/>
+                      <a:headEnd type="none" w="med" len="med"/>
+                      <a:tailEnd type="none" w="med" len="med"/>
+                    </a:lnL>
+                    <a:lnR>
+                      <a:noFill/>
+                    </a:lnR>
+                    <a:lnT w="12700" cap="flat" cmpd="sng" algn="ctr">
+                      <a:noFill/>
+                      <a:prstDash val="solid"/>
+                      <a:round/>
+                      <a:headEnd type="none" w="med" len="med"/>
+                      <a:tailEnd type="none" w="med" len="med"/>
+                    </a:lnT>
+                    <a:lnB w="12700" cap="flat" cmpd="sng" algn="ctr">
+                      <a:solidFill>
+                        <a:schemeClr val="bg1"/>
+                      </a:solidFill>
+                      <a:prstDash val="solid"/>
+                      <a:round/>
+                      <a:headEnd type="none" w="med" len="med"/>
+                      <a:tailEnd type="none" w="med" len="med"/>
+                    </a:lnB>
+                    <a:lnTlToBr w="12700" cmpd="sng">
+                      <a:noFill/>
+                      <a:prstDash val="solid"/>
+                    </a:lnTlToBr>
+                    <a:lnBlToTr w="12700" cmpd="sng">
+                      <a:noFill/>
+                      <a:prstDash val="solid"/>
+                    </a:lnBlToTr>
+                    <a:solidFill>
+                      <a:srgbClr val="037404"/>
+                    </a:solidFill>
+                  </a:tcPr>
+                </a:tc>
+                <a:extLst>
+                  <a:ext uri="{0D108BD9-81ED-4DB2-BD59-A6C34878D82A}">
+                    <a16:rowId xmlns:a16="http://schemas.microsoft.com/office/drawing/2014/main" val="964048310"/>
+                  </a:ext>
+                </a:extLst>
+              </a:tr>
+              <a:tr h="365760">
+                <a:tc>
+                  <a:txBody>
+                    <a:bodyPr/>
+                    <a:lstStyle/>
+                    <a:p>
+                      <a:pPr algn="l">
+                        <a:buNone/>
+                      </a:pPr>
+                      <a:r>
+                        <a:rPr lang="en-US" sz="1200" b="0" dirty="0">
+                          <a:effectLst/>
+                        </a:rPr>
+                        <a:t>AI-generated text alternative</a:t>
+                      </a:r>
+                      <a:endParaRPr lang="en-US" sz="1200" b="0" dirty="0">
+                        <a:effectLst/>
+                        <a:latin typeface="Aptos" panose="020B0004020202020204" pitchFamily="34" charset="0"/>
+                      </a:endParaRPr>
+                    </a:p>
+                  </a:txBody>
+                  <a:tcPr marL="31510" marR="31510" marT="17506" marB="17506" anchor="ctr">
+                    <a:lnL>
+                      <a:noFill/>
+                    </a:lnL>
+                    <a:lnR w="12700" cap="flat" cmpd="sng" algn="ctr">
+                      <a:solidFill>
+                        <a:schemeClr val="tx1">
+                          <a:lumMod val="50000"/>
+                          <a:lumOff val="50000"/>
+                        </a:schemeClr>
+                      </a:solidFill>
+                      <a:prstDash val="solid"/>
+                      <a:round/>
+                      <a:headEnd type="none" w="med" len="med"/>
+                      <a:tailEnd type="none" w="med" len="med"/>
+                    </a:lnR>
+                    <a:lnT w="12700" cap="flat" cmpd="sng" algn="ctr">
+                      <a:solidFill>
+                        <a:schemeClr val="tx1">
+                          <a:lumMod val="50000"/>
+                          <a:lumOff val="50000"/>
+                        </a:schemeClr>
+                      </a:solidFill>
+                      <a:prstDash val="solid"/>
+                      <a:round/>
+                      <a:headEnd type="none" w="med" len="med"/>
+                      <a:tailEnd type="none" w="med" len="med"/>
+                    </a:lnT>
+                    <a:lnB w="12700" cap="flat" cmpd="sng" algn="ctr">
+                      <a:solidFill>
+                        <a:schemeClr val="tx1">
+                          <a:lumMod val="50000"/>
+                          <a:lumOff val="50000"/>
+                        </a:schemeClr>
+                      </a:solidFill>
+                      <a:prstDash val="solid"/>
+                      <a:round/>
+                      <a:headEnd type="none" w="med" len="med"/>
+                      <a:tailEnd type="none" w="med" len="med"/>
+                    </a:lnB>
+                    <a:lnTlToBr w="12700" cmpd="sng">
+                      <a:noFill/>
+                      <a:prstDash val="solid"/>
+                    </a:lnTlToBr>
+                    <a:lnBlToTr w="12700" cmpd="sng">
+                      <a:noFill/>
+                      <a:prstDash val="solid"/>
+                    </a:lnBlToTr>
+                    <a:noFill/>
+                  </a:tcPr>
+                </a:tc>
+                <a:tc>
+                  <a:txBody>
+                    <a:bodyPr/>
+                    <a:lstStyle/>
+                    <a:p>
+                      <a:pPr marL="0" marR="0" lvl="0" indent="0" algn="ctr" defTabSz="914400" rtl="0" eaLnBrk="1" fontAlgn="auto" latinLnBrk="0" hangingPunct="1">
+                        <a:lnSpc>
+                          <a:spcPct val="100000"/>
+                        </a:lnSpc>
+                        <a:spcBef>
+                          <a:spcPts val="0"/>
+                        </a:spcBef>
+                        <a:spcAft>
+                          <a:spcPts val="0"/>
+                        </a:spcAft>
+                        <a:buClrTx/>
+                        <a:buSzTx/>
+                        <a:buFontTx/>
+                        <a:buNone/>
+                        <a:tabLst/>
+                        <a:defRPr/>
+                      </a:pPr>
+                      <a:r>
+                        <a:rPr kumimoji="0" lang="en-US" sz="1400" b="0" i="0" u="none" strike="noStrike" kern="1200" cap="none" spc="0" normalizeH="0" baseline="0" noProof="0" dirty="0">
+                          <a:ln>
+                            <a:noFill/>
+                          </a:ln>
+                          <a:solidFill>
+                            <a:srgbClr val="000000"/>
+                          </a:solidFill>
+                          <a:effectLst/>
+                          <a:uLnTx/>
+                          <a:uFillTx/>
+                          <a:latin typeface="Arial"/>
+                          <a:ea typeface="+mn-ea"/>
+                          <a:cs typeface="+mn-cs"/>
+                        </a:rPr>
+                        <a:t>X</a:t>
+                      </a:r>
+                      <a:endParaRPr kumimoji="0" lang="en-US" sz="1400" b="0" i="0" u="none" strike="noStrike" kern="1200" cap="none" spc="0" normalizeH="0" baseline="0" noProof="0" dirty="0">
+                        <a:ln>
+                          <a:noFill/>
+                        </a:ln>
+                        <a:solidFill>
+                          <a:srgbClr val="000000"/>
+                        </a:solidFill>
+                        <a:effectLst/>
+                        <a:uLnTx/>
+                        <a:uFillTx/>
+                        <a:latin typeface="Aptos" panose="020B0004020202020204" pitchFamily="34" charset="0"/>
+                        <a:ea typeface="+mn-ea"/>
+                        <a:cs typeface="+mn-cs"/>
+                      </a:endParaRPr>
+                    </a:p>
+                  </a:txBody>
+                  <a:tcPr marL="31510" marR="31510" marT="17506" marB="17506" anchor="ctr">
+                    <a:lnL w="12700" cap="flat" cmpd="sng" algn="ctr">
+                      <a:solidFill>
+                        <a:schemeClr val="tx1">
+                          <a:lumMod val="50000"/>
+                          <a:lumOff val="50000"/>
+                        </a:schemeClr>
+                      </a:solidFill>
+                      <a:prstDash val="solid"/>
+                      <a:round/>
+                      <a:headEnd type="none" w="med" len="med"/>
+                      <a:tailEnd type="none" w="med" len="med"/>
+                    </a:lnL>
+                    <a:lnR w="12700" cap="flat" cmpd="sng" algn="ctr">
+                      <a:solidFill>
+                        <a:schemeClr val="bg1"/>
+                      </a:solidFill>
+                      <a:prstDash val="solid"/>
+                      <a:round/>
+                      <a:headEnd type="none" w="med" len="med"/>
+                      <a:tailEnd type="none" w="med" len="med"/>
+                    </a:lnR>
+                    <a:lnT w="12700" cap="flat" cmpd="sng" algn="ctr">
+                      <a:solidFill>
+                        <a:schemeClr val="bg1"/>
+                      </a:solidFill>
+                      <a:prstDash val="solid"/>
+                      <a:round/>
+                      <a:headEnd type="none" w="med" len="med"/>
+                      <a:tailEnd type="none" w="med" len="med"/>
+                    </a:lnT>
+                    <a:lnB w="12700" cap="flat" cmpd="sng" algn="ctr">
+                      <a:solidFill>
+                        <a:schemeClr val="tx1">
+                          <a:lumMod val="50000"/>
+                          <a:lumOff val="50000"/>
+                        </a:schemeClr>
+                      </a:solidFill>
+                      <a:prstDash val="solid"/>
+                      <a:round/>
+                      <a:headEnd type="none" w="med" len="med"/>
+                      <a:tailEnd type="none" w="med" len="med"/>
+                    </a:lnB>
+                    <a:lnTlToBr w="12700" cmpd="sng">
+                      <a:noFill/>
+                      <a:prstDash val="solid"/>
+                    </a:lnTlToBr>
+                    <a:lnBlToTr w="12700" cmpd="sng">
+                      <a:noFill/>
+                      <a:prstDash val="solid"/>
+                    </a:lnBlToTr>
+                    <a:noFill/>
+                  </a:tcPr>
+                </a:tc>
+                <a:tc>
+                  <a:txBody>
+                    <a:bodyPr/>
+                    <a:lstStyle/>
+                    <a:p>
+                      <a:pPr marL="0" marR="0" lvl="0" indent="0" algn="ctr" defTabSz="914400" rtl="0" eaLnBrk="1" fontAlgn="auto" latinLnBrk="0" hangingPunct="1">
+                        <a:lnSpc>
+                          <a:spcPct val="100000"/>
+                        </a:lnSpc>
+                        <a:spcBef>
+                          <a:spcPts val="0"/>
+                        </a:spcBef>
+                        <a:spcAft>
+                          <a:spcPts val="0"/>
+                        </a:spcAft>
+                        <a:buClrTx/>
+                        <a:buSzTx/>
+                        <a:buFontTx/>
+                        <a:buNone/>
+                        <a:tabLst/>
+                        <a:defRPr/>
+                      </a:pPr>
+                      <a:r>
+                        <a:rPr kumimoji="0" lang="en-US" sz="1400" b="0" i="0" u="none" strike="noStrike" kern="1200" cap="none" spc="0" normalizeH="0" baseline="0" noProof="0" dirty="0">
+                          <a:ln>
+                            <a:noFill/>
+                          </a:ln>
+                          <a:solidFill>
+                            <a:schemeClr val="bg1"/>
+                          </a:solidFill>
+                          <a:effectLst/>
+                          <a:uLnTx/>
+                          <a:uFillTx/>
+                          <a:latin typeface="+mn-lt"/>
+                          <a:ea typeface="+mn-ea"/>
+                          <a:cs typeface="+mn-cs"/>
+                        </a:rPr>
+                        <a:t>✓</a:t>
+                      </a:r>
+                      <a:endParaRPr kumimoji="0" lang="en-US" sz="1400" b="0" i="0" u="none" strike="noStrike" kern="1200" cap="none" spc="0" normalizeH="0" baseline="0" noProof="0" dirty="0">
+                        <a:ln>
+                          <a:noFill/>
+                        </a:ln>
+                        <a:solidFill>
+                          <a:schemeClr val="bg1"/>
+                        </a:solidFill>
+                        <a:effectLst/>
+                        <a:uLnTx/>
+                        <a:uFillTx/>
+                        <a:latin typeface="Symbol" pitchFamily="2" charset="2"/>
+                        <a:ea typeface="+mn-ea"/>
+                        <a:cs typeface="+mn-cs"/>
+                      </a:endParaRPr>
+                    </a:p>
+                  </a:txBody>
+                  <a:tcPr marL="31510" marR="31510" marT="17506" marB="17506" anchor="ctr">
+                    <a:lnL w="12700" cap="flat" cmpd="sng" algn="ctr">
+                      <a:solidFill>
+                        <a:schemeClr val="bg1"/>
+                      </a:solidFill>
+                      <a:prstDash val="solid"/>
+                      <a:round/>
+                      <a:headEnd type="none" w="med" len="med"/>
+                      <a:tailEnd type="none" w="med" len="med"/>
+                    </a:lnL>
+                    <a:lnR w="12700" cap="flat" cmpd="sng" algn="ctr">
+                      <a:solidFill>
+                        <a:schemeClr val="bg1"/>
+                      </a:solidFill>
+                      <a:prstDash val="solid"/>
+                      <a:round/>
+                      <a:headEnd type="none" w="med" len="med"/>
+                      <a:tailEnd type="none" w="med" len="med"/>
+                    </a:lnR>
+                    <a:lnT w="12700" cap="flat" cmpd="sng" algn="ctr">
+                      <a:solidFill>
+                        <a:schemeClr val="bg1"/>
+                      </a:solidFill>
+                      <a:prstDash val="solid"/>
+                      <a:round/>
+                      <a:headEnd type="none" w="med" len="med"/>
+                      <a:tailEnd type="none" w="med" len="med"/>
+                    </a:lnT>
+                    <a:lnB w="12700" cap="flat" cmpd="sng" algn="ctr">
+                      <a:solidFill>
+                        <a:schemeClr val="bg1"/>
+                      </a:solidFill>
+                      <a:prstDash val="solid"/>
+                      <a:round/>
+                      <a:headEnd type="none" w="med" len="med"/>
+                      <a:tailEnd type="none" w="med" len="med"/>
+                    </a:lnB>
+                    <a:lnTlToBr w="12700" cmpd="sng">
+                      <a:noFill/>
+                      <a:prstDash val="solid"/>
+                    </a:lnTlToBr>
+                    <a:lnBlToTr w="12700" cmpd="sng">
+                      <a:noFill/>
+                      <a:prstDash val="solid"/>
+                    </a:lnBlToTr>
+                    <a:solidFill>
+                      <a:srgbClr val="037404"/>
+                    </a:solidFill>
+                  </a:tcPr>
+                </a:tc>
+                <a:tc>
+                  <a:txBody>
+                    <a:bodyPr/>
+                    <a:lstStyle/>
+                    <a:p>
+                      <a:pPr marL="0" marR="0" lvl="0" indent="0" algn="ctr" defTabSz="914400" rtl="0" eaLnBrk="1" fontAlgn="auto" latinLnBrk="0" hangingPunct="1">
+                        <a:lnSpc>
+                          <a:spcPct val="100000"/>
+                        </a:lnSpc>
+                        <a:spcBef>
+                          <a:spcPts val="0"/>
+                        </a:spcBef>
+                        <a:spcAft>
+                          <a:spcPts val="0"/>
+                        </a:spcAft>
+                        <a:buClrTx/>
+                        <a:buSzTx/>
+                        <a:buFontTx/>
+                        <a:buNone/>
+                        <a:tabLst/>
+                        <a:defRPr/>
+                      </a:pPr>
+                      <a:r>
+                        <a:rPr kumimoji="0" lang="en-US" sz="1400" b="0" i="0" u="none" strike="noStrike" kern="1200" cap="none" spc="0" normalizeH="0" baseline="0" noProof="0" dirty="0">
+                          <a:ln>
+                            <a:noFill/>
+                          </a:ln>
+                          <a:solidFill>
+                            <a:srgbClr val="000000"/>
+                          </a:solidFill>
+                          <a:effectLst/>
+                          <a:uLnTx/>
+                          <a:uFillTx/>
+                          <a:latin typeface="Arial"/>
+                          <a:ea typeface="+mn-ea"/>
+                          <a:cs typeface="+mn-cs"/>
+                        </a:rPr>
+                        <a:t>X</a:t>
+                      </a:r>
+                      <a:endParaRPr kumimoji="0" lang="en-US" sz="1400" b="0" i="0" u="none" strike="noStrike" kern="1200" cap="none" spc="0" normalizeH="0" baseline="0" noProof="0" dirty="0">
+                        <a:ln>
+                          <a:noFill/>
+                        </a:ln>
+                        <a:solidFill>
+                          <a:srgbClr val="000000"/>
+                        </a:solidFill>
+                        <a:effectLst/>
+                        <a:uLnTx/>
+                        <a:uFillTx/>
+                        <a:latin typeface="Aptos" panose="020B0004020202020204" pitchFamily="34" charset="0"/>
+                        <a:ea typeface="+mn-ea"/>
+                        <a:cs typeface="+mn-cs"/>
+                      </a:endParaRPr>
+                    </a:p>
+                  </a:txBody>
+                  <a:tcPr marL="31510" marR="31510" marT="17506" marB="17506" anchor="ctr">
+                    <a:lnL w="12700" cap="flat" cmpd="sng" algn="ctr">
+                      <a:solidFill>
+                        <a:schemeClr val="bg1"/>
+                      </a:solidFill>
+                      <a:prstDash val="solid"/>
+                      <a:round/>
+                      <a:headEnd type="none" w="med" len="med"/>
+                      <a:tailEnd type="none" w="med" len="med"/>
+                    </a:lnL>
+                    <a:lnR>
+                      <a:noFill/>
+                    </a:lnR>
+                    <a:lnT w="12700" cap="flat" cmpd="sng" algn="ctr">
+                      <a:solidFill>
+                        <a:schemeClr val="bg1"/>
+                      </a:solidFill>
+                      <a:prstDash val="solid"/>
+                      <a:round/>
+                      <a:headEnd type="none" w="med" len="med"/>
+                      <a:tailEnd type="none" w="med" len="med"/>
+                    </a:lnT>
+                    <a:lnB w="12700" cap="flat" cmpd="sng" algn="ctr">
+                      <a:solidFill>
+                        <a:schemeClr val="tx1">
+                          <a:lumMod val="50000"/>
+                          <a:lumOff val="50000"/>
+                        </a:schemeClr>
+                      </a:solidFill>
+                      <a:prstDash val="solid"/>
+                      <a:round/>
+                      <a:headEnd type="none" w="med" len="med"/>
+                      <a:tailEnd type="none" w="med" len="med"/>
+                    </a:lnB>
+                    <a:lnTlToBr w="12700" cmpd="sng">
+                      <a:noFill/>
+                      <a:prstDash val="solid"/>
+                    </a:lnTlToBr>
+                    <a:lnBlToTr w="12700" cmpd="sng">
+                      <a:noFill/>
+                      <a:prstDash val="solid"/>
+                    </a:lnBlToTr>
+                    <a:noFill/>
+                  </a:tcPr>
+                </a:tc>
+                <a:extLst>
+                  <a:ext uri="{0D108BD9-81ED-4DB2-BD59-A6C34878D82A}">
+                    <a16:rowId xmlns:a16="http://schemas.microsoft.com/office/drawing/2014/main" val="615010691"/>
+                  </a:ext>
+                </a:extLst>
+              </a:tr>
+              <a:tr h="365760">
+                <a:tc>
+                  <a:txBody>
+                    <a:bodyPr/>
+                    <a:lstStyle/>
+                    <a:p>
+                      <a:pPr algn="l">
+                        <a:buNone/>
+                      </a:pPr>
+                      <a:r>
+                        <a:rPr lang="en-US" sz="1200" b="0" dirty="0">
+                          <a:effectLst/>
+                        </a:rPr>
+                        <a:t>Should be decorative (divider line)</a:t>
+                      </a:r>
+                      <a:endParaRPr lang="en-US" sz="1200" b="0" dirty="0">
+                        <a:effectLst/>
+                        <a:latin typeface="Aptos" panose="020B0004020202020204" pitchFamily="34" charset="0"/>
+                      </a:endParaRPr>
+                    </a:p>
+                  </a:txBody>
+                  <a:tcPr marL="31510" marR="31510" marT="17506" marB="17506" anchor="ctr">
+                    <a:lnL>
+                      <a:noFill/>
+                    </a:lnL>
+                    <a:lnR w="12700" cap="flat" cmpd="sng" algn="ctr">
+                      <a:solidFill>
+                        <a:schemeClr val="tx1">
+                          <a:lumMod val="50000"/>
+                          <a:lumOff val="50000"/>
+                        </a:schemeClr>
+                      </a:solidFill>
+                      <a:prstDash val="solid"/>
+                      <a:round/>
+                      <a:headEnd type="none" w="med" len="med"/>
+                      <a:tailEnd type="none" w="med" len="med"/>
+                    </a:lnR>
+                    <a:lnT w="12700" cap="flat" cmpd="sng" algn="ctr">
+                      <a:solidFill>
+                        <a:schemeClr val="tx1">
+                          <a:lumMod val="50000"/>
+                          <a:lumOff val="50000"/>
+                        </a:schemeClr>
+                      </a:solidFill>
+                      <a:prstDash val="solid"/>
+                      <a:round/>
+                      <a:headEnd type="none" w="med" len="med"/>
+                      <a:tailEnd type="none" w="med" len="med"/>
+                    </a:lnT>
+                    <a:lnB w="12700" cap="flat" cmpd="sng" algn="ctr">
+                      <a:solidFill>
+                        <a:schemeClr val="tx1">
+                          <a:lumMod val="50000"/>
+                          <a:lumOff val="50000"/>
+                        </a:schemeClr>
+                      </a:solidFill>
+                      <a:prstDash val="solid"/>
+                      <a:round/>
+                      <a:headEnd type="none" w="med" len="med"/>
+                      <a:tailEnd type="none" w="med" len="med"/>
+                    </a:lnB>
+                    <a:lnTlToBr w="12700" cmpd="sng">
+                      <a:noFill/>
+                      <a:prstDash val="solid"/>
+                    </a:lnTlToBr>
+                    <a:lnBlToTr w="12700" cmpd="sng">
+                      <a:noFill/>
+                      <a:prstDash val="solid"/>
+                    </a:lnBlToTr>
+                    <a:noFill/>
+                  </a:tcPr>
+                </a:tc>
+                <a:tc>
+                  <a:txBody>
+                    <a:bodyPr/>
+                    <a:lstStyle/>
+                    <a:p>
+                      <a:pPr marL="0" marR="0" lvl="0" indent="0" algn="ctr" defTabSz="914400" rtl="0" eaLnBrk="1" fontAlgn="auto" latinLnBrk="0" hangingPunct="1">
+                        <a:lnSpc>
+                          <a:spcPct val="100000"/>
+                        </a:lnSpc>
+                        <a:spcBef>
+                          <a:spcPts val="0"/>
+                        </a:spcBef>
+                        <a:spcAft>
+                          <a:spcPts val="0"/>
+                        </a:spcAft>
+                        <a:buClrTx/>
+                        <a:buSzTx/>
+                        <a:buFontTx/>
+                        <a:buNone/>
+                        <a:tabLst/>
+                        <a:defRPr/>
+                      </a:pPr>
+                      <a:r>
+                        <a:rPr kumimoji="0" lang="en-US" sz="1400" b="0" i="0" u="none" strike="noStrike" kern="1200" cap="none" spc="0" normalizeH="0" baseline="0" noProof="0" dirty="0">
+                          <a:ln>
+                            <a:noFill/>
+                          </a:ln>
+                          <a:solidFill>
+                            <a:srgbClr val="000000"/>
+                          </a:solidFill>
+                          <a:effectLst/>
+                          <a:uLnTx/>
+                          <a:uFillTx/>
+                          <a:latin typeface="Arial"/>
+                          <a:ea typeface="+mn-ea"/>
+                          <a:cs typeface="+mn-cs"/>
+                        </a:rPr>
+                        <a:t>X</a:t>
+                      </a:r>
+                      <a:endParaRPr kumimoji="0" lang="en-US" sz="1400" b="0" i="0" u="none" strike="noStrike" kern="1200" cap="none" spc="0" normalizeH="0" baseline="0" noProof="0" dirty="0">
+                        <a:ln>
+                          <a:noFill/>
+                        </a:ln>
+                        <a:solidFill>
+                          <a:srgbClr val="000000"/>
+                        </a:solidFill>
+                        <a:effectLst/>
+                        <a:uLnTx/>
+                        <a:uFillTx/>
+                        <a:latin typeface="Aptos" panose="020B0004020202020204" pitchFamily="34" charset="0"/>
+                        <a:ea typeface="+mn-ea"/>
+                        <a:cs typeface="+mn-cs"/>
+                      </a:endParaRPr>
+                    </a:p>
+                  </a:txBody>
+                  <a:tcPr marL="31510" marR="31510" marT="17506" marB="17506" anchor="ctr">
+                    <a:lnL w="12700" cap="flat" cmpd="sng" algn="ctr">
+                      <a:solidFill>
+                        <a:schemeClr val="tx1">
+                          <a:lumMod val="50000"/>
+                          <a:lumOff val="50000"/>
+                        </a:schemeClr>
+                      </a:solidFill>
+                      <a:prstDash val="solid"/>
+                      <a:round/>
+                      <a:headEnd type="none" w="med" len="med"/>
+                      <a:tailEnd type="none" w="med" len="med"/>
+                    </a:lnL>
+                    <a:lnR w="12700" cap="flat" cmpd="sng" algn="ctr">
+                      <a:solidFill>
+                        <a:schemeClr val="tx1">
+                          <a:lumMod val="50000"/>
+                          <a:lumOff val="50000"/>
+                        </a:schemeClr>
+                      </a:solidFill>
+                      <a:prstDash val="solid"/>
+                      <a:round/>
+                      <a:headEnd type="none" w="med" len="med"/>
+                      <a:tailEnd type="none" w="med" len="med"/>
+                    </a:lnR>
+                    <a:lnT w="12700" cap="flat" cmpd="sng" algn="ctr">
+                      <a:solidFill>
+                        <a:schemeClr val="tx1">
+                          <a:lumMod val="50000"/>
+                          <a:lumOff val="50000"/>
+                        </a:schemeClr>
+                      </a:solidFill>
+                      <a:prstDash val="solid"/>
+                      <a:round/>
+                      <a:headEnd type="none" w="med" len="med"/>
+                      <a:tailEnd type="none" w="med" len="med"/>
+                    </a:lnT>
+                    <a:lnB w="12700" cap="flat" cmpd="sng" algn="ctr">
+                      <a:solidFill>
+                        <a:schemeClr val="tx1">
+                          <a:lumMod val="50000"/>
+                          <a:lumOff val="50000"/>
+                        </a:schemeClr>
+                      </a:solidFill>
+                      <a:prstDash val="solid"/>
+                      <a:round/>
+                      <a:headEnd type="none" w="med" len="med"/>
+                      <a:tailEnd type="none" w="med" len="med"/>
+                    </a:lnB>
+                    <a:lnTlToBr w="12700" cmpd="sng">
+                      <a:noFill/>
+                      <a:prstDash val="solid"/>
+                    </a:lnTlToBr>
+                    <a:lnBlToTr w="12700" cmpd="sng">
+                      <a:noFill/>
+                      <a:prstDash val="solid"/>
+                    </a:lnBlToTr>
+                    <a:noFill/>
+                  </a:tcPr>
+                </a:tc>
+                <a:tc>
+                  <a:txBody>
+                    <a:bodyPr/>
+                    <a:lstStyle/>
+                    <a:p>
+                      <a:pPr marL="0" marR="0" lvl="0" indent="0" algn="ctr" defTabSz="914400" rtl="0" eaLnBrk="1" fontAlgn="auto" latinLnBrk="0" hangingPunct="1">
+                        <a:lnSpc>
+                          <a:spcPct val="100000"/>
+                        </a:lnSpc>
+                        <a:spcBef>
+                          <a:spcPts val="0"/>
+                        </a:spcBef>
+                        <a:spcAft>
+                          <a:spcPts val="0"/>
+                        </a:spcAft>
+                        <a:buClrTx/>
+                        <a:buSzTx/>
+                        <a:buFontTx/>
+                        <a:buNone/>
+                        <a:tabLst/>
+                        <a:defRPr/>
+                      </a:pPr>
+                      <a:r>
+                        <a:rPr kumimoji="0" lang="en-US" sz="1400" b="0" i="0" u="none" strike="noStrike" kern="1200" cap="none" spc="0" normalizeH="0" baseline="0" noProof="0" dirty="0">
+                          <a:ln>
+                            <a:noFill/>
+                          </a:ln>
+                          <a:solidFill>
+                            <a:srgbClr val="000000"/>
+                          </a:solidFill>
+                          <a:effectLst/>
+                          <a:uLnTx/>
+                          <a:uFillTx/>
+                          <a:latin typeface="Arial"/>
+                          <a:ea typeface="+mn-ea"/>
+                          <a:cs typeface="+mn-cs"/>
+                        </a:rPr>
+                        <a:t>X</a:t>
+                      </a:r>
+                      <a:endParaRPr kumimoji="0" lang="en-US" sz="1400" b="0" i="0" u="none" strike="noStrike" kern="1200" cap="none" spc="0" normalizeH="0" baseline="0" noProof="0" dirty="0">
+                        <a:ln>
+                          <a:noFill/>
+                        </a:ln>
+                        <a:solidFill>
+                          <a:srgbClr val="000000"/>
+                        </a:solidFill>
+                        <a:effectLst/>
+                        <a:uLnTx/>
+                        <a:uFillTx/>
+                        <a:latin typeface="Aptos" panose="020B0004020202020204" pitchFamily="34" charset="0"/>
+                        <a:ea typeface="+mn-ea"/>
+                        <a:cs typeface="+mn-cs"/>
+                      </a:endParaRPr>
+                    </a:p>
+                  </a:txBody>
+                  <a:tcPr marL="31510" marR="31510" marT="17506" marB="17506" anchor="ctr">
+                    <a:lnL w="12700" cap="flat" cmpd="sng" algn="ctr">
+                      <a:solidFill>
+                        <a:schemeClr val="tx1">
+                          <a:lumMod val="50000"/>
+                          <a:lumOff val="50000"/>
+                        </a:schemeClr>
+                      </a:solidFill>
+                      <a:prstDash val="solid"/>
+                      <a:round/>
+                      <a:headEnd type="none" w="med" len="med"/>
+                      <a:tailEnd type="none" w="med" len="med"/>
+                    </a:lnL>
+                    <a:lnR w="12700" cap="flat" cmpd="sng" algn="ctr">
+                      <a:solidFill>
+                        <a:schemeClr val="tx1">
+                          <a:lumMod val="50000"/>
+                          <a:lumOff val="50000"/>
+                        </a:schemeClr>
+                      </a:solidFill>
+                      <a:prstDash val="solid"/>
+                      <a:round/>
+                      <a:headEnd type="none" w="med" len="med"/>
+                      <a:tailEnd type="none" w="med" len="med"/>
+                    </a:lnR>
+                    <a:lnT w="12700" cap="flat" cmpd="sng" algn="ctr">
+                      <a:solidFill>
+                        <a:schemeClr val="bg1"/>
+                      </a:solidFill>
+                      <a:prstDash val="solid"/>
+                      <a:round/>
+                      <a:headEnd type="none" w="med" len="med"/>
+                      <a:tailEnd type="none" w="med" len="med"/>
+                    </a:lnT>
+                    <a:lnB w="12700" cap="flat" cmpd="sng" algn="ctr">
+                      <a:solidFill>
+                        <a:schemeClr val="tx1">
+                          <a:lumMod val="50000"/>
+                          <a:lumOff val="50000"/>
+                        </a:schemeClr>
+                      </a:solidFill>
+                      <a:prstDash val="solid"/>
+                      <a:round/>
+                      <a:headEnd type="none" w="med" len="med"/>
+                      <a:tailEnd type="none" w="med" len="med"/>
+                    </a:lnB>
+                    <a:lnTlToBr w="12700" cmpd="sng">
+                      <a:noFill/>
+                      <a:prstDash val="solid"/>
+                    </a:lnTlToBr>
+                    <a:lnBlToTr w="12700" cmpd="sng">
+                      <a:noFill/>
+                      <a:prstDash val="solid"/>
+                    </a:lnBlToTr>
+                    <a:noFill/>
+                  </a:tcPr>
+                </a:tc>
+                <a:tc>
+                  <a:txBody>
+                    <a:bodyPr/>
+                    <a:lstStyle/>
+                    <a:p>
+                      <a:pPr marL="0" marR="0" lvl="0" indent="0" algn="ctr" defTabSz="914400" rtl="0" eaLnBrk="1" fontAlgn="auto" latinLnBrk="0" hangingPunct="1">
+                        <a:lnSpc>
+                          <a:spcPct val="100000"/>
+                        </a:lnSpc>
+                        <a:spcBef>
+                          <a:spcPts val="0"/>
+                        </a:spcBef>
+                        <a:spcAft>
+                          <a:spcPts val="0"/>
+                        </a:spcAft>
+                        <a:buClrTx/>
+                        <a:buSzTx/>
+                        <a:buFontTx/>
+                        <a:buNone/>
+                        <a:tabLst/>
+                        <a:defRPr/>
+                      </a:pPr>
+                      <a:r>
+                        <a:rPr kumimoji="0" lang="en-US" sz="1400" b="0" i="0" u="none" strike="noStrike" kern="1200" cap="none" spc="0" normalizeH="0" baseline="0" noProof="0">
+                          <a:ln>
+                            <a:noFill/>
+                          </a:ln>
+                          <a:solidFill>
+                            <a:srgbClr val="000000"/>
+                          </a:solidFill>
+                          <a:effectLst/>
+                          <a:uLnTx/>
+                          <a:uFillTx/>
+                          <a:latin typeface="Arial"/>
+                          <a:ea typeface="+mn-ea"/>
+                          <a:cs typeface="+mn-cs"/>
+                        </a:rPr>
+                        <a:t>X</a:t>
+                      </a:r>
+                      <a:endParaRPr kumimoji="0" lang="en-US" sz="1400" b="0" i="0" u="none" strike="noStrike" kern="1200" cap="none" spc="0" normalizeH="0" baseline="0" noProof="0" dirty="0">
+                        <a:ln>
+                          <a:noFill/>
+                        </a:ln>
+                        <a:solidFill>
+                          <a:srgbClr val="000000"/>
+                        </a:solidFill>
+                        <a:effectLst/>
+                        <a:uLnTx/>
+                        <a:uFillTx/>
+                        <a:latin typeface="Aptos" panose="020B0004020202020204" pitchFamily="34" charset="0"/>
+                        <a:ea typeface="+mn-ea"/>
+                        <a:cs typeface="+mn-cs"/>
+                      </a:endParaRPr>
+                    </a:p>
+                  </a:txBody>
+                  <a:tcPr marL="31510" marR="31510" marT="17506" marB="17506" anchor="ctr">
+                    <a:lnL w="12700" cap="flat" cmpd="sng" algn="ctr">
+                      <a:solidFill>
+                        <a:schemeClr val="tx1">
+                          <a:lumMod val="50000"/>
+                          <a:lumOff val="50000"/>
+                        </a:schemeClr>
+                      </a:solidFill>
+                      <a:prstDash val="solid"/>
+                      <a:round/>
+                      <a:headEnd type="none" w="med" len="med"/>
+                      <a:tailEnd type="none" w="med" len="med"/>
+                    </a:lnL>
+                    <a:lnR>
+                      <a:noFill/>
+                    </a:lnR>
+                    <a:lnT w="12700" cap="flat" cmpd="sng" algn="ctr">
+                      <a:solidFill>
+                        <a:schemeClr val="tx1">
+                          <a:lumMod val="50000"/>
+                          <a:lumOff val="50000"/>
+                        </a:schemeClr>
+                      </a:solidFill>
+                      <a:prstDash val="solid"/>
+                      <a:round/>
+                      <a:headEnd type="none" w="med" len="med"/>
+                      <a:tailEnd type="none" w="med" len="med"/>
+                    </a:lnT>
+                    <a:lnB w="12700" cap="flat" cmpd="sng" algn="ctr">
+                      <a:solidFill>
+                        <a:schemeClr val="tx1">
+                          <a:lumMod val="50000"/>
+                          <a:lumOff val="50000"/>
+                        </a:schemeClr>
+                      </a:solidFill>
+                      <a:prstDash val="solid"/>
+                      <a:round/>
+                      <a:headEnd type="none" w="med" len="med"/>
+                      <a:tailEnd type="none" w="med" len="med"/>
+                    </a:lnB>
+                    <a:lnTlToBr w="12700" cmpd="sng">
+                      <a:noFill/>
+                      <a:prstDash val="solid"/>
+                    </a:lnTlToBr>
+                    <a:lnBlToTr w="12700" cmpd="sng">
+                      <a:noFill/>
+                      <a:prstDash val="solid"/>
+                    </a:lnBlToTr>
+                    <a:noFill/>
+                  </a:tcPr>
+                </a:tc>
+                <a:extLst>
+                  <a:ext uri="{0D108BD9-81ED-4DB2-BD59-A6C34878D82A}">
+                    <a16:rowId xmlns:a16="http://schemas.microsoft.com/office/drawing/2014/main" val="1233889029"/>
+                  </a:ext>
+                </a:extLst>
+              </a:tr>
+              <a:tr h="365760">
+                <a:tc>
+                  <a:txBody>
+                    <a:bodyPr/>
+                    <a:lstStyle/>
+                    <a:p>
+                      <a:pPr algn="l">
+                        <a:buNone/>
+                      </a:pPr>
+                      <a:r>
+                        <a:rPr lang="en-US" sz="1200" b="0" dirty="0">
+                          <a:effectLst/>
+                        </a:rPr>
+                        <a:t>Vague alt text (2026 sales chart)</a:t>
+                      </a:r>
+                      <a:endParaRPr lang="en-US" sz="1200" b="0" dirty="0">
+                        <a:effectLst/>
+                        <a:latin typeface="Aptos" panose="020B0004020202020204" pitchFamily="34" charset="0"/>
+                      </a:endParaRPr>
+                    </a:p>
+                  </a:txBody>
+                  <a:tcPr marL="31510" marR="31510" marT="17506" marB="17506" anchor="ctr">
+                    <a:lnL>
+                      <a:noFill/>
+                    </a:lnL>
+                    <a:lnR w="12700" cap="flat" cmpd="sng" algn="ctr">
+                      <a:solidFill>
+                        <a:schemeClr val="tx1">
+                          <a:lumMod val="50000"/>
+                          <a:lumOff val="50000"/>
+                        </a:schemeClr>
+                      </a:solidFill>
+                      <a:prstDash val="solid"/>
+                      <a:round/>
+                      <a:headEnd type="none" w="med" len="med"/>
+                      <a:tailEnd type="none" w="med" len="med"/>
+                    </a:lnR>
+                    <a:lnT w="12700" cap="flat" cmpd="sng" algn="ctr">
+                      <a:solidFill>
+                        <a:schemeClr val="tx1">
+                          <a:lumMod val="50000"/>
+                          <a:lumOff val="50000"/>
+                        </a:schemeClr>
+                      </a:solidFill>
+                      <a:prstDash val="solid"/>
+                      <a:round/>
+                      <a:headEnd type="none" w="med" len="med"/>
+                      <a:tailEnd type="none" w="med" len="med"/>
+                    </a:lnT>
+                    <a:lnB w="12700" cap="flat" cmpd="sng" algn="ctr">
+                      <a:solidFill>
+                        <a:schemeClr val="tx1">
+                          <a:lumMod val="50000"/>
+                          <a:lumOff val="50000"/>
+                        </a:schemeClr>
+                      </a:solidFill>
+                      <a:prstDash val="solid"/>
+                      <a:round/>
+                      <a:headEnd type="none" w="med" len="med"/>
+                      <a:tailEnd type="none" w="med" len="med"/>
+                    </a:lnB>
+                    <a:lnTlToBr w="12700" cmpd="sng">
+                      <a:noFill/>
+                      <a:prstDash val="solid"/>
+                    </a:lnTlToBr>
+                    <a:lnBlToTr w="12700" cmpd="sng">
+                      <a:noFill/>
+                      <a:prstDash val="solid"/>
+                    </a:lnBlToTr>
+                    <a:noFill/>
+                  </a:tcPr>
+                </a:tc>
+                <a:tc>
+                  <a:txBody>
+                    <a:bodyPr/>
+                    <a:lstStyle/>
+                    <a:p>
+                      <a:pPr marL="0" marR="0" lvl="0" indent="0" algn="ctr" defTabSz="914400" rtl="0" eaLnBrk="1" fontAlgn="auto" latinLnBrk="0" hangingPunct="1">
+                        <a:lnSpc>
+                          <a:spcPct val="100000"/>
+                        </a:lnSpc>
+                        <a:spcBef>
+                          <a:spcPts val="0"/>
+                        </a:spcBef>
+                        <a:spcAft>
+                          <a:spcPts val="0"/>
+                        </a:spcAft>
+                        <a:buClrTx/>
+                        <a:buSzTx/>
+                        <a:buFontTx/>
+                        <a:buNone/>
+                        <a:tabLst/>
+                        <a:defRPr/>
+                      </a:pPr>
+                      <a:r>
+                        <a:rPr kumimoji="0" lang="en-US" sz="1400" b="0" i="0" u="none" strike="noStrike" kern="1200" cap="none" spc="0" normalizeH="0" baseline="0" noProof="0" dirty="0">
+                          <a:ln>
+                            <a:noFill/>
+                          </a:ln>
+                          <a:solidFill>
+                            <a:srgbClr val="000000"/>
+                          </a:solidFill>
+                          <a:effectLst/>
+                          <a:uLnTx/>
+                          <a:uFillTx/>
+                          <a:latin typeface="Arial"/>
+                          <a:ea typeface="+mn-ea"/>
+                          <a:cs typeface="+mn-cs"/>
+                        </a:rPr>
+                        <a:t>X</a:t>
+                      </a:r>
+                      <a:endParaRPr kumimoji="0" lang="en-US" sz="1400" b="0" i="0" u="none" strike="noStrike" kern="1200" cap="none" spc="0" normalizeH="0" baseline="0" noProof="0" dirty="0">
+                        <a:ln>
+                          <a:noFill/>
+                        </a:ln>
+                        <a:solidFill>
+                          <a:srgbClr val="000000"/>
+                        </a:solidFill>
+                        <a:effectLst/>
+                        <a:uLnTx/>
+                        <a:uFillTx/>
+                        <a:latin typeface="Aptos" panose="020B0004020202020204" pitchFamily="34" charset="0"/>
+                        <a:ea typeface="+mn-ea"/>
+                        <a:cs typeface="+mn-cs"/>
+                      </a:endParaRPr>
+                    </a:p>
+                  </a:txBody>
+                  <a:tcPr marL="31510" marR="31510" marT="17506" marB="17506" anchor="ctr">
+                    <a:lnL w="12700" cap="flat" cmpd="sng" algn="ctr">
+                      <a:solidFill>
+                        <a:schemeClr val="tx1">
+                          <a:lumMod val="50000"/>
+                          <a:lumOff val="50000"/>
+                        </a:schemeClr>
+                      </a:solidFill>
+                      <a:prstDash val="solid"/>
+                      <a:round/>
+                      <a:headEnd type="none" w="med" len="med"/>
+                      <a:tailEnd type="none" w="med" len="med"/>
+                    </a:lnL>
+                    <a:lnR w="12700" cap="flat" cmpd="sng" algn="ctr">
+                      <a:solidFill>
+                        <a:schemeClr val="tx1">
+                          <a:lumMod val="50000"/>
+                          <a:lumOff val="50000"/>
+                        </a:schemeClr>
+                      </a:solidFill>
+                      <a:prstDash val="solid"/>
+                      <a:round/>
+                      <a:headEnd type="none" w="med" len="med"/>
+                      <a:tailEnd type="none" w="med" len="med"/>
+                    </a:lnR>
+                    <a:lnT w="12700" cap="flat" cmpd="sng" algn="ctr">
+                      <a:solidFill>
+                        <a:schemeClr val="tx1">
+                          <a:lumMod val="50000"/>
+                          <a:lumOff val="50000"/>
+                        </a:schemeClr>
+                      </a:solidFill>
+                      <a:prstDash val="solid"/>
+                      <a:round/>
+                      <a:headEnd type="none" w="med" len="med"/>
+                      <a:tailEnd type="none" w="med" len="med"/>
+                    </a:lnT>
+                    <a:lnB w="12700" cap="flat" cmpd="sng" algn="ctr">
+                      <a:solidFill>
+                        <a:schemeClr val="tx1">
+                          <a:lumMod val="50000"/>
+                          <a:lumOff val="50000"/>
+                        </a:schemeClr>
+                      </a:solidFill>
+                      <a:prstDash val="solid"/>
+                      <a:round/>
+                      <a:headEnd type="none" w="med" len="med"/>
+                      <a:tailEnd type="none" w="med" len="med"/>
+                    </a:lnB>
+                    <a:lnTlToBr w="12700" cmpd="sng">
+                      <a:noFill/>
+                      <a:prstDash val="solid"/>
+                    </a:lnTlToBr>
+                    <a:lnBlToTr w="12700" cmpd="sng">
+                      <a:noFill/>
+                      <a:prstDash val="solid"/>
+                    </a:lnBlToTr>
+                    <a:noFill/>
+                  </a:tcPr>
+                </a:tc>
+                <a:tc>
+                  <a:txBody>
+                    <a:bodyPr/>
+                    <a:lstStyle/>
+                    <a:p>
+                      <a:pPr marL="0" marR="0" lvl="0" indent="0" algn="ctr" defTabSz="914400" rtl="0" eaLnBrk="1" fontAlgn="auto" latinLnBrk="0" hangingPunct="1">
+                        <a:lnSpc>
+                          <a:spcPct val="100000"/>
+                        </a:lnSpc>
+                        <a:spcBef>
+                          <a:spcPts val="0"/>
+                        </a:spcBef>
+                        <a:spcAft>
+                          <a:spcPts val="0"/>
+                        </a:spcAft>
+                        <a:buClrTx/>
+                        <a:buSzTx/>
+                        <a:buFontTx/>
+                        <a:buNone/>
+                        <a:tabLst/>
+                        <a:defRPr/>
+                      </a:pPr>
+                      <a:r>
+                        <a:rPr kumimoji="0" lang="en-US" sz="1400" b="0" i="0" u="none" strike="noStrike" kern="1200" cap="none" spc="0" normalizeH="0" baseline="0" noProof="0">
+                          <a:ln>
+                            <a:noFill/>
+                          </a:ln>
+                          <a:solidFill>
+                            <a:srgbClr val="000000"/>
+                          </a:solidFill>
+                          <a:effectLst/>
+                          <a:uLnTx/>
+                          <a:uFillTx/>
+                          <a:latin typeface="Arial"/>
+                          <a:ea typeface="+mn-ea"/>
+                          <a:cs typeface="+mn-cs"/>
+                        </a:rPr>
+                        <a:t>X</a:t>
+                      </a:r>
+                      <a:endParaRPr kumimoji="0" lang="en-US" sz="1400" b="0" i="0" u="none" strike="noStrike" kern="1200" cap="none" spc="0" normalizeH="0" baseline="0" noProof="0" dirty="0">
+                        <a:ln>
+                          <a:noFill/>
+                        </a:ln>
+                        <a:solidFill>
+                          <a:srgbClr val="000000"/>
+                        </a:solidFill>
+                        <a:effectLst/>
+                        <a:uLnTx/>
+                        <a:uFillTx/>
+                        <a:latin typeface="Aptos" panose="020B0004020202020204" pitchFamily="34" charset="0"/>
+                        <a:ea typeface="+mn-ea"/>
+                        <a:cs typeface="+mn-cs"/>
+                      </a:endParaRPr>
+                    </a:p>
+                  </a:txBody>
+                  <a:tcPr marL="31510" marR="31510" marT="17506" marB="17506" anchor="ctr">
+                    <a:lnL w="12700" cap="flat" cmpd="sng" algn="ctr">
+                      <a:solidFill>
+                        <a:schemeClr val="tx1">
+                          <a:lumMod val="50000"/>
+                          <a:lumOff val="50000"/>
+                        </a:schemeClr>
+                      </a:solidFill>
+                      <a:prstDash val="solid"/>
+                      <a:round/>
+                      <a:headEnd type="none" w="med" len="med"/>
+                      <a:tailEnd type="none" w="med" len="med"/>
+                    </a:lnL>
+                    <a:lnR w="12700" cap="flat" cmpd="sng" algn="ctr">
+                      <a:solidFill>
+                        <a:schemeClr val="tx1">
+                          <a:lumMod val="50000"/>
+                          <a:lumOff val="50000"/>
+                        </a:schemeClr>
+                      </a:solidFill>
+                      <a:prstDash val="solid"/>
+                      <a:round/>
+                      <a:headEnd type="none" w="med" len="med"/>
+                      <a:tailEnd type="none" w="med" len="med"/>
+                    </a:lnR>
+                    <a:lnT w="12700" cap="flat" cmpd="sng" algn="ctr">
+                      <a:solidFill>
+                        <a:schemeClr val="tx1">
+                          <a:lumMod val="50000"/>
+                          <a:lumOff val="50000"/>
+                        </a:schemeClr>
+                      </a:solidFill>
+                      <a:prstDash val="solid"/>
+                      <a:round/>
+                      <a:headEnd type="none" w="med" len="med"/>
+                      <a:tailEnd type="none" w="med" len="med"/>
+                    </a:lnT>
+                    <a:lnB w="12700" cap="flat" cmpd="sng" algn="ctr">
+                      <a:solidFill>
+                        <a:schemeClr val="tx1">
+                          <a:lumMod val="50000"/>
+                          <a:lumOff val="50000"/>
+                        </a:schemeClr>
+                      </a:solidFill>
+                      <a:prstDash val="solid"/>
+                      <a:round/>
+                      <a:headEnd type="none" w="med" len="med"/>
+                      <a:tailEnd type="none" w="med" len="med"/>
+                    </a:lnB>
+                    <a:lnTlToBr w="12700" cmpd="sng">
+                      <a:noFill/>
+                      <a:prstDash val="solid"/>
+                    </a:lnTlToBr>
+                    <a:lnBlToTr w="12700" cmpd="sng">
+                      <a:noFill/>
+                      <a:prstDash val="solid"/>
+                    </a:lnBlToTr>
+                    <a:noFill/>
+                  </a:tcPr>
+                </a:tc>
+                <a:tc>
+                  <a:txBody>
+                    <a:bodyPr/>
+                    <a:lstStyle/>
+                    <a:p>
+                      <a:pPr marL="0" marR="0" lvl="0" indent="0" algn="ctr" defTabSz="914400" rtl="0" eaLnBrk="1" fontAlgn="auto" latinLnBrk="0" hangingPunct="1">
+                        <a:lnSpc>
+                          <a:spcPct val="100000"/>
+                        </a:lnSpc>
+                        <a:spcBef>
+                          <a:spcPts val="0"/>
+                        </a:spcBef>
+                        <a:spcAft>
+                          <a:spcPts val="0"/>
+                        </a:spcAft>
+                        <a:buClrTx/>
+                        <a:buSzTx/>
+                        <a:buFontTx/>
+                        <a:buNone/>
+                        <a:tabLst/>
+                        <a:defRPr/>
+                      </a:pPr>
+                      <a:r>
+                        <a:rPr kumimoji="0" lang="en-US" sz="1400" b="0" i="0" u="none" strike="noStrike" kern="1200" cap="none" spc="0" normalizeH="0" baseline="0" noProof="0">
+                          <a:ln>
+                            <a:noFill/>
+                          </a:ln>
+                          <a:solidFill>
+                            <a:srgbClr val="000000"/>
+                          </a:solidFill>
+                          <a:effectLst/>
+                          <a:uLnTx/>
+                          <a:uFillTx/>
+                          <a:latin typeface="Arial"/>
+                          <a:ea typeface="+mn-ea"/>
+                          <a:cs typeface="+mn-cs"/>
+                        </a:rPr>
+                        <a:t>X</a:t>
+                      </a:r>
+                      <a:endParaRPr kumimoji="0" lang="en-US" sz="1400" b="0" i="0" u="none" strike="noStrike" kern="1200" cap="none" spc="0" normalizeH="0" baseline="0" noProof="0" dirty="0">
+                        <a:ln>
+                          <a:noFill/>
+                        </a:ln>
+                        <a:solidFill>
+                          <a:srgbClr val="000000"/>
+                        </a:solidFill>
+                        <a:effectLst/>
+                        <a:uLnTx/>
+                        <a:uFillTx/>
+                        <a:latin typeface="Aptos" panose="020B0004020202020204" pitchFamily="34" charset="0"/>
+                        <a:ea typeface="+mn-ea"/>
+                        <a:cs typeface="+mn-cs"/>
+                      </a:endParaRPr>
+                    </a:p>
+                  </a:txBody>
+                  <a:tcPr marL="31510" marR="31510" marT="17506" marB="17506" anchor="ctr">
+                    <a:lnL w="12700" cap="flat" cmpd="sng" algn="ctr">
+                      <a:solidFill>
+                        <a:schemeClr val="tx1">
+                          <a:lumMod val="50000"/>
+                          <a:lumOff val="50000"/>
+                        </a:schemeClr>
+                      </a:solidFill>
+                      <a:prstDash val="solid"/>
+                      <a:round/>
+                      <a:headEnd type="none" w="med" len="med"/>
+                      <a:tailEnd type="none" w="med" len="med"/>
+                    </a:lnL>
+                    <a:lnR>
+                      <a:noFill/>
+                    </a:lnR>
+                    <a:lnT w="12700" cap="flat" cmpd="sng" algn="ctr">
+                      <a:solidFill>
+                        <a:schemeClr val="tx1">
+                          <a:lumMod val="50000"/>
+                          <a:lumOff val="50000"/>
+                        </a:schemeClr>
+                      </a:solidFill>
+                      <a:prstDash val="solid"/>
+                      <a:round/>
+                      <a:headEnd type="none" w="med" len="med"/>
+                      <a:tailEnd type="none" w="med" len="med"/>
+                    </a:lnT>
+                    <a:lnB w="12700" cap="flat" cmpd="sng" algn="ctr">
+                      <a:solidFill>
+                        <a:schemeClr val="tx1">
+                          <a:lumMod val="50000"/>
+                          <a:lumOff val="50000"/>
+                        </a:schemeClr>
+                      </a:solidFill>
+                      <a:prstDash val="solid"/>
+                      <a:round/>
+                      <a:headEnd type="none" w="med" len="med"/>
+                      <a:tailEnd type="none" w="med" len="med"/>
+                    </a:lnB>
+                    <a:lnTlToBr w="12700" cmpd="sng">
+                      <a:noFill/>
+                      <a:prstDash val="solid"/>
+                    </a:lnTlToBr>
+                    <a:lnBlToTr w="12700" cmpd="sng">
+                      <a:noFill/>
+                      <a:prstDash val="solid"/>
+                    </a:lnBlToTr>
+                    <a:noFill/>
+                  </a:tcPr>
+                </a:tc>
+                <a:extLst>
+                  <a:ext uri="{0D108BD9-81ED-4DB2-BD59-A6C34878D82A}">
+                    <a16:rowId xmlns:a16="http://schemas.microsoft.com/office/drawing/2014/main" val="3967839151"/>
+                  </a:ext>
+                </a:extLst>
+              </a:tr>
+              <a:tr h="365760">
+                <a:tc>
+                  <a:txBody>
+                    <a:bodyPr/>
+                    <a:lstStyle/>
+                    <a:p>
+                      <a:pPr algn="l">
+                        <a:buNone/>
+                      </a:pPr>
+                      <a:r>
+                        <a:rPr lang="en-US" sz="1200" b="0" dirty="0">
+                          <a:effectLst/>
+                        </a:rPr>
+                        <a:t>Dense alt text (&gt;120 char)</a:t>
+                      </a:r>
+                      <a:endParaRPr lang="en-US" sz="1200" b="0" dirty="0">
+                        <a:effectLst/>
+                        <a:latin typeface="Aptos" panose="020B0004020202020204" pitchFamily="34" charset="0"/>
+                      </a:endParaRPr>
+                    </a:p>
+                  </a:txBody>
+                  <a:tcPr marL="31510" marR="31510" marT="17506" marB="17506" anchor="ctr">
+                    <a:lnL>
+                      <a:noFill/>
+                    </a:lnL>
+                    <a:lnR w="12700" cap="flat" cmpd="sng" algn="ctr">
+                      <a:solidFill>
+                        <a:schemeClr val="tx1">
+                          <a:lumMod val="50000"/>
+                          <a:lumOff val="50000"/>
+                        </a:schemeClr>
+                      </a:solidFill>
+                      <a:prstDash val="solid"/>
+                      <a:round/>
+                      <a:headEnd type="none" w="med" len="med"/>
+                      <a:tailEnd type="none" w="med" len="med"/>
+                    </a:lnR>
+                    <a:lnT w="12700" cap="flat" cmpd="sng" algn="ctr">
+                      <a:solidFill>
+                        <a:schemeClr val="tx1">
+                          <a:lumMod val="50000"/>
+                          <a:lumOff val="50000"/>
+                        </a:schemeClr>
+                      </a:solidFill>
+                      <a:prstDash val="solid"/>
+                      <a:round/>
+                      <a:headEnd type="none" w="med" len="med"/>
+                      <a:tailEnd type="none" w="med" len="med"/>
+                    </a:lnT>
+                    <a:lnB w="12700" cap="flat" cmpd="sng" algn="ctr">
+                      <a:solidFill>
+                        <a:schemeClr val="tx1">
+                          <a:lumMod val="50000"/>
+                          <a:lumOff val="50000"/>
+                        </a:schemeClr>
+                      </a:solidFill>
+                      <a:prstDash val="solid"/>
+                      <a:round/>
+                      <a:headEnd type="none" w="med" len="med"/>
+                      <a:tailEnd type="none" w="med" len="med"/>
+                    </a:lnB>
+                    <a:lnTlToBr w="12700" cmpd="sng">
+                      <a:noFill/>
+                      <a:prstDash val="solid"/>
+                    </a:lnTlToBr>
+                    <a:lnBlToTr w="12700" cmpd="sng">
+                      <a:noFill/>
+                      <a:prstDash val="solid"/>
+                    </a:lnBlToTr>
+                    <a:noFill/>
+                  </a:tcPr>
+                </a:tc>
+                <a:tc>
+                  <a:txBody>
+                    <a:bodyPr/>
+                    <a:lstStyle/>
+                    <a:p>
+                      <a:pPr algn="ctr">
+                        <a:buNone/>
+                      </a:pPr>
+                      <a:r>
+                        <a:rPr lang="en-US" sz="1200" dirty="0">
+                          <a:solidFill>
+                            <a:schemeClr val="accent2"/>
+                          </a:solidFill>
+                          <a:effectLst/>
+                        </a:rPr>
+                        <a:t>False positive</a:t>
+                      </a:r>
+                      <a:endParaRPr lang="en-US" sz="1200" dirty="0">
+                        <a:solidFill>
+                          <a:schemeClr val="accent2"/>
+                        </a:solidFill>
+                        <a:effectLst/>
+                        <a:latin typeface="Aptos" panose="020B0004020202020204" pitchFamily="34" charset="0"/>
+                      </a:endParaRPr>
+                    </a:p>
+                  </a:txBody>
+                  <a:tcPr marL="31510" marR="31510" marT="17506" marB="17506" anchor="ctr">
+                    <a:lnL w="12700" cap="flat" cmpd="sng" algn="ctr">
+                      <a:solidFill>
+                        <a:schemeClr val="tx1">
+                          <a:lumMod val="50000"/>
+                          <a:lumOff val="50000"/>
+                        </a:schemeClr>
+                      </a:solidFill>
+                      <a:prstDash val="solid"/>
+                      <a:round/>
+                      <a:headEnd type="none" w="med" len="med"/>
+                      <a:tailEnd type="none" w="med" len="med"/>
+                    </a:lnL>
+                    <a:lnR w="12700" cap="flat" cmpd="sng" algn="ctr">
+                      <a:solidFill>
+                        <a:schemeClr val="tx1">
+                          <a:lumMod val="50000"/>
+                          <a:lumOff val="50000"/>
+                        </a:schemeClr>
+                      </a:solidFill>
+                      <a:prstDash val="solid"/>
+                      <a:round/>
+                      <a:headEnd type="none" w="med" len="med"/>
+                      <a:tailEnd type="none" w="med" len="med"/>
+                    </a:lnR>
+                    <a:lnT w="12700" cap="flat" cmpd="sng" algn="ctr">
+                      <a:solidFill>
+                        <a:schemeClr val="tx1">
+                          <a:lumMod val="50000"/>
+                          <a:lumOff val="50000"/>
+                        </a:schemeClr>
+                      </a:solidFill>
+                      <a:prstDash val="solid"/>
+                      <a:round/>
+                      <a:headEnd type="none" w="med" len="med"/>
+                      <a:tailEnd type="none" w="med" len="med"/>
+                    </a:lnT>
+                    <a:lnB w="12700" cap="flat" cmpd="sng" algn="ctr">
+                      <a:solidFill>
+                        <a:schemeClr val="bg1"/>
+                      </a:solidFill>
+                      <a:prstDash val="solid"/>
+                      <a:round/>
+                      <a:headEnd type="none" w="med" len="med"/>
+                      <a:tailEnd type="none" w="med" len="med"/>
+                    </a:lnB>
+                    <a:lnTlToBr w="12700" cmpd="sng">
+                      <a:noFill/>
+                      <a:prstDash val="solid"/>
+                    </a:lnTlToBr>
+                    <a:lnBlToTr w="12700" cmpd="sng">
+                      <a:noFill/>
+                      <a:prstDash val="solid"/>
+                    </a:lnBlToTr>
+                    <a:noFill/>
+                  </a:tcPr>
+                </a:tc>
+                <a:tc>
+                  <a:txBody>
+                    <a:bodyPr/>
+                    <a:lstStyle/>
+                    <a:p>
+                      <a:pPr marL="0" marR="0" lvl="0" indent="0" algn="ctr" defTabSz="914400" rtl="0" eaLnBrk="1" fontAlgn="auto" latinLnBrk="0" hangingPunct="1">
+                        <a:lnSpc>
+                          <a:spcPct val="100000"/>
+                        </a:lnSpc>
+                        <a:spcBef>
+                          <a:spcPts val="0"/>
+                        </a:spcBef>
+                        <a:spcAft>
+                          <a:spcPts val="0"/>
+                        </a:spcAft>
+                        <a:buClrTx/>
+                        <a:buSzTx/>
+                        <a:buFontTx/>
+                        <a:buNone/>
+                        <a:tabLst/>
+                        <a:defRPr/>
+                      </a:pPr>
+                      <a:r>
+                        <a:rPr kumimoji="0" lang="en-US" sz="1400" b="0" i="0" u="none" strike="noStrike" kern="1200" cap="none" spc="0" normalizeH="0" baseline="0" noProof="0" dirty="0">
+                          <a:ln>
+                            <a:noFill/>
+                          </a:ln>
+                          <a:solidFill>
+                            <a:srgbClr val="000000"/>
+                          </a:solidFill>
+                          <a:effectLst/>
+                          <a:uLnTx/>
+                          <a:uFillTx/>
+                          <a:latin typeface="Arial"/>
+                          <a:ea typeface="+mn-ea"/>
+                          <a:cs typeface="+mn-cs"/>
+                        </a:rPr>
+                        <a:t>n/a</a:t>
+                      </a:r>
+                      <a:endParaRPr kumimoji="0" lang="en-US" sz="1400" b="0" i="0" u="none" strike="noStrike" kern="1200" cap="none" spc="0" normalizeH="0" baseline="0" noProof="0" dirty="0">
+                        <a:ln>
+                          <a:noFill/>
+                        </a:ln>
+                        <a:solidFill>
+                          <a:srgbClr val="000000"/>
+                        </a:solidFill>
+                        <a:effectLst/>
+                        <a:uLnTx/>
+                        <a:uFillTx/>
+                        <a:latin typeface="Aptos" panose="020B0004020202020204" pitchFamily="34" charset="0"/>
+                        <a:ea typeface="+mn-ea"/>
+                        <a:cs typeface="+mn-cs"/>
+                      </a:endParaRPr>
+                    </a:p>
+                  </a:txBody>
+                  <a:tcPr marL="31510" marR="31510" marT="17506" marB="17506" anchor="ctr">
+                    <a:lnL w="12700" cap="flat" cmpd="sng" algn="ctr">
+                      <a:solidFill>
+                        <a:schemeClr val="tx1">
+                          <a:lumMod val="50000"/>
+                          <a:lumOff val="50000"/>
+                        </a:schemeClr>
+                      </a:solidFill>
+                      <a:prstDash val="solid"/>
+                      <a:round/>
+                      <a:headEnd type="none" w="med" len="med"/>
+                      <a:tailEnd type="none" w="med" len="med"/>
+                    </a:lnL>
+                    <a:lnR w="12700" cap="flat" cmpd="sng" algn="ctr">
+                      <a:solidFill>
+                        <a:schemeClr val="tx1">
+                          <a:lumMod val="50000"/>
+                          <a:lumOff val="50000"/>
+                        </a:schemeClr>
+                      </a:solidFill>
+                      <a:prstDash val="solid"/>
+                      <a:round/>
+                      <a:headEnd type="none" w="med" len="med"/>
+                      <a:tailEnd type="none" w="med" len="med"/>
+                    </a:lnR>
+                    <a:lnT w="12700" cap="flat" cmpd="sng" algn="ctr">
+                      <a:solidFill>
+                        <a:schemeClr val="tx1">
+                          <a:lumMod val="50000"/>
+                          <a:lumOff val="50000"/>
+                        </a:schemeClr>
+                      </a:solidFill>
+                      <a:prstDash val="solid"/>
+                      <a:round/>
+                      <a:headEnd type="none" w="med" len="med"/>
+                      <a:tailEnd type="none" w="med" len="med"/>
+                    </a:lnT>
+                    <a:lnB w="12700" cap="flat" cmpd="sng" algn="ctr">
+                      <a:solidFill>
+                        <a:schemeClr val="bg1"/>
+                      </a:solidFill>
+                      <a:prstDash val="solid"/>
+                      <a:round/>
+                      <a:headEnd type="none" w="med" len="med"/>
+                      <a:tailEnd type="none" w="med" len="med"/>
+                    </a:lnB>
+                    <a:lnTlToBr w="12700" cmpd="sng">
+                      <a:noFill/>
+                      <a:prstDash val="solid"/>
+                    </a:lnTlToBr>
+                    <a:lnBlToTr w="12700" cmpd="sng">
+                      <a:noFill/>
+                      <a:prstDash val="solid"/>
+                    </a:lnBlToTr>
+                    <a:noFill/>
+                  </a:tcPr>
+                </a:tc>
+                <a:tc>
+                  <a:txBody>
+                    <a:bodyPr/>
+                    <a:lstStyle/>
+                    <a:p>
+                      <a:pPr marL="0" marR="0" lvl="0" indent="0" algn="ctr" defTabSz="914400" rtl="0" eaLnBrk="1" fontAlgn="auto" latinLnBrk="0" hangingPunct="1">
+                        <a:lnSpc>
+                          <a:spcPct val="100000"/>
+                        </a:lnSpc>
+                        <a:spcBef>
+                          <a:spcPts val="0"/>
+                        </a:spcBef>
+                        <a:spcAft>
+                          <a:spcPts val="0"/>
+                        </a:spcAft>
+                        <a:buClrTx/>
+                        <a:buSzTx/>
+                        <a:buFontTx/>
+                        <a:buNone/>
+                        <a:tabLst/>
+                        <a:defRPr/>
+                      </a:pPr>
+                      <a:r>
+                        <a:rPr kumimoji="0" lang="en-US" sz="1400" b="0" i="0" u="none" strike="noStrike" kern="1200" cap="none" spc="0" normalizeH="0" baseline="0" noProof="0" dirty="0">
+                          <a:ln>
+                            <a:noFill/>
+                          </a:ln>
+                          <a:solidFill>
+                            <a:srgbClr val="000000"/>
+                          </a:solidFill>
+                          <a:effectLst/>
+                          <a:uLnTx/>
+                          <a:uFillTx/>
+                          <a:latin typeface="Arial"/>
+                          <a:ea typeface="+mn-ea"/>
+                          <a:cs typeface="+mn-cs"/>
+                        </a:rPr>
+                        <a:t>n/a</a:t>
+                      </a:r>
+                      <a:endParaRPr kumimoji="0" lang="en-US" sz="1400" b="0" i="0" u="none" strike="noStrike" kern="1200" cap="none" spc="0" normalizeH="0" baseline="0" noProof="0" dirty="0">
+                        <a:ln>
+                          <a:noFill/>
+                        </a:ln>
+                        <a:solidFill>
+                          <a:srgbClr val="000000"/>
+                        </a:solidFill>
+                        <a:effectLst/>
+                        <a:uLnTx/>
+                        <a:uFillTx/>
+                        <a:latin typeface="Aptos" panose="020B0004020202020204" pitchFamily="34" charset="0"/>
+                        <a:ea typeface="+mn-ea"/>
+                        <a:cs typeface="+mn-cs"/>
+                      </a:endParaRPr>
+                    </a:p>
+                  </a:txBody>
+                  <a:tcPr marL="31510" marR="31510" marT="17506" marB="17506" anchor="ctr">
+                    <a:lnL w="12700" cap="flat" cmpd="sng" algn="ctr">
+                      <a:solidFill>
+                        <a:schemeClr val="tx1">
+                          <a:lumMod val="50000"/>
+                          <a:lumOff val="50000"/>
+                        </a:schemeClr>
+                      </a:solidFill>
+                      <a:prstDash val="solid"/>
+                      <a:round/>
+                      <a:headEnd type="none" w="med" len="med"/>
+                      <a:tailEnd type="none" w="med" len="med"/>
+                    </a:lnL>
+                    <a:lnR>
+                      <a:noFill/>
+                    </a:lnR>
+                    <a:lnT w="12700" cap="flat" cmpd="sng" algn="ctr">
+                      <a:solidFill>
+                        <a:schemeClr val="tx1">
+                          <a:lumMod val="50000"/>
+                          <a:lumOff val="50000"/>
+                        </a:schemeClr>
+                      </a:solidFill>
+                      <a:prstDash val="solid"/>
+                      <a:round/>
+                      <a:headEnd type="none" w="med" len="med"/>
+                      <a:tailEnd type="none" w="med" len="med"/>
+                    </a:lnT>
+                    <a:lnB w="12700" cap="flat" cmpd="sng" algn="ctr">
+                      <a:solidFill>
+                        <a:schemeClr val="tx1">
+                          <a:lumMod val="50000"/>
+                          <a:lumOff val="50000"/>
+                        </a:schemeClr>
+                      </a:solidFill>
+                      <a:prstDash val="solid"/>
+                      <a:round/>
+                      <a:headEnd type="none" w="med" len="med"/>
+                      <a:tailEnd type="none" w="med" len="med"/>
+                    </a:lnB>
+                    <a:lnTlToBr w="12700" cmpd="sng">
+                      <a:noFill/>
+                      <a:prstDash val="solid"/>
+                    </a:lnTlToBr>
+                    <a:lnBlToTr w="12700" cmpd="sng">
+                      <a:noFill/>
+                      <a:prstDash val="solid"/>
+                    </a:lnBlToTr>
+                    <a:noFill/>
+                  </a:tcPr>
+                </a:tc>
+                <a:extLst>
+                  <a:ext uri="{0D108BD9-81ED-4DB2-BD59-A6C34878D82A}">
+                    <a16:rowId xmlns:a16="http://schemas.microsoft.com/office/drawing/2014/main" val="2018293892"/>
+                  </a:ext>
+                </a:extLst>
+              </a:tr>
+              <a:tr h="365760">
+                <a:tc>
+                  <a:txBody>
+                    <a:bodyPr/>
+                    <a:lstStyle/>
+                    <a:p>
+                      <a:pPr algn="l">
+                        <a:buNone/>
+                      </a:pPr>
+                      <a:r>
+                        <a:rPr lang="en-US" sz="1200" b="0" dirty="0">
+                          <a:effectLst/>
+                        </a:rPr>
+                        <a:t>File name as alt text (</a:t>
+                      </a:r>
+                      <a:r>
+                        <a:rPr lang="en-US" sz="1200" b="0" dirty="0" err="1">
+                          <a:effectLst/>
+                        </a:rPr>
+                        <a:t>logo.png</a:t>
+                      </a:r>
+                      <a:r>
+                        <a:rPr lang="en-US" sz="1200" b="0" dirty="0">
+                          <a:effectLst/>
+                        </a:rPr>
+                        <a:t>)</a:t>
+                      </a:r>
+                      <a:endParaRPr lang="en-US" sz="1200" b="0" dirty="0">
+                        <a:effectLst/>
+                        <a:latin typeface="Aptos" panose="020B0004020202020204" pitchFamily="34" charset="0"/>
+                      </a:endParaRPr>
+                    </a:p>
+                  </a:txBody>
+                  <a:tcPr marL="31510" marR="31510" marT="17506" marB="17506" anchor="ctr">
+                    <a:lnL>
+                      <a:noFill/>
+                    </a:lnL>
+                    <a:lnR w="12700" cap="flat" cmpd="sng" algn="ctr">
+                      <a:solidFill>
+                        <a:schemeClr val="bg1"/>
+                      </a:solidFill>
+                      <a:prstDash val="solid"/>
+                      <a:round/>
+                      <a:headEnd type="none" w="med" len="med"/>
+                      <a:tailEnd type="none" w="med" len="med"/>
+                    </a:lnR>
+                    <a:lnT w="12700" cap="flat" cmpd="sng" algn="ctr">
+                      <a:solidFill>
+                        <a:schemeClr val="tx1">
+                          <a:lumMod val="50000"/>
+                          <a:lumOff val="50000"/>
+                        </a:schemeClr>
+                      </a:solidFill>
+                      <a:prstDash val="solid"/>
+                      <a:round/>
+                      <a:headEnd type="none" w="med" len="med"/>
+                      <a:tailEnd type="none" w="med" len="med"/>
+                    </a:lnT>
+                    <a:lnB w="12700" cap="flat" cmpd="sng" algn="ctr">
+                      <a:solidFill>
+                        <a:schemeClr val="tx1">
+                          <a:lumMod val="50000"/>
+                          <a:lumOff val="50000"/>
+                        </a:schemeClr>
+                      </a:solidFill>
+                      <a:prstDash val="solid"/>
+                      <a:round/>
+                      <a:headEnd type="none" w="med" len="med"/>
+                      <a:tailEnd type="none" w="med" len="med"/>
+                    </a:lnB>
+                    <a:lnTlToBr w="12700" cmpd="sng">
+                      <a:noFill/>
+                      <a:prstDash val="solid"/>
+                    </a:lnTlToBr>
+                    <a:lnBlToTr w="12700" cmpd="sng">
+                      <a:noFill/>
+                      <a:prstDash val="solid"/>
+                    </a:lnBlToTr>
+                    <a:noFill/>
+                  </a:tcPr>
+                </a:tc>
+                <a:tc>
+                  <a:txBody>
+                    <a:bodyPr/>
+                    <a:lstStyle/>
+                    <a:p>
+                      <a:pPr marL="0" marR="0" lvl="0" indent="0" algn="ctr" defTabSz="914400" rtl="0" eaLnBrk="1" fontAlgn="auto" latinLnBrk="0" hangingPunct="1">
+                        <a:lnSpc>
+                          <a:spcPct val="100000"/>
+                        </a:lnSpc>
+                        <a:spcBef>
+                          <a:spcPts val="0"/>
+                        </a:spcBef>
+                        <a:spcAft>
+                          <a:spcPts val="0"/>
+                        </a:spcAft>
+                        <a:buClrTx/>
+                        <a:buSzTx/>
+                        <a:buFontTx/>
+                        <a:buNone/>
+                        <a:tabLst/>
+                        <a:defRPr/>
+                      </a:pPr>
+                      <a:r>
+                        <a:rPr kumimoji="0" lang="en-US" sz="1400" b="0" i="0" u="none" strike="noStrike" kern="1200" cap="none" spc="0" normalizeH="0" baseline="0" noProof="0" dirty="0">
+                          <a:ln>
+                            <a:noFill/>
+                          </a:ln>
+                          <a:solidFill>
+                            <a:schemeClr val="bg1"/>
+                          </a:solidFill>
+                          <a:effectLst/>
+                          <a:uLnTx/>
+                          <a:uFillTx/>
+                          <a:latin typeface="Arial"/>
+                          <a:ea typeface="+mn-ea"/>
+                          <a:cs typeface="+mn-cs"/>
+                        </a:rPr>
+                        <a:t>✓</a:t>
+                      </a:r>
+                      <a:endParaRPr kumimoji="0" lang="en-US" sz="1400" b="0" i="0" u="none" strike="noStrike" kern="1200" cap="none" spc="0" normalizeH="0" baseline="0" noProof="0" dirty="0">
+                        <a:ln>
+                          <a:noFill/>
+                        </a:ln>
+                        <a:solidFill>
+                          <a:schemeClr val="bg1"/>
+                        </a:solidFill>
+                        <a:effectLst/>
+                        <a:uLnTx/>
+                        <a:uFillTx/>
+                        <a:latin typeface="Symbol" pitchFamily="2" charset="2"/>
+                        <a:ea typeface="+mn-ea"/>
+                        <a:cs typeface="+mn-cs"/>
+                      </a:endParaRPr>
+                    </a:p>
+                  </a:txBody>
+                  <a:tcPr marL="31510" marR="31510" marT="17506" marB="17506" anchor="ctr">
+                    <a:lnL w="12700" cap="flat" cmpd="sng" algn="ctr">
+                      <a:solidFill>
+                        <a:schemeClr val="bg1"/>
+                      </a:solidFill>
+                      <a:prstDash val="solid"/>
+                      <a:round/>
+                      <a:headEnd type="none" w="med" len="med"/>
+                      <a:tailEnd type="none" w="med" len="med"/>
+                    </a:lnL>
+                    <a:lnR w="12700" cap="flat" cmpd="sng" algn="ctr">
+                      <a:solidFill>
+                        <a:schemeClr val="bg1"/>
+                      </a:solidFill>
+                      <a:prstDash val="solid"/>
+                      <a:round/>
+                      <a:headEnd type="none" w="med" len="med"/>
+                      <a:tailEnd type="none" w="med" len="med"/>
+                    </a:lnR>
+                    <a:lnT w="12700" cap="flat" cmpd="sng" algn="ctr">
+                      <a:solidFill>
+                        <a:schemeClr val="bg1"/>
+                      </a:solidFill>
+                      <a:prstDash val="solid"/>
+                      <a:round/>
+                      <a:headEnd type="none" w="med" len="med"/>
+                      <a:tailEnd type="none" w="med" len="med"/>
+                    </a:lnT>
+                    <a:lnB w="12700" cap="flat" cmpd="sng" algn="ctr">
+                      <a:solidFill>
+                        <a:schemeClr val="bg1"/>
+                      </a:solidFill>
+                      <a:prstDash val="solid"/>
+                      <a:round/>
+                      <a:headEnd type="none" w="med" len="med"/>
+                      <a:tailEnd type="none" w="med" len="med"/>
+                    </a:lnB>
+                    <a:lnTlToBr w="12700" cmpd="sng">
+                      <a:noFill/>
+                      <a:prstDash val="solid"/>
+                    </a:lnTlToBr>
+                    <a:lnBlToTr w="12700" cmpd="sng">
+                      <a:noFill/>
+                      <a:prstDash val="solid"/>
+                    </a:lnBlToTr>
+                    <a:solidFill>
+                      <a:srgbClr val="037404"/>
+                    </a:solidFill>
+                  </a:tcPr>
+                </a:tc>
+                <a:tc>
+                  <a:txBody>
+                    <a:bodyPr/>
+                    <a:lstStyle/>
+                    <a:p>
+                      <a:pPr marL="0" marR="0" lvl="0" indent="0" algn="ctr" defTabSz="914400" rtl="0" eaLnBrk="1" fontAlgn="auto" latinLnBrk="0" hangingPunct="1">
+                        <a:lnSpc>
+                          <a:spcPct val="100000"/>
+                        </a:lnSpc>
+                        <a:spcBef>
+                          <a:spcPts val="0"/>
+                        </a:spcBef>
+                        <a:spcAft>
+                          <a:spcPts val="0"/>
+                        </a:spcAft>
+                        <a:buClrTx/>
+                        <a:buSzTx/>
+                        <a:buFontTx/>
+                        <a:buNone/>
+                        <a:tabLst/>
+                        <a:defRPr/>
+                      </a:pPr>
+                      <a:r>
+                        <a:rPr kumimoji="0" lang="en-US" sz="1400" b="0" i="0" u="none" strike="noStrike" kern="1200" cap="none" spc="0" normalizeH="0" baseline="0" noProof="0" dirty="0">
+                          <a:ln>
+                            <a:noFill/>
+                          </a:ln>
+                          <a:solidFill>
+                            <a:schemeClr val="bg1"/>
+                          </a:solidFill>
+                          <a:effectLst/>
+                          <a:uLnTx/>
+                          <a:uFillTx/>
+                          <a:latin typeface="Arial"/>
+                          <a:ea typeface="+mn-ea"/>
+                          <a:cs typeface="+mn-cs"/>
+                        </a:rPr>
+                        <a:t>✓</a:t>
+                      </a:r>
+                      <a:endParaRPr kumimoji="0" lang="en-US" sz="1400" b="0" i="0" u="none" strike="noStrike" kern="1200" cap="none" spc="0" normalizeH="0" baseline="0" noProof="0" dirty="0">
+                        <a:ln>
+                          <a:noFill/>
+                        </a:ln>
+                        <a:solidFill>
+                          <a:schemeClr val="bg1"/>
+                        </a:solidFill>
+                        <a:effectLst/>
+                        <a:uLnTx/>
+                        <a:uFillTx/>
+                        <a:latin typeface="Symbol" pitchFamily="2" charset="2"/>
+                        <a:ea typeface="+mn-ea"/>
+                        <a:cs typeface="+mn-cs"/>
+                      </a:endParaRPr>
+                    </a:p>
+                  </a:txBody>
+                  <a:tcPr marL="31510" marR="31510" marT="17506" marB="17506" anchor="ctr">
+                    <a:lnL w="12700" cap="flat" cmpd="sng" algn="ctr">
+                      <a:solidFill>
+                        <a:schemeClr val="bg1"/>
+                      </a:solidFill>
+                      <a:prstDash val="solid"/>
+                      <a:round/>
+                      <a:headEnd type="none" w="med" len="med"/>
+                      <a:tailEnd type="none" w="med" len="med"/>
+                    </a:lnL>
+                    <a:lnR w="12700" cap="flat" cmpd="sng" algn="ctr">
+                      <a:solidFill>
+                        <a:schemeClr val="bg1"/>
+                      </a:solidFill>
+                      <a:prstDash val="solid"/>
+                      <a:round/>
+                      <a:headEnd type="none" w="med" len="med"/>
+                      <a:tailEnd type="none" w="med" len="med"/>
+                    </a:lnR>
+                    <a:lnT w="12700" cap="flat" cmpd="sng" algn="ctr">
+                      <a:solidFill>
+                        <a:schemeClr val="bg1"/>
+                      </a:solidFill>
+                      <a:prstDash val="solid"/>
+                      <a:round/>
+                      <a:headEnd type="none" w="med" len="med"/>
+                      <a:tailEnd type="none" w="med" len="med"/>
+                    </a:lnT>
+                    <a:lnB w="12700" cap="flat" cmpd="sng" algn="ctr">
+                      <a:solidFill>
+                        <a:schemeClr val="bg1"/>
+                      </a:solidFill>
+                      <a:prstDash val="solid"/>
+                      <a:round/>
+                      <a:headEnd type="none" w="med" len="med"/>
+                      <a:tailEnd type="none" w="med" len="med"/>
+                    </a:lnB>
+                    <a:lnTlToBr w="12700" cmpd="sng">
+                      <a:noFill/>
+                      <a:prstDash val="solid"/>
+                    </a:lnTlToBr>
+                    <a:lnBlToTr w="12700" cmpd="sng">
+                      <a:noFill/>
+                      <a:prstDash val="solid"/>
+                    </a:lnBlToTr>
+                    <a:solidFill>
+                      <a:srgbClr val="037404"/>
+                    </a:solidFill>
+                  </a:tcPr>
+                </a:tc>
+                <a:tc>
+                  <a:txBody>
+                    <a:bodyPr/>
+                    <a:lstStyle/>
+                    <a:p>
+                      <a:pPr marL="0" marR="0" lvl="0" indent="0" algn="ctr" defTabSz="914400" rtl="0" eaLnBrk="1" fontAlgn="auto" latinLnBrk="0" hangingPunct="1">
+                        <a:lnSpc>
+                          <a:spcPct val="100000"/>
+                        </a:lnSpc>
+                        <a:spcBef>
+                          <a:spcPts val="0"/>
+                        </a:spcBef>
+                        <a:spcAft>
+                          <a:spcPts val="0"/>
+                        </a:spcAft>
+                        <a:buClrTx/>
+                        <a:buSzTx/>
+                        <a:buFontTx/>
+                        <a:buNone/>
+                        <a:tabLst/>
+                        <a:defRPr/>
+                      </a:pPr>
+                      <a:r>
+                        <a:rPr kumimoji="0" lang="en-US" sz="1400" b="0" i="0" u="none" strike="noStrike" kern="1200" cap="none" spc="0" normalizeH="0" baseline="0" noProof="0" dirty="0">
+                          <a:ln>
+                            <a:noFill/>
+                          </a:ln>
+                          <a:solidFill>
+                            <a:srgbClr val="000000"/>
+                          </a:solidFill>
+                          <a:effectLst/>
+                          <a:uLnTx/>
+                          <a:uFillTx/>
+                          <a:latin typeface="Arial"/>
+                          <a:ea typeface="+mn-ea"/>
+                          <a:cs typeface="+mn-cs"/>
+                        </a:rPr>
+                        <a:t>X</a:t>
+                      </a:r>
+                      <a:endParaRPr kumimoji="0" lang="en-US" sz="1400" b="0" i="0" u="none" strike="noStrike" kern="1200" cap="none" spc="0" normalizeH="0" baseline="0" noProof="0" dirty="0">
+                        <a:ln>
+                          <a:noFill/>
+                        </a:ln>
+                        <a:solidFill>
+                          <a:srgbClr val="000000"/>
+                        </a:solidFill>
+                        <a:effectLst/>
+                        <a:uLnTx/>
+                        <a:uFillTx/>
+                        <a:latin typeface="Aptos" panose="020B0004020202020204" pitchFamily="34" charset="0"/>
+                        <a:ea typeface="+mn-ea"/>
+                        <a:cs typeface="+mn-cs"/>
+                      </a:endParaRPr>
+                    </a:p>
+                  </a:txBody>
+                  <a:tcPr marL="31510" marR="31510" marT="17506" marB="17506" anchor="ctr">
+                    <a:lnL w="12700" cap="flat" cmpd="sng" algn="ctr">
+                      <a:solidFill>
+                        <a:schemeClr val="bg1"/>
+                      </a:solidFill>
+                      <a:prstDash val="solid"/>
+                      <a:round/>
+                      <a:headEnd type="none" w="med" len="med"/>
+                      <a:tailEnd type="none" w="med" len="med"/>
+                    </a:lnL>
+                    <a:lnR>
+                      <a:noFill/>
+                    </a:lnR>
+                    <a:lnT w="12700" cap="flat" cmpd="sng" algn="ctr">
+                      <a:solidFill>
+                        <a:schemeClr val="tx1">
+                          <a:lumMod val="50000"/>
+                          <a:lumOff val="50000"/>
+                        </a:schemeClr>
+                      </a:solidFill>
+                      <a:prstDash val="solid"/>
+                      <a:round/>
+                      <a:headEnd type="none" w="med" len="med"/>
+                      <a:tailEnd type="none" w="med" len="med"/>
+                    </a:lnT>
+                    <a:lnB w="12700" cap="flat" cmpd="sng" algn="ctr">
+                      <a:solidFill>
+                        <a:schemeClr val="tx1">
+                          <a:lumMod val="50000"/>
+                          <a:lumOff val="50000"/>
+                        </a:schemeClr>
+                      </a:solidFill>
+                      <a:prstDash val="solid"/>
+                      <a:round/>
+                      <a:headEnd type="none" w="med" len="med"/>
+                      <a:tailEnd type="none" w="med" len="med"/>
+                    </a:lnB>
+                    <a:lnTlToBr w="12700" cmpd="sng">
+                      <a:noFill/>
+                      <a:prstDash val="solid"/>
+                    </a:lnTlToBr>
+                    <a:lnBlToTr w="12700" cmpd="sng">
+                      <a:noFill/>
+                      <a:prstDash val="solid"/>
+                    </a:lnBlToTr>
+                    <a:noFill/>
+                  </a:tcPr>
+                </a:tc>
+                <a:extLst>
+                  <a:ext uri="{0D108BD9-81ED-4DB2-BD59-A6C34878D82A}">
+                    <a16:rowId xmlns:a16="http://schemas.microsoft.com/office/drawing/2014/main" val="1580226695"/>
+                  </a:ext>
+                </a:extLst>
+              </a:tr>
+              <a:tr h="365760">
+                <a:tc>
+                  <a:txBody>
+                    <a:bodyPr/>
+                    <a:lstStyle/>
+                    <a:p>
+                      <a:pPr algn="l">
+                        <a:buNone/>
+                      </a:pPr>
+                      <a:r>
+                        <a:rPr lang="en-US" sz="1200" b="0" dirty="0">
+                          <a:effectLst/>
+                        </a:rPr>
+                        <a:t>Gibberish (</a:t>
+                      </a:r>
+                      <a:r>
+                        <a:rPr lang="en-US" sz="1200" b="0" dirty="0" err="1">
+                          <a:effectLst/>
+                        </a:rPr>
+                        <a:t>alskjshdsflh</a:t>
+                      </a:r>
+                      <a:r>
+                        <a:rPr lang="en-US" sz="1200" b="0" dirty="0">
+                          <a:effectLst/>
+                        </a:rPr>
+                        <a:t>)</a:t>
+                      </a:r>
+                      <a:endParaRPr lang="en-US" sz="1200" b="0" dirty="0">
+                        <a:effectLst/>
+                        <a:latin typeface="Aptos" panose="020B0004020202020204" pitchFamily="34" charset="0"/>
+                      </a:endParaRPr>
+                    </a:p>
+                  </a:txBody>
+                  <a:tcPr marL="31510" marR="31510" marT="17506" marB="17506" anchor="ctr">
+                    <a:lnL>
+                      <a:noFill/>
+                    </a:lnL>
+                    <a:lnR w="12700" cap="flat" cmpd="sng" algn="ctr">
+                      <a:solidFill>
+                        <a:schemeClr val="tx1">
+                          <a:lumMod val="50000"/>
+                          <a:lumOff val="50000"/>
+                        </a:schemeClr>
+                      </a:solidFill>
+                      <a:prstDash val="solid"/>
+                      <a:round/>
+                      <a:headEnd type="none" w="med" len="med"/>
+                      <a:tailEnd type="none" w="med" len="med"/>
+                    </a:lnR>
+                    <a:lnT w="12700" cap="flat" cmpd="sng" algn="ctr">
+                      <a:solidFill>
+                        <a:schemeClr val="tx1">
+                          <a:lumMod val="50000"/>
+                          <a:lumOff val="50000"/>
+                        </a:schemeClr>
+                      </a:solidFill>
+                      <a:prstDash val="solid"/>
+                      <a:round/>
+                      <a:headEnd type="none" w="med" len="med"/>
+                      <a:tailEnd type="none" w="med" len="med"/>
+                    </a:lnT>
+                    <a:lnB w="12700" cap="flat" cmpd="sng" algn="ctr">
+                      <a:solidFill>
+                        <a:schemeClr val="tx1">
+                          <a:lumMod val="50000"/>
+                          <a:lumOff val="50000"/>
+                        </a:schemeClr>
+                      </a:solidFill>
+                      <a:prstDash val="solid"/>
+                      <a:round/>
+                      <a:headEnd type="none" w="med" len="med"/>
+                      <a:tailEnd type="none" w="med" len="med"/>
+                    </a:lnB>
+                    <a:lnTlToBr w="12700" cmpd="sng">
+                      <a:noFill/>
+                      <a:prstDash val="solid"/>
+                    </a:lnTlToBr>
+                    <a:lnBlToTr w="12700" cmpd="sng">
+                      <a:noFill/>
+                      <a:prstDash val="solid"/>
+                    </a:lnBlToTr>
+                    <a:noFill/>
+                  </a:tcPr>
+                </a:tc>
+                <a:tc>
+                  <a:txBody>
+                    <a:bodyPr/>
+                    <a:lstStyle/>
+                    <a:p>
+                      <a:pPr marL="0" marR="0" lvl="0" indent="0" algn="ctr" defTabSz="914400" rtl="0" eaLnBrk="1" fontAlgn="auto" latinLnBrk="0" hangingPunct="1">
+                        <a:lnSpc>
+                          <a:spcPct val="100000"/>
+                        </a:lnSpc>
+                        <a:spcBef>
+                          <a:spcPts val="0"/>
+                        </a:spcBef>
+                        <a:spcAft>
+                          <a:spcPts val="0"/>
+                        </a:spcAft>
+                        <a:buClrTx/>
+                        <a:buSzTx/>
+                        <a:buFontTx/>
+                        <a:buNone/>
+                        <a:tabLst/>
+                        <a:defRPr/>
+                      </a:pPr>
+                      <a:r>
+                        <a:rPr kumimoji="0" lang="en-US" sz="1400" b="0" i="0" u="none" strike="noStrike" kern="1200" cap="none" spc="0" normalizeH="0" baseline="0" noProof="0">
+                          <a:ln>
+                            <a:noFill/>
+                          </a:ln>
+                          <a:solidFill>
+                            <a:srgbClr val="000000"/>
+                          </a:solidFill>
+                          <a:effectLst/>
+                          <a:uLnTx/>
+                          <a:uFillTx/>
+                          <a:latin typeface="Arial"/>
+                          <a:ea typeface="+mn-ea"/>
+                          <a:cs typeface="+mn-cs"/>
+                        </a:rPr>
+                        <a:t>X</a:t>
+                      </a:r>
+                      <a:endParaRPr kumimoji="0" lang="en-US" sz="1400" b="0" i="0" u="none" strike="noStrike" kern="1200" cap="none" spc="0" normalizeH="0" baseline="0" noProof="0" dirty="0">
+                        <a:ln>
+                          <a:noFill/>
+                        </a:ln>
+                        <a:solidFill>
+                          <a:srgbClr val="000000"/>
+                        </a:solidFill>
+                        <a:effectLst/>
+                        <a:uLnTx/>
+                        <a:uFillTx/>
+                        <a:latin typeface="Aptos" panose="020B0004020202020204" pitchFamily="34" charset="0"/>
+                        <a:ea typeface="+mn-ea"/>
+                        <a:cs typeface="+mn-cs"/>
+                      </a:endParaRPr>
+                    </a:p>
+                  </a:txBody>
+                  <a:tcPr marL="31510" marR="31510" marT="17506" marB="17506" anchor="ctr">
+                    <a:lnL w="12700" cap="flat" cmpd="sng" algn="ctr">
+                      <a:solidFill>
+                        <a:schemeClr val="tx1">
+                          <a:lumMod val="50000"/>
+                          <a:lumOff val="50000"/>
+                        </a:schemeClr>
+                      </a:solidFill>
+                      <a:prstDash val="solid"/>
+                      <a:round/>
+                      <a:headEnd type="none" w="med" len="med"/>
+                      <a:tailEnd type="none" w="med" len="med"/>
+                    </a:lnL>
+                    <a:lnR w="12700" cap="flat" cmpd="sng" algn="ctr">
+                      <a:solidFill>
+                        <a:schemeClr val="tx1">
+                          <a:lumMod val="50000"/>
+                          <a:lumOff val="50000"/>
+                        </a:schemeClr>
+                      </a:solidFill>
+                      <a:prstDash val="solid"/>
+                      <a:round/>
+                      <a:headEnd type="none" w="med" len="med"/>
+                      <a:tailEnd type="none" w="med" len="med"/>
+                    </a:lnR>
+                    <a:lnT w="12700" cap="flat" cmpd="sng" algn="ctr">
+                      <a:solidFill>
+                        <a:schemeClr val="bg1"/>
+                      </a:solidFill>
+                      <a:prstDash val="solid"/>
+                      <a:round/>
+                      <a:headEnd type="none" w="med" len="med"/>
+                      <a:tailEnd type="none" w="med" len="med"/>
+                    </a:lnT>
+                    <a:lnB w="12700" cap="flat" cmpd="sng" algn="ctr">
+                      <a:solidFill>
+                        <a:schemeClr val="tx1">
+                          <a:lumMod val="50000"/>
+                          <a:lumOff val="50000"/>
+                        </a:schemeClr>
+                      </a:solidFill>
+                      <a:prstDash val="solid"/>
+                      <a:round/>
+                      <a:headEnd type="none" w="med" len="med"/>
+                      <a:tailEnd type="none" w="med" len="med"/>
+                    </a:lnB>
+                    <a:lnTlToBr w="12700" cmpd="sng">
+                      <a:noFill/>
+                      <a:prstDash val="solid"/>
+                    </a:lnTlToBr>
+                    <a:lnBlToTr w="12700" cmpd="sng">
+                      <a:noFill/>
+                      <a:prstDash val="solid"/>
+                    </a:lnBlToTr>
+                    <a:noFill/>
+                  </a:tcPr>
+                </a:tc>
+                <a:tc>
+                  <a:txBody>
+                    <a:bodyPr/>
+                    <a:lstStyle/>
+                    <a:p>
+                      <a:pPr marL="0" marR="0" lvl="0" indent="0" algn="ctr" defTabSz="914400" rtl="0" eaLnBrk="1" fontAlgn="auto" latinLnBrk="0" hangingPunct="1">
+                        <a:lnSpc>
+                          <a:spcPct val="100000"/>
+                        </a:lnSpc>
+                        <a:spcBef>
+                          <a:spcPts val="0"/>
+                        </a:spcBef>
+                        <a:spcAft>
+                          <a:spcPts val="0"/>
+                        </a:spcAft>
+                        <a:buClrTx/>
+                        <a:buSzTx/>
+                        <a:buFontTx/>
+                        <a:buNone/>
+                        <a:tabLst/>
+                        <a:defRPr/>
+                      </a:pPr>
+                      <a:r>
+                        <a:rPr kumimoji="0" lang="en-US" sz="1400" b="0" i="0" u="none" strike="noStrike" kern="1200" cap="none" spc="0" normalizeH="0" baseline="0" noProof="0">
+                          <a:ln>
+                            <a:noFill/>
+                          </a:ln>
+                          <a:solidFill>
+                            <a:srgbClr val="000000"/>
+                          </a:solidFill>
+                          <a:effectLst/>
+                          <a:uLnTx/>
+                          <a:uFillTx/>
+                          <a:latin typeface="Arial"/>
+                          <a:ea typeface="+mn-ea"/>
+                          <a:cs typeface="+mn-cs"/>
+                        </a:rPr>
+                        <a:t>X</a:t>
+                      </a:r>
+                      <a:endParaRPr kumimoji="0" lang="en-US" sz="1400" b="0" i="0" u="none" strike="noStrike" kern="1200" cap="none" spc="0" normalizeH="0" baseline="0" noProof="0" dirty="0">
+                        <a:ln>
+                          <a:noFill/>
+                        </a:ln>
+                        <a:solidFill>
+                          <a:srgbClr val="000000"/>
+                        </a:solidFill>
+                        <a:effectLst/>
+                        <a:uLnTx/>
+                        <a:uFillTx/>
+                        <a:latin typeface="Aptos" panose="020B0004020202020204" pitchFamily="34" charset="0"/>
+                        <a:ea typeface="+mn-ea"/>
+                        <a:cs typeface="+mn-cs"/>
+                      </a:endParaRPr>
+                    </a:p>
+                  </a:txBody>
+                  <a:tcPr marL="31510" marR="31510" marT="17506" marB="17506" anchor="ctr">
+                    <a:lnL w="12700" cap="flat" cmpd="sng" algn="ctr">
+                      <a:solidFill>
+                        <a:schemeClr val="tx1">
+                          <a:lumMod val="50000"/>
+                          <a:lumOff val="50000"/>
+                        </a:schemeClr>
+                      </a:solidFill>
+                      <a:prstDash val="solid"/>
+                      <a:round/>
+                      <a:headEnd type="none" w="med" len="med"/>
+                      <a:tailEnd type="none" w="med" len="med"/>
+                    </a:lnL>
+                    <a:lnR w="12700" cap="flat" cmpd="sng" algn="ctr">
+                      <a:solidFill>
+                        <a:schemeClr val="tx1">
+                          <a:lumMod val="50000"/>
+                          <a:lumOff val="50000"/>
+                        </a:schemeClr>
+                      </a:solidFill>
+                      <a:prstDash val="solid"/>
+                      <a:round/>
+                      <a:headEnd type="none" w="med" len="med"/>
+                      <a:tailEnd type="none" w="med" len="med"/>
+                    </a:lnR>
+                    <a:lnT w="12700" cap="flat" cmpd="sng" algn="ctr">
+                      <a:solidFill>
+                        <a:schemeClr val="bg1"/>
+                      </a:solidFill>
+                      <a:prstDash val="solid"/>
+                      <a:round/>
+                      <a:headEnd type="none" w="med" len="med"/>
+                      <a:tailEnd type="none" w="med" len="med"/>
+                    </a:lnT>
+                    <a:lnB w="12700" cap="flat" cmpd="sng" algn="ctr">
+                      <a:solidFill>
+                        <a:schemeClr val="tx1">
+                          <a:lumMod val="50000"/>
+                          <a:lumOff val="50000"/>
+                        </a:schemeClr>
+                      </a:solidFill>
+                      <a:prstDash val="solid"/>
+                      <a:round/>
+                      <a:headEnd type="none" w="med" len="med"/>
+                      <a:tailEnd type="none" w="med" len="med"/>
+                    </a:lnB>
+                    <a:lnTlToBr w="12700" cmpd="sng">
+                      <a:noFill/>
+                      <a:prstDash val="solid"/>
+                    </a:lnTlToBr>
+                    <a:lnBlToTr w="12700" cmpd="sng">
+                      <a:noFill/>
+                      <a:prstDash val="solid"/>
+                    </a:lnBlToTr>
+                    <a:noFill/>
+                  </a:tcPr>
+                </a:tc>
+                <a:tc>
+                  <a:txBody>
+                    <a:bodyPr/>
+                    <a:lstStyle/>
+                    <a:p>
+                      <a:pPr marL="0" marR="0" lvl="0" indent="0" algn="ctr" defTabSz="914400" rtl="0" eaLnBrk="1" fontAlgn="auto" latinLnBrk="0" hangingPunct="1">
+                        <a:lnSpc>
+                          <a:spcPct val="100000"/>
+                        </a:lnSpc>
+                        <a:spcBef>
+                          <a:spcPts val="0"/>
+                        </a:spcBef>
+                        <a:spcAft>
+                          <a:spcPts val="0"/>
+                        </a:spcAft>
+                        <a:buClrTx/>
+                        <a:buSzTx/>
+                        <a:buFontTx/>
+                        <a:buNone/>
+                        <a:tabLst/>
+                        <a:defRPr/>
+                      </a:pPr>
+                      <a:r>
+                        <a:rPr kumimoji="0" lang="en-US" sz="1400" b="0" i="0" u="none" strike="noStrike" kern="1200" cap="none" spc="0" normalizeH="0" baseline="0" noProof="0" dirty="0">
+                          <a:ln>
+                            <a:noFill/>
+                          </a:ln>
+                          <a:solidFill>
+                            <a:srgbClr val="000000"/>
+                          </a:solidFill>
+                          <a:effectLst/>
+                          <a:uLnTx/>
+                          <a:uFillTx/>
+                          <a:latin typeface="Arial"/>
+                          <a:ea typeface="+mn-ea"/>
+                          <a:cs typeface="+mn-cs"/>
+                        </a:rPr>
+                        <a:t>X</a:t>
+                      </a:r>
+                      <a:endParaRPr kumimoji="0" lang="en-US" sz="1400" b="0" i="0" u="none" strike="noStrike" kern="1200" cap="none" spc="0" normalizeH="0" baseline="0" noProof="0" dirty="0">
+                        <a:ln>
+                          <a:noFill/>
+                        </a:ln>
+                        <a:solidFill>
+                          <a:srgbClr val="000000"/>
+                        </a:solidFill>
+                        <a:effectLst/>
+                        <a:uLnTx/>
+                        <a:uFillTx/>
+                        <a:latin typeface="Aptos" panose="020B0004020202020204" pitchFamily="34" charset="0"/>
+                        <a:ea typeface="+mn-ea"/>
+                        <a:cs typeface="+mn-cs"/>
+                      </a:endParaRPr>
+                    </a:p>
+                  </a:txBody>
+                  <a:tcPr marL="31510" marR="31510" marT="17506" marB="17506" anchor="ctr">
+                    <a:lnL w="12700" cap="flat" cmpd="sng" algn="ctr">
+                      <a:solidFill>
+                        <a:schemeClr val="tx1">
+                          <a:lumMod val="50000"/>
+                          <a:lumOff val="50000"/>
+                        </a:schemeClr>
+                      </a:solidFill>
+                      <a:prstDash val="solid"/>
+                      <a:round/>
+                      <a:headEnd type="none" w="med" len="med"/>
+                      <a:tailEnd type="none" w="med" len="med"/>
+                    </a:lnL>
+                    <a:lnR>
+                      <a:noFill/>
+                    </a:lnR>
+                    <a:lnT w="12700" cap="flat" cmpd="sng" algn="ctr">
+                      <a:solidFill>
+                        <a:schemeClr val="tx1">
+                          <a:lumMod val="50000"/>
+                          <a:lumOff val="50000"/>
+                        </a:schemeClr>
+                      </a:solidFill>
+                      <a:prstDash val="solid"/>
+                      <a:round/>
+                      <a:headEnd type="none" w="med" len="med"/>
+                      <a:tailEnd type="none" w="med" len="med"/>
+                    </a:lnT>
+                    <a:lnB w="12700" cap="flat" cmpd="sng" algn="ctr">
+                      <a:solidFill>
+                        <a:schemeClr val="tx1">
+                          <a:lumMod val="50000"/>
+                          <a:lumOff val="50000"/>
+                        </a:schemeClr>
+                      </a:solidFill>
+                      <a:prstDash val="solid"/>
+                      <a:round/>
+                      <a:headEnd type="none" w="med" len="med"/>
+                      <a:tailEnd type="none" w="med" len="med"/>
+                    </a:lnB>
+                    <a:lnTlToBr w="12700" cmpd="sng">
+                      <a:noFill/>
+                      <a:prstDash val="solid"/>
+                    </a:lnTlToBr>
+                    <a:lnBlToTr w="12700" cmpd="sng">
+                      <a:noFill/>
+                      <a:prstDash val="solid"/>
+                    </a:lnBlToTr>
+                    <a:noFill/>
+                  </a:tcPr>
+                </a:tc>
+                <a:extLst>
+                  <a:ext uri="{0D108BD9-81ED-4DB2-BD59-A6C34878D82A}">
+                    <a16:rowId xmlns:a16="http://schemas.microsoft.com/office/drawing/2014/main" val="3772197046"/>
+                  </a:ext>
+                </a:extLst>
+              </a:tr>
+              <a:tr h="365760">
+                <a:tc>
+                  <a:txBody>
+                    <a:bodyPr/>
+                    <a:lstStyle/>
+                    <a:p>
+                      <a:pPr algn="l">
+                        <a:buNone/>
+                      </a:pPr>
+                      <a:r>
+                        <a:rPr lang="en-US" sz="1200" b="0" dirty="0">
+                          <a:effectLst/>
+                        </a:rPr>
+                        <a:t>Placeholder (image)</a:t>
+                      </a:r>
+                      <a:endParaRPr lang="en-US" sz="1200" b="0" dirty="0">
+                        <a:effectLst/>
+                        <a:latin typeface="Aptos" panose="020B0004020202020204" pitchFamily="34" charset="0"/>
+                      </a:endParaRPr>
+                    </a:p>
+                  </a:txBody>
+                  <a:tcPr marL="31510" marR="31510" marT="17506" marB="17506" anchor="ctr">
+                    <a:lnL>
+                      <a:noFill/>
+                    </a:lnL>
+                    <a:lnR w="12700" cap="flat" cmpd="sng" algn="ctr">
+                      <a:solidFill>
+                        <a:schemeClr val="tx1">
+                          <a:lumMod val="50000"/>
+                          <a:lumOff val="50000"/>
+                        </a:schemeClr>
+                      </a:solidFill>
+                      <a:prstDash val="solid"/>
+                      <a:round/>
+                      <a:headEnd type="none" w="med" len="med"/>
+                      <a:tailEnd type="none" w="med" len="med"/>
+                    </a:lnR>
+                    <a:lnT w="12700" cap="flat" cmpd="sng" algn="ctr">
+                      <a:solidFill>
+                        <a:schemeClr val="tx1">
+                          <a:lumMod val="50000"/>
+                          <a:lumOff val="50000"/>
+                        </a:schemeClr>
+                      </a:solidFill>
+                      <a:prstDash val="solid"/>
+                      <a:round/>
+                      <a:headEnd type="none" w="med" len="med"/>
+                      <a:tailEnd type="none" w="med" len="med"/>
+                    </a:lnT>
+                    <a:lnB>
+                      <a:noFill/>
+                    </a:lnB>
+                    <a:lnTlToBr w="12700" cmpd="sng">
+                      <a:noFill/>
+                      <a:prstDash val="solid"/>
+                    </a:lnTlToBr>
+                    <a:lnBlToTr w="12700" cmpd="sng">
+                      <a:noFill/>
+                      <a:prstDash val="solid"/>
+                    </a:lnBlToTr>
+                    <a:noFill/>
+                  </a:tcPr>
+                </a:tc>
+                <a:tc>
+                  <a:txBody>
+                    <a:bodyPr/>
+                    <a:lstStyle/>
+                    <a:p>
+                      <a:pPr marL="0" marR="0" lvl="0" indent="0" algn="ctr" defTabSz="914400" rtl="0" eaLnBrk="1" fontAlgn="auto" latinLnBrk="0" hangingPunct="1">
+                        <a:lnSpc>
+                          <a:spcPct val="100000"/>
+                        </a:lnSpc>
+                        <a:spcBef>
+                          <a:spcPts val="0"/>
+                        </a:spcBef>
+                        <a:spcAft>
+                          <a:spcPts val="0"/>
+                        </a:spcAft>
+                        <a:buClrTx/>
+                        <a:buSzTx/>
+                        <a:buFontTx/>
+                        <a:buNone/>
+                        <a:tabLst/>
+                        <a:defRPr/>
+                      </a:pPr>
+                      <a:r>
+                        <a:rPr kumimoji="0" lang="en-US" sz="1400" b="0" i="0" u="none" strike="noStrike" kern="1200" cap="none" spc="0" normalizeH="0" baseline="0" noProof="0">
+                          <a:ln>
+                            <a:noFill/>
+                          </a:ln>
+                          <a:solidFill>
+                            <a:srgbClr val="000000"/>
+                          </a:solidFill>
+                          <a:effectLst/>
+                          <a:uLnTx/>
+                          <a:uFillTx/>
+                          <a:latin typeface="Arial"/>
+                          <a:ea typeface="+mn-ea"/>
+                          <a:cs typeface="+mn-cs"/>
+                        </a:rPr>
+                        <a:t>X</a:t>
+                      </a:r>
+                      <a:endParaRPr kumimoji="0" lang="en-US" sz="1400" b="0" i="0" u="none" strike="noStrike" kern="1200" cap="none" spc="0" normalizeH="0" baseline="0" noProof="0" dirty="0">
+                        <a:ln>
+                          <a:noFill/>
+                        </a:ln>
+                        <a:solidFill>
+                          <a:srgbClr val="000000"/>
+                        </a:solidFill>
+                        <a:effectLst/>
+                        <a:uLnTx/>
+                        <a:uFillTx/>
+                        <a:latin typeface="Aptos" panose="020B0004020202020204" pitchFamily="34" charset="0"/>
+                        <a:ea typeface="+mn-ea"/>
+                        <a:cs typeface="+mn-cs"/>
+                      </a:endParaRPr>
+                    </a:p>
+                  </a:txBody>
+                  <a:tcPr marL="31510" marR="31510" marT="17506" marB="17506" anchor="ctr">
+                    <a:lnL w="12700" cap="flat" cmpd="sng" algn="ctr">
+                      <a:solidFill>
+                        <a:schemeClr val="tx1">
+                          <a:lumMod val="50000"/>
+                          <a:lumOff val="50000"/>
+                        </a:schemeClr>
+                      </a:solidFill>
+                      <a:prstDash val="solid"/>
+                      <a:round/>
+                      <a:headEnd type="none" w="med" len="med"/>
+                      <a:tailEnd type="none" w="med" len="med"/>
+                    </a:lnL>
+                    <a:lnR w="12700" cap="flat" cmpd="sng" algn="ctr">
+                      <a:solidFill>
+                        <a:schemeClr val="tx1">
+                          <a:lumMod val="50000"/>
+                          <a:lumOff val="50000"/>
+                        </a:schemeClr>
+                      </a:solidFill>
+                      <a:prstDash val="solid"/>
+                      <a:round/>
+                      <a:headEnd type="none" w="med" len="med"/>
+                      <a:tailEnd type="none" w="med" len="med"/>
+                    </a:lnR>
+                    <a:lnT w="12700" cap="flat" cmpd="sng" algn="ctr">
+                      <a:solidFill>
+                        <a:schemeClr val="tx1">
+                          <a:lumMod val="50000"/>
+                          <a:lumOff val="50000"/>
+                        </a:schemeClr>
+                      </a:solidFill>
+                      <a:prstDash val="solid"/>
+                      <a:round/>
+                      <a:headEnd type="none" w="med" len="med"/>
+                      <a:tailEnd type="none" w="med" len="med"/>
+                    </a:lnT>
+                    <a:lnB>
+                      <a:noFill/>
+                    </a:lnB>
+                    <a:lnTlToBr w="12700" cmpd="sng">
+                      <a:noFill/>
+                      <a:prstDash val="solid"/>
+                    </a:lnTlToBr>
+                    <a:lnBlToTr w="12700" cmpd="sng">
+                      <a:noFill/>
+                      <a:prstDash val="solid"/>
+                    </a:lnBlToTr>
+                    <a:noFill/>
+                  </a:tcPr>
+                </a:tc>
+                <a:tc>
+                  <a:txBody>
+                    <a:bodyPr/>
+                    <a:lstStyle/>
+                    <a:p>
+                      <a:pPr marL="0" marR="0" lvl="0" indent="0" algn="ctr" defTabSz="914400" rtl="0" eaLnBrk="1" fontAlgn="auto" latinLnBrk="0" hangingPunct="1">
+                        <a:lnSpc>
+                          <a:spcPct val="100000"/>
+                        </a:lnSpc>
+                        <a:spcBef>
+                          <a:spcPts val="0"/>
+                        </a:spcBef>
+                        <a:spcAft>
+                          <a:spcPts val="0"/>
+                        </a:spcAft>
+                        <a:buClrTx/>
+                        <a:buSzTx/>
+                        <a:buFontTx/>
+                        <a:buNone/>
+                        <a:tabLst/>
+                        <a:defRPr/>
+                      </a:pPr>
+                      <a:r>
+                        <a:rPr kumimoji="0" lang="en-US" sz="1400" b="0" i="0" u="none" strike="noStrike" kern="1200" cap="none" spc="0" normalizeH="0" baseline="0" noProof="0" dirty="0">
+                          <a:ln>
+                            <a:noFill/>
+                          </a:ln>
+                          <a:solidFill>
+                            <a:srgbClr val="000000"/>
+                          </a:solidFill>
+                          <a:effectLst/>
+                          <a:uLnTx/>
+                          <a:uFillTx/>
+                          <a:latin typeface="Arial"/>
+                          <a:ea typeface="+mn-ea"/>
+                          <a:cs typeface="+mn-cs"/>
+                        </a:rPr>
+                        <a:t>X</a:t>
+                      </a:r>
+                      <a:endParaRPr kumimoji="0" lang="en-US" sz="1400" b="0" i="0" u="none" strike="noStrike" kern="1200" cap="none" spc="0" normalizeH="0" baseline="0" noProof="0" dirty="0">
+                        <a:ln>
+                          <a:noFill/>
+                        </a:ln>
+                        <a:solidFill>
+                          <a:srgbClr val="000000"/>
+                        </a:solidFill>
+                        <a:effectLst/>
+                        <a:uLnTx/>
+                        <a:uFillTx/>
+                        <a:latin typeface="Aptos" panose="020B0004020202020204" pitchFamily="34" charset="0"/>
+                        <a:ea typeface="+mn-ea"/>
+                        <a:cs typeface="+mn-cs"/>
+                      </a:endParaRPr>
+                    </a:p>
+                  </a:txBody>
+                  <a:tcPr marL="31510" marR="31510" marT="17506" marB="17506" anchor="ctr">
+                    <a:lnL w="12700" cap="flat" cmpd="sng" algn="ctr">
+                      <a:solidFill>
+                        <a:schemeClr val="tx1">
+                          <a:lumMod val="50000"/>
+                          <a:lumOff val="50000"/>
+                        </a:schemeClr>
+                      </a:solidFill>
+                      <a:prstDash val="solid"/>
+                      <a:round/>
+                      <a:headEnd type="none" w="med" len="med"/>
+                      <a:tailEnd type="none" w="med" len="med"/>
+                    </a:lnL>
+                    <a:lnR w="12700" cap="flat" cmpd="sng" algn="ctr">
+                      <a:solidFill>
+                        <a:schemeClr val="tx1">
+                          <a:lumMod val="50000"/>
+                          <a:lumOff val="50000"/>
+                        </a:schemeClr>
+                      </a:solidFill>
+                      <a:prstDash val="solid"/>
+                      <a:round/>
+                      <a:headEnd type="none" w="med" len="med"/>
+                      <a:tailEnd type="none" w="med" len="med"/>
+                    </a:lnR>
+                    <a:lnT w="12700" cap="flat" cmpd="sng" algn="ctr">
+                      <a:solidFill>
+                        <a:schemeClr val="tx1">
+                          <a:lumMod val="50000"/>
+                          <a:lumOff val="50000"/>
+                        </a:schemeClr>
+                      </a:solidFill>
+                      <a:prstDash val="solid"/>
+                      <a:round/>
+                      <a:headEnd type="none" w="med" len="med"/>
+                      <a:tailEnd type="none" w="med" len="med"/>
+                    </a:lnT>
+                    <a:lnB>
+                      <a:noFill/>
+                    </a:lnB>
+                    <a:lnTlToBr w="12700" cmpd="sng">
+                      <a:noFill/>
+                      <a:prstDash val="solid"/>
+                    </a:lnTlToBr>
+                    <a:lnBlToTr w="12700" cmpd="sng">
+                      <a:noFill/>
+                      <a:prstDash val="solid"/>
+                    </a:lnBlToTr>
+                    <a:noFill/>
+                  </a:tcPr>
+                </a:tc>
+                <a:tc>
+                  <a:txBody>
+                    <a:bodyPr/>
+                    <a:lstStyle/>
+                    <a:p>
+                      <a:pPr marL="0" marR="0" lvl="0" indent="0" algn="ctr" defTabSz="914400" rtl="0" eaLnBrk="1" fontAlgn="auto" latinLnBrk="0" hangingPunct="1">
+                        <a:lnSpc>
+                          <a:spcPct val="100000"/>
+                        </a:lnSpc>
+                        <a:spcBef>
+                          <a:spcPts val="0"/>
+                        </a:spcBef>
+                        <a:spcAft>
+                          <a:spcPts val="0"/>
+                        </a:spcAft>
+                        <a:buClrTx/>
+                        <a:buSzTx/>
+                        <a:buFontTx/>
+                        <a:buNone/>
+                        <a:tabLst/>
+                        <a:defRPr/>
+                      </a:pPr>
+                      <a:r>
+                        <a:rPr kumimoji="0" lang="en-US" sz="1400" b="0" i="0" u="none" strike="noStrike" kern="1200" cap="none" spc="0" normalizeH="0" baseline="0" noProof="0" dirty="0">
+                          <a:ln>
+                            <a:noFill/>
+                          </a:ln>
+                          <a:solidFill>
+                            <a:srgbClr val="000000"/>
+                          </a:solidFill>
+                          <a:effectLst/>
+                          <a:uLnTx/>
+                          <a:uFillTx/>
+                          <a:latin typeface="Arial"/>
+                          <a:ea typeface="+mn-ea"/>
+                          <a:cs typeface="+mn-cs"/>
+                        </a:rPr>
+                        <a:t>X</a:t>
+                      </a:r>
+                      <a:endParaRPr kumimoji="0" lang="en-US" sz="1400" b="0" i="0" u="none" strike="noStrike" kern="1200" cap="none" spc="0" normalizeH="0" baseline="0" noProof="0" dirty="0">
+                        <a:ln>
+                          <a:noFill/>
+                        </a:ln>
+                        <a:solidFill>
+                          <a:srgbClr val="000000"/>
+                        </a:solidFill>
+                        <a:effectLst/>
+                        <a:uLnTx/>
+                        <a:uFillTx/>
+                        <a:latin typeface="Aptos" panose="020B0004020202020204" pitchFamily="34" charset="0"/>
+                        <a:ea typeface="+mn-ea"/>
+                        <a:cs typeface="+mn-cs"/>
+                      </a:endParaRPr>
+                    </a:p>
+                  </a:txBody>
+                  <a:tcPr marL="31510" marR="31510" marT="17506" marB="17506" anchor="ctr">
+                    <a:lnL w="12700" cap="flat" cmpd="sng" algn="ctr">
+                      <a:solidFill>
+                        <a:schemeClr val="tx1">
+                          <a:lumMod val="50000"/>
+                          <a:lumOff val="50000"/>
+                        </a:schemeClr>
+                      </a:solidFill>
+                      <a:prstDash val="solid"/>
+                      <a:round/>
+                      <a:headEnd type="none" w="med" len="med"/>
+                      <a:tailEnd type="none" w="med" len="med"/>
+                    </a:lnL>
+                    <a:lnR>
+                      <a:noFill/>
+                    </a:lnR>
+                    <a:lnT w="12700" cap="flat" cmpd="sng" algn="ctr">
+                      <a:solidFill>
+                        <a:schemeClr val="tx1">
+                          <a:lumMod val="50000"/>
+                          <a:lumOff val="50000"/>
+                        </a:schemeClr>
+                      </a:solidFill>
+                      <a:prstDash val="solid"/>
+                      <a:round/>
+                      <a:headEnd type="none" w="med" len="med"/>
+                      <a:tailEnd type="none" w="med" len="med"/>
+                    </a:lnT>
+                    <a:lnB>
+                      <a:noFill/>
+                    </a:lnB>
+                    <a:lnTlToBr w="12700" cmpd="sng">
+                      <a:noFill/>
+                      <a:prstDash val="solid"/>
+                    </a:lnTlToBr>
+                    <a:lnBlToTr w="12700" cmpd="sng">
+                      <a:noFill/>
+                      <a:prstDash val="solid"/>
+                    </a:lnBlToTr>
+                    <a:noFill/>
+                  </a:tcPr>
+                </a:tc>
+                <a:extLst>
+                  <a:ext uri="{0D108BD9-81ED-4DB2-BD59-A6C34878D82A}">
+                    <a16:rowId xmlns:a16="http://schemas.microsoft.com/office/drawing/2014/main" val="2559969219"/>
+                  </a:ext>
+                </a:extLst>
+              </a:tr>
+            </a:tbl>
+          </a:graphicData>
+        </a:graphic>
+      </p:graphicFrame>
+      <p:sp>
+        <p:nvSpPr>
+          <p:cNvPr id="4" name="Footer Placeholder 3">
+            <a:extLst>
+              <a:ext uri="{FF2B5EF4-FFF2-40B4-BE49-F238E27FC236}">
+                <a16:creationId xmlns:a16="http://schemas.microsoft.com/office/drawing/2014/main" id="{49B3B8B2-27D1-2312-C274-0086F5DE2509}"/>
+              </a:ext>
+              <a:ext uri="{C183D7F6-B498-43B3-948B-1728B52AA6E4}">
+                <adec:decorative xmlns:adec="http://schemas.microsoft.com/office/drawing/2017/decorative" val="1"/>
+              </a:ext>
+            </a:extLst>
+          </p:cNvPr>
+          <p:cNvSpPr>
+            <a:spLocks noGrp="1"/>
+          </p:cNvSpPr>
+          <p:nvPr>
+            <p:ph type="ftr" sz="quarter" idx="3"/>
+          </p:nvPr>
+        </p:nvSpPr>
+        <p:spPr/>
+        <p:txBody>
+          <a:bodyPr/>
+          <a:lstStyle/>
+          <a:p>
+            <a:r>
+              <a:rPr lang="en-US"/>
+              <a:t>Getting to 100: Fixing Your Anthology Ally Errors</a:t>
+            </a:r>
+            <a:endParaRPr lang="en-US" dirty="0"/>
+          </a:p>
+        </p:txBody>
+      </p:sp>
+      <p:sp>
+        <p:nvSpPr>
+          <p:cNvPr id="5" name="Slide Number Placeholder 4">
+            <a:extLst>
+              <a:ext uri="{FF2B5EF4-FFF2-40B4-BE49-F238E27FC236}">
+                <a16:creationId xmlns:a16="http://schemas.microsoft.com/office/drawing/2014/main" id="{5D1364C2-DA24-1CC2-F862-D20304C969DE}"/>
+              </a:ext>
+              <a:ext uri="{C183D7F6-B498-43B3-948B-1728B52AA6E4}">
+                <adec:decorative xmlns:adec="http://schemas.microsoft.com/office/drawing/2017/decorative" val="1"/>
+              </a:ext>
+            </a:extLst>
+          </p:cNvPr>
+          <p:cNvSpPr>
+            <a:spLocks noGrp="1"/>
+          </p:cNvSpPr>
+          <p:nvPr>
+            <p:ph type="sldNum" sz="quarter" idx="4"/>
+          </p:nvPr>
+        </p:nvSpPr>
+        <p:spPr/>
+        <p:txBody>
+          <a:bodyPr/>
+          <a:lstStyle/>
+          <a:p>
+            <a:fld id="{E2D72577-C5EA-2248-880D-8FE657DD8266}" type="slidenum">
+              <a:rPr lang="en-US" smtClean="0"/>
+              <a:pPr/>
+              <a:t>27</a:t>
+            </a:fld>
+            <a:endParaRPr lang="en-US"/>
+          </a:p>
+        </p:txBody>
+      </p:sp>
+    </p:spTree>
+    <p:extLst>
+      <p:ext uri="{BB962C8B-B14F-4D97-AF65-F5344CB8AC3E}">
+        <p14:creationId xmlns:p14="http://schemas.microsoft.com/office/powerpoint/2010/main" val="3129371445"/>
+      </p:ext>
+    </p:extLst>
+  </p:cSld>
+  <p:clrMapOvr>
+    <a:masterClrMapping/>
+  </p:clrMapOvr>
+</p:sld>
+</file>
+
+<file path=ppt/slides/slide28.xml><?xml version="1.0" encoding="utf-8"?>
+<p:sld xmlns:a="http://schemas.openxmlformats.org/drawingml/2006/main" xmlns:r="http://schemas.openxmlformats.org/officeDocument/2006/relationships" xmlns:p="http://schemas.openxmlformats.org/presentationml/2006/main">
+  <p:cSld>
+    <p:spTree>
+      <p:nvGrpSpPr>
+        <p:cNvPr id="1" name=""/>
+        <p:cNvGrpSpPr/>
+        <p:nvPr/>
+      </p:nvGrpSpPr>
+      <p:grpSpPr>
+        <a:xfrm>
+          <a:off x="0" y="0"/>
+          <a:ext cx="0" cy="0"/>
+          <a:chOff x="0" y="0"/>
+          <a:chExt cx="0" cy="0"/>
+        </a:xfrm>
+      </p:grpSpPr>
+      <p:sp>
+        <p:nvSpPr>
+          <p:cNvPr id="2" name="Title 1">
+            <a:extLst>
+              <a:ext uri="{FF2B5EF4-FFF2-40B4-BE49-F238E27FC236}">
+                <a16:creationId xmlns:a16="http://schemas.microsoft.com/office/drawing/2014/main" id="{1442F679-9972-EDCC-2858-9F99DC56F05B}"/>
+              </a:ext>
+            </a:extLst>
+          </p:cNvPr>
+          <p:cNvSpPr>
+            <a:spLocks noGrp="1"/>
+          </p:cNvSpPr>
+          <p:nvPr>
+            <p:ph type="title"/>
+          </p:nvPr>
+        </p:nvSpPr>
+        <p:spPr/>
+        <p:txBody>
+          <a:bodyPr/>
+          <a:lstStyle/>
+          <a:p>
+            <a:r>
+              <a:rPr lang="en-US" dirty="0"/>
+              <a:t>Alt text samples to Canvas Files</a:t>
+            </a:r>
+          </a:p>
+        </p:txBody>
+      </p:sp>
+      <p:sp>
+        <p:nvSpPr>
+          <p:cNvPr id="3" name="Content Placeholder 2">
+            <a:extLst>
+              <a:ext uri="{FF2B5EF4-FFF2-40B4-BE49-F238E27FC236}">
+                <a16:creationId xmlns:a16="http://schemas.microsoft.com/office/drawing/2014/main" id="{1C7E0A7F-FC93-5BF4-1AE5-62E4C9A551C5}"/>
+              </a:ext>
+            </a:extLst>
+          </p:cNvPr>
+          <p:cNvSpPr>
+            <a:spLocks noGrp="1"/>
+          </p:cNvSpPr>
+          <p:nvPr>
+            <p:ph idx="1"/>
+          </p:nvPr>
+        </p:nvSpPr>
+        <p:spPr>
+          <a:xfrm>
+            <a:off x="457200" y="1268651"/>
+            <a:ext cx="6688318" cy="1303100"/>
+          </a:xfrm>
+        </p:spPr>
+        <p:txBody>
+          <a:bodyPr/>
+          <a:lstStyle/>
+          <a:p>
+            <a:r>
+              <a:rPr lang="en-US" sz="1400" dirty="0"/>
+              <a:t>Move the alt text samples over to Canvas. </a:t>
+            </a:r>
+          </a:p>
+          <a:p>
+            <a:r>
+              <a:rPr lang="en-US" sz="1400" dirty="0"/>
+              <a:t>System analyzes files on the fly. </a:t>
+            </a:r>
+          </a:p>
+          <a:p>
+            <a:r>
+              <a:rPr lang="en-US" sz="1400" dirty="0"/>
+              <a:t>Results show inline next to files, and in the Accessibility Dashboard. </a:t>
+            </a:r>
+          </a:p>
+          <a:p>
+            <a:r>
+              <a:rPr lang="en-US" sz="1400" dirty="0"/>
+              <a:t>Hover over an icon to see score. </a:t>
+            </a:r>
+          </a:p>
+        </p:txBody>
+      </p:sp>
+      <p:pic>
+        <p:nvPicPr>
+          <p:cNvPr id="6" name="Picture 5" descr="Files interface with accessibility scores. ">
+            <a:extLst>
+              <a:ext uri="{FF2B5EF4-FFF2-40B4-BE49-F238E27FC236}">
+                <a16:creationId xmlns:a16="http://schemas.microsoft.com/office/drawing/2014/main" id="{6A3F877D-F927-D33E-0F7B-FEE9501F3F58}"/>
+              </a:ext>
+            </a:extLst>
+          </p:cNvPr>
+          <p:cNvPicPr>
+            <a:picLocks noChangeAspect="1"/>
+          </p:cNvPicPr>
+          <p:nvPr/>
+        </p:nvPicPr>
+        <p:blipFill>
+          <a:blip r:embed="rId2"/>
+          <a:stretch>
+            <a:fillRect/>
+          </a:stretch>
+        </p:blipFill>
+        <p:spPr>
+          <a:xfrm>
+            <a:off x="550719" y="2589177"/>
+            <a:ext cx="6542328" cy="1972432"/>
+          </a:xfrm>
+          <a:prstGeom prst="rect">
+            <a:avLst/>
+          </a:prstGeom>
+        </p:spPr>
+      </p:pic>
+      <p:sp>
+        <p:nvSpPr>
+          <p:cNvPr id="4" name="Footer Placeholder 3">
+            <a:extLst>
+              <a:ext uri="{FF2B5EF4-FFF2-40B4-BE49-F238E27FC236}">
+                <a16:creationId xmlns:a16="http://schemas.microsoft.com/office/drawing/2014/main" id="{EBD40CAA-854D-B26F-134D-5C033B24D491}"/>
+              </a:ext>
+              <a:ext uri="{C183D7F6-B498-43B3-948B-1728B52AA6E4}">
+                <adec:decorative xmlns:adec="http://schemas.microsoft.com/office/drawing/2017/decorative" val="1"/>
+              </a:ext>
+            </a:extLst>
+          </p:cNvPr>
+          <p:cNvSpPr>
+            <a:spLocks noGrp="1"/>
+          </p:cNvSpPr>
+          <p:nvPr>
+            <p:ph type="ftr" sz="quarter" idx="3"/>
+          </p:nvPr>
+        </p:nvSpPr>
+        <p:spPr/>
+        <p:txBody>
+          <a:bodyPr/>
+          <a:lstStyle/>
+          <a:p>
+            <a:r>
+              <a:rPr lang="en-US"/>
+              <a:t>Getting to 100: Fixing Your Anthology Ally Errors</a:t>
+            </a:r>
+            <a:endParaRPr lang="en-US" dirty="0"/>
+          </a:p>
+        </p:txBody>
+      </p:sp>
+      <p:sp>
+        <p:nvSpPr>
+          <p:cNvPr id="5" name="Slide Number Placeholder 4">
+            <a:extLst>
+              <a:ext uri="{FF2B5EF4-FFF2-40B4-BE49-F238E27FC236}">
+                <a16:creationId xmlns:a16="http://schemas.microsoft.com/office/drawing/2014/main" id="{6BC98EE5-81D4-512F-4464-592BAC596C77}"/>
+              </a:ext>
+              <a:ext uri="{C183D7F6-B498-43B3-948B-1728B52AA6E4}">
+                <adec:decorative xmlns:adec="http://schemas.microsoft.com/office/drawing/2017/decorative" val="1"/>
+              </a:ext>
+            </a:extLst>
+          </p:cNvPr>
+          <p:cNvSpPr>
+            <a:spLocks noGrp="1"/>
+          </p:cNvSpPr>
+          <p:nvPr>
+            <p:ph type="sldNum" sz="quarter" idx="4"/>
+          </p:nvPr>
+        </p:nvSpPr>
+        <p:spPr/>
+        <p:txBody>
+          <a:bodyPr/>
+          <a:lstStyle/>
+          <a:p>
+            <a:fld id="{E2D72577-C5EA-2248-880D-8FE657DD8266}" type="slidenum">
+              <a:rPr lang="en-US" smtClean="0"/>
+              <a:pPr/>
+              <a:t>28</a:t>
+            </a:fld>
+            <a:endParaRPr lang="en-US"/>
+          </a:p>
+        </p:txBody>
+      </p:sp>
+    </p:spTree>
+    <p:extLst>
+      <p:ext uri="{BB962C8B-B14F-4D97-AF65-F5344CB8AC3E}">
+        <p14:creationId xmlns:p14="http://schemas.microsoft.com/office/powerpoint/2010/main" val="2720929295"/>
+      </p:ext>
+    </p:extLst>
+  </p:cSld>
+  <p:clrMapOvr>
+    <a:masterClrMapping/>
+  </p:clrMapOvr>
+</p:sld>
+</file>
+
+<file path=ppt/slides/slide29.xml><?xml version="1.0" encoding="utf-8"?>
+<p:sld xmlns:a="http://schemas.openxmlformats.org/drawingml/2006/main" xmlns:r="http://schemas.openxmlformats.org/officeDocument/2006/relationships" xmlns:p="http://schemas.openxmlformats.org/presentationml/2006/main">
+  <p:cSld>
+    <p:spTree>
+      <p:nvGrpSpPr>
+        <p:cNvPr id="1" name=""/>
+        <p:cNvGrpSpPr/>
+        <p:nvPr/>
+      </p:nvGrpSpPr>
+      <p:grpSpPr>
+        <a:xfrm>
+          <a:off x="0" y="0"/>
+          <a:ext cx="0" cy="0"/>
+          <a:chOff x="0" y="0"/>
+          <a:chExt cx="0" cy="0"/>
+        </a:xfrm>
+      </p:grpSpPr>
+      <p:sp>
+        <p:nvSpPr>
+          <p:cNvPr id="2" name="Title 1">
+            <a:extLst>
+              <a:ext uri="{FF2B5EF4-FFF2-40B4-BE49-F238E27FC236}">
+                <a16:creationId xmlns:a16="http://schemas.microsoft.com/office/drawing/2014/main" id="{A73BBDEB-AE72-E7F8-F677-8AD04E91F1ED}"/>
+              </a:ext>
+            </a:extLst>
+          </p:cNvPr>
+          <p:cNvSpPr>
+            <a:spLocks noGrp="1"/>
+          </p:cNvSpPr>
+          <p:nvPr>
+            <p:ph type="title"/>
+          </p:nvPr>
+        </p:nvSpPr>
+        <p:spPr/>
+        <p:txBody>
+          <a:bodyPr/>
+          <a:lstStyle/>
+          <a:p>
+            <a:r>
+              <a:rPr lang="en-US" dirty="0"/>
+              <a:t>Fix image upload alt text</a:t>
+            </a:r>
+          </a:p>
+        </p:txBody>
+      </p:sp>
+      <p:sp>
+        <p:nvSpPr>
+          <p:cNvPr id="3" name="Content Placeholder 2">
+            <a:extLst>
+              <a:ext uri="{FF2B5EF4-FFF2-40B4-BE49-F238E27FC236}">
+                <a16:creationId xmlns:a16="http://schemas.microsoft.com/office/drawing/2014/main" id="{F4E3DCCD-38E2-6093-52D9-5A340A9049DC}"/>
+              </a:ext>
+            </a:extLst>
+          </p:cNvPr>
+          <p:cNvSpPr>
+            <a:spLocks noGrp="1"/>
+          </p:cNvSpPr>
+          <p:nvPr>
+            <p:ph idx="1"/>
+          </p:nvPr>
+        </p:nvSpPr>
+        <p:spPr>
+          <a:xfrm>
+            <a:off x="457200" y="1268651"/>
+            <a:ext cx="2852305" cy="3095532"/>
+          </a:xfrm>
+        </p:spPr>
+        <p:txBody>
+          <a:bodyPr/>
+          <a:lstStyle/>
+          <a:p>
+            <a:r>
+              <a:rPr lang="en-US" sz="1400" dirty="0"/>
+              <a:t>Fix from either dashboard or Files.</a:t>
+            </a:r>
+          </a:p>
+          <a:p>
+            <a:r>
+              <a:rPr lang="en-US" sz="1400" dirty="0"/>
+              <a:t>Select the red dashboard icon pointing to low 25%.  </a:t>
+            </a:r>
+          </a:p>
+        </p:txBody>
+      </p:sp>
+      <p:pic>
+        <p:nvPicPr>
+          <p:cNvPr id="6" name="Picture 5" descr="25% score for image does not have a description. ">
+            <a:extLst>
+              <a:ext uri="{FF2B5EF4-FFF2-40B4-BE49-F238E27FC236}">
+                <a16:creationId xmlns:a16="http://schemas.microsoft.com/office/drawing/2014/main" id="{A3E44DE3-20CE-3DE4-2837-550CF77275B9}"/>
+              </a:ext>
+            </a:extLst>
+          </p:cNvPr>
+          <p:cNvPicPr>
+            <a:picLocks noChangeAspect="1"/>
+          </p:cNvPicPr>
+          <p:nvPr/>
+        </p:nvPicPr>
+        <p:blipFill>
+          <a:blip r:embed="rId2"/>
+          <a:stretch>
+            <a:fillRect/>
+          </a:stretch>
+        </p:blipFill>
+        <p:spPr>
+          <a:xfrm>
+            <a:off x="3380297" y="1278081"/>
+            <a:ext cx="4231044" cy="1784871"/>
+          </a:xfrm>
+          <a:prstGeom prst="rect">
+            <a:avLst/>
+          </a:prstGeom>
+        </p:spPr>
+      </p:pic>
+      <p:pic>
+        <p:nvPicPr>
+          <p:cNvPr id="8" name="Picture 7" descr="Red dashboard icon points to 25%. ">
+            <a:extLst>
+              <a:ext uri="{FF2B5EF4-FFF2-40B4-BE49-F238E27FC236}">
+                <a16:creationId xmlns:a16="http://schemas.microsoft.com/office/drawing/2014/main" id="{49810D97-3206-9B5B-D9F4-ADAAC24AC5A0}"/>
+              </a:ext>
+            </a:extLst>
+          </p:cNvPr>
+          <p:cNvPicPr>
+            <a:picLocks noChangeAspect="1"/>
+          </p:cNvPicPr>
+          <p:nvPr/>
+        </p:nvPicPr>
+        <p:blipFill>
+          <a:blip r:embed="rId3"/>
+          <a:stretch>
+            <a:fillRect/>
+          </a:stretch>
+        </p:blipFill>
+        <p:spPr>
+          <a:xfrm>
+            <a:off x="3616036" y="3217726"/>
+            <a:ext cx="2962564" cy="915545"/>
+          </a:xfrm>
+          <a:prstGeom prst="rect">
+            <a:avLst/>
+          </a:prstGeom>
+        </p:spPr>
+      </p:pic>
+      <p:sp>
+        <p:nvSpPr>
+          <p:cNvPr id="4" name="Footer Placeholder 3">
+            <a:extLst>
+              <a:ext uri="{FF2B5EF4-FFF2-40B4-BE49-F238E27FC236}">
+                <a16:creationId xmlns:a16="http://schemas.microsoft.com/office/drawing/2014/main" id="{BF2C3332-D9B6-4E54-DD73-1E3087751FA1}"/>
+              </a:ext>
+              <a:ext uri="{C183D7F6-B498-43B3-948B-1728B52AA6E4}">
+                <adec:decorative xmlns:adec="http://schemas.microsoft.com/office/drawing/2017/decorative" val="1"/>
+              </a:ext>
+            </a:extLst>
+          </p:cNvPr>
+          <p:cNvSpPr>
+            <a:spLocks noGrp="1"/>
+          </p:cNvSpPr>
+          <p:nvPr>
+            <p:ph type="ftr" sz="quarter" idx="3"/>
+          </p:nvPr>
+        </p:nvSpPr>
+        <p:spPr/>
+        <p:txBody>
+          <a:bodyPr/>
+          <a:lstStyle/>
+          <a:p>
+            <a:r>
+              <a:rPr lang="en-US"/>
+              <a:t>Getting to 100: Fixing Your Anthology Ally Errors</a:t>
+            </a:r>
+            <a:endParaRPr lang="en-US" dirty="0"/>
+          </a:p>
+        </p:txBody>
+      </p:sp>
+      <p:sp>
+        <p:nvSpPr>
+          <p:cNvPr id="5" name="Slide Number Placeholder 4">
+            <a:extLst>
+              <a:ext uri="{FF2B5EF4-FFF2-40B4-BE49-F238E27FC236}">
+                <a16:creationId xmlns:a16="http://schemas.microsoft.com/office/drawing/2014/main" id="{3A40B72A-22F4-2A76-525D-A4C2D57DF32F}"/>
+              </a:ext>
+              <a:ext uri="{C183D7F6-B498-43B3-948B-1728B52AA6E4}">
+                <adec:decorative xmlns:adec="http://schemas.microsoft.com/office/drawing/2017/decorative" val="1"/>
+              </a:ext>
+            </a:extLst>
+          </p:cNvPr>
+          <p:cNvSpPr>
+            <a:spLocks noGrp="1"/>
+          </p:cNvSpPr>
+          <p:nvPr>
+            <p:ph type="sldNum" sz="quarter" idx="4"/>
+          </p:nvPr>
+        </p:nvSpPr>
+        <p:spPr/>
+        <p:txBody>
+          <a:bodyPr/>
+          <a:lstStyle/>
+          <a:p>
+            <a:fld id="{E2D72577-C5EA-2248-880D-8FE657DD8266}" type="slidenum">
+              <a:rPr lang="en-US" smtClean="0"/>
+              <a:pPr/>
+              <a:t>29</a:t>
+            </a:fld>
+            <a:endParaRPr lang="en-US"/>
+          </a:p>
+        </p:txBody>
+      </p:sp>
+    </p:spTree>
+    <p:extLst>
+      <p:ext uri="{BB962C8B-B14F-4D97-AF65-F5344CB8AC3E}">
+        <p14:creationId xmlns:p14="http://schemas.microsoft.com/office/powerpoint/2010/main" val="2448058591"/>
       </p:ext>
     </p:extLst>
   </p:cSld>
@@ -13577,6 +19279,1048 @@
     <p:extLst>
       <p:ext uri="{BB962C8B-B14F-4D97-AF65-F5344CB8AC3E}">
         <p14:creationId xmlns:p14="http://schemas.microsoft.com/office/powerpoint/2010/main" val="2537377548"/>
+      </p:ext>
+    </p:extLst>
+  </p:cSld>
+  <p:clrMapOvr>
+    <a:masterClrMapping/>
+  </p:clrMapOvr>
+</p:sld>
+</file>
+
+<file path=ppt/slides/slide30.xml><?xml version="1.0" encoding="utf-8"?>
+<p:sld xmlns:a="http://schemas.openxmlformats.org/drawingml/2006/main" xmlns:r="http://schemas.openxmlformats.org/officeDocument/2006/relationships" xmlns:p="http://schemas.openxmlformats.org/presentationml/2006/main">
+  <p:cSld>
+    <p:spTree>
+      <p:nvGrpSpPr>
+        <p:cNvPr id="1" name=""/>
+        <p:cNvGrpSpPr/>
+        <p:nvPr/>
+      </p:nvGrpSpPr>
+      <p:grpSpPr>
+        <a:xfrm>
+          <a:off x="0" y="0"/>
+          <a:ext cx="0" cy="0"/>
+          <a:chOff x="0" y="0"/>
+          <a:chExt cx="0" cy="0"/>
+        </a:xfrm>
+      </p:grpSpPr>
+      <p:sp>
+        <p:nvSpPr>
+          <p:cNvPr id="2" name="Title 1">
+            <a:extLst>
+              <a:ext uri="{FF2B5EF4-FFF2-40B4-BE49-F238E27FC236}">
+                <a16:creationId xmlns:a16="http://schemas.microsoft.com/office/drawing/2014/main" id="{409F567C-2F04-7B79-C02F-7B8EDA357FE0}"/>
+              </a:ext>
+            </a:extLst>
+          </p:cNvPr>
+          <p:cNvSpPr>
+            <a:spLocks noGrp="1"/>
+          </p:cNvSpPr>
+          <p:nvPr>
+            <p:ph type="title"/>
+          </p:nvPr>
+        </p:nvSpPr>
+        <p:spPr/>
+        <p:txBody>
+          <a:bodyPr/>
+          <a:lstStyle/>
+          <a:p>
+            <a:r>
+              <a:rPr lang="en-US" dirty="0"/>
+              <a:t>Adding images in Canvas editor</a:t>
+            </a:r>
+          </a:p>
+        </p:txBody>
+      </p:sp>
+      <p:sp>
+        <p:nvSpPr>
+          <p:cNvPr id="3" name="Content Placeholder 2">
+            <a:extLst>
+              <a:ext uri="{FF2B5EF4-FFF2-40B4-BE49-F238E27FC236}">
+                <a16:creationId xmlns:a16="http://schemas.microsoft.com/office/drawing/2014/main" id="{7297F036-CBB2-6532-E8A1-7D48CD43289A}"/>
+              </a:ext>
+            </a:extLst>
+          </p:cNvPr>
+          <p:cNvSpPr>
+            <a:spLocks noGrp="1"/>
+          </p:cNvSpPr>
+          <p:nvPr>
+            <p:ph idx="1"/>
+          </p:nvPr>
+        </p:nvSpPr>
+        <p:spPr>
+          <a:xfrm>
+            <a:off x="457200" y="1268650"/>
+            <a:ext cx="4307032" cy="3339109"/>
+          </a:xfrm>
+        </p:spPr>
+        <p:txBody>
+          <a:bodyPr/>
+          <a:lstStyle/>
+          <a:p>
+            <a:r>
+              <a:rPr lang="en-US" sz="1400" dirty="0"/>
+              <a:t>The system will allow you to upload images without alt text unfortunately. </a:t>
+            </a:r>
+          </a:p>
+          <a:p>
+            <a:r>
+              <a:rPr lang="en-US" sz="1400" dirty="0"/>
+              <a:t>The system will default to using the file name of the image as its alt text. </a:t>
+            </a:r>
+          </a:p>
+          <a:p>
+            <a:r>
+              <a:rPr lang="en-US" sz="1400" dirty="0"/>
+              <a:t>This will show up on your Accessibility Dashboard impacting your overall score. </a:t>
+            </a:r>
+          </a:p>
+        </p:txBody>
+      </p:sp>
+      <p:pic>
+        <p:nvPicPr>
+          <p:cNvPr id="6" name="Picture 5" descr="Accessibility checker shows alt text as the file name of the image. ">
+            <a:extLst>
+              <a:ext uri="{FF2B5EF4-FFF2-40B4-BE49-F238E27FC236}">
+                <a16:creationId xmlns:a16="http://schemas.microsoft.com/office/drawing/2014/main" id="{DE4776FC-D983-476D-A5C8-EB54B2E7867D}"/>
+              </a:ext>
+            </a:extLst>
+          </p:cNvPr>
+          <p:cNvPicPr>
+            <a:picLocks noChangeAspect="1"/>
+          </p:cNvPicPr>
+          <p:nvPr/>
+        </p:nvPicPr>
+        <p:blipFill>
+          <a:blip r:embed="rId2">
+            <a:extLst>
+              <a:ext uri="{28A0092B-C50C-407E-A947-70E740481C1C}">
+                <a14:useLocalDpi xmlns:a14="http://schemas.microsoft.com/office/drawing/2010/main" val="0"/>
+              </a:ext>
+            </a:extLst>
+          </a:blip>
+          <a:srcRect/>
+          <a:stretch/>
+        </p:blipFill>
+        <p:spPr>
+          <a:xfrm>
+            <a:off x="5338159" y="1289047"/>
+            <a:ext cx="2048663" cy="2695291"/>
+          </a:xfrm>
+          <a:prstGeom prst="rect">
+            <a:avLst/>
+          </a:prstGeom>
+        </p:spPr>
+      </p:pic>
+      <p:sp>
+        <p:nvSpPr>
+          <p:cNvPr id="4" name="Footer Placeholder 3">
+            <a:extLst>
+              <a:ext uri="{FF2B5EF4-FFF2-40B4-BE49-F238E27FC236}">
+                <a16:creationId xmlns:a16="http://schemas.microsoft.com/office/drawing/2014/main" id="{B8CEDD3D-EDFB-B343-C0E6-F5886E29C640}"/>
+              </a:ext>
+              <a:ext uri="{C183D7F6-B498-43B3-948B-1728B52AA6E4}">
+                <adec:decorative xmlns:adec="http://schemas.microsoft.com/office/drawing/2017/decorative" val="1"/>
+              </a:ext>
+            </a:extLst>
+          </p:cNvPr>
+          <p:cNvSpPr>
+            <a:spLocks noGrp="1"/>
+          </p:cNvSpPr>
+          <p:nvPr>
+            <p:ph type="ftr" sz="quarter" idx="3"/>
+          </p:nvPr>
+        </p:nvSpPr>
+        <p:spPr/>
+        <p:txBody>
+          <a:bodyPr/>
+          <a:lstStyle/>
+          <a:p>
+            <a:r>
+              <a:rPr lang="en-US"/>
+              <a:t>Getting to 100: Fixing Your Anthology Ally Errors</a:t>
+            </a:r>
+            <a:endParaRPr lang="en-US" dirty="0"/>
+          </a:p>
+        </p:txBody>
+      </p:sp>
+      <p:sp>
+        <p:nvSpPr>
+          <p:cNvPr id="5" name="Slide Number Placeholder 4">
+            <a:extLst>
+              <a:ext uri="{FF2B5EF4-FFF2-40B4-BE49-F238E27FC236}">
+                <a16:creationId xmlns:a16="http://schemas.microsoft.com/office/drawing/2014/main" id="{2712997A-8CD0-05BF-3D97-A293160B8130}"/>
+              </a:ext>
+              <a:ext uri="{C183D7F6-B498-43B3-948B-1728B52AA6E4}">
+                <adec:decorative xmlns:adec="http://schemas.microsoft.com/office/drawing/2017/decorative" val="1"/>
+              </a:ext>
+            </a:extLst>
+          </p:cNvPr>
+          <p:cNvSpPr>
+            <a:spLocks noGrp="1"/>
+          </p:cNvSpPr>
+          <p:nvPr>
+            <p:ph type="sldNum" sz="quarter" idx="4"/>
+          </p:nvPr>
+        </p:nvSpPr>
+        <p:spPr/>
+        <p:txBody>
+          <a:bodyPr/>
+          <a:lstStyle/>
+          <a:p>
+            <a:fld id="{E2D72577-C5EA-2248-880D-8FE657DD8266}" type="slidenum">
+              <a:rPr lang="en-US" smtClean="0"/>
+              <a:pPr/>
+              <a:t>30</a:t>
+            </a:fld>
+            <a:endParaRPr lang="en-US"/>
+          </a:p>
+        </p:txBody>
+      </p:sp>
+    </p:spTree>
+    <p:extLst>
+      <p:ext uri="{BB962C8B-B14F-4D97-AF65-F5344CB8AC3E}">
+        <p14:creationId xmlns:p14="http://schemas.microsoft.com/office/powerpoint/2010/main" val="4097956165"/>
+      </p:ext>
+    </p:extLst>
+  </p:cSld>
+  <p:clrMapOvr>
+    <a:masterClrMapping/>
+  </p:clrMapOvr>
+</p:sld>
+</file>
+
+<file path=ppt/slides/slide31.xml><?xml version="1.0" encoding="utf-8"?>
+<p:sld xmlns:a="http://schemas.openxmlformats.org/drawingml/2006/main" xmlns:r="http://schemas.openxmlformats.org/officeDocument/2006/relationships" xmlns:p="http://schemas.openxmlformats.org/presentationml/2006/main">
+  <p:cSld>
+    <p:spTree>
+      <p:nvGrpSpPr>
+        <p:cNvPr id="1" name="">
+          <a:extLst>
+            <a:ext uri="{FF2B5EF4-FFF2-40B4-BE49-F238E27FC236}">
+              <a16:creationId xmlns:a16="http://schemas.microsoft.com/office/drawing/2014/main" id="{F061D781-A209-10DA-B4B6-399F57C1423F}"/>
+            </a:ext>
+          </a:extLst>
+        </p:cNvPr>
+        <p:cNvGrpSpPr/>
+        <p:nvPr/>
+      </p:nvGrpSpPr>
+      <p:grpSpPr>
+        <a:xfrm>
+          <a:off x="0" y="0"/>
+          <a:ext cx="0" cy="0"/>
+          <a:chOff x="0" y="0"/>
+          <a:chExt cx="0" cy="0"/>
+        </a:xfrm>
+      </p:grpSpPr>
+      <p:sp>
+        <p:nvSpPr>
+          <p:cNvPr id="2" name="Title 1">
+            <a:extLst>
+              <a:ext uri="{FF2B5EF4-FFF2-40B4-BE49-F238E27FC236}">
+                <a16:creationId xmlns:a16="http://schemas.microsoft.com/office/drawing/2014/main" id="{6E66E07A-1070-66F3-B751-7756B47F0854}"/>
+              </a:ext>
+            </a:extLst>
+          </p:cNvPr>
+          <p:cNvSpPr>
+            <a:spLocks noGrp="1"/>
+          </p:cNvSpPr>
+          <p:nvPr>
+            <p:ph type="title"/>
+          </p:nvPr>
+        </p:nvSpPr>
+        <p:spPr/>
+        <p:txBody>
+          <a:bodyPr/>
+          <a:lstStyle/>
+          <a:p>
+            <a:r>
+              <a:rPr lang="en-US" dirty="0"/>
+              <a:t>False positive dense alt text</a:t>
+            </a:r>
+          </a:p>
+        </p:txBody>
+      </p:sp>
+      <p:sp>
+        <p:nvSpPr>
+          <p:cNvPr id="3" name="Content Placeholder 2">
+            <a:extLst>
+              <a:ext uri="{FF2B5EF4-FFF2-40B4-BE49-F238E27FC236}">
+                <a16:creationId xmlns:a16="http://schemas.microsoft.com/office/drawing/2014/main" id="{CF895CCF-C3B2-58AE-4FE0-5125B36A6AFA}"/>
+              </a:ext>
+            </a:extLst>
+          </p:cNvPr>
+          <p:cNvSpPr>
+            <a:spLocks noGrp="1"/>
+          </p:cNvSpPr>
+          <p:nvPr>
+            <p:ph idx="1"/>
+          </p:nvPr>
+        </p:nvSpPr>
+        <p:spPr>
+          <a:xfrm>
+            <a:off x="457200" y="1268650"/>
+            <a:ext cx="4852555" cy="3339109"/>
+          </a:xfrm>
+        </p:spPr>
+        <p:txBody>
+          <a:bodyPr/>
+          <a:lstStyle/>
+          <a:p>
+            <a:r>
+              <a:rPr lang="en-US" sz="1400" dirty="0"/>
+              <a:t>In the Rich Content Editor, Ally will incorrectly state that “Alt attribute text should not contain more than 120 characters.”  </a:t>
+            </a:r>
+          </a:p>
+          <a:p>
+            <a:r>
+              <a:rPr lang="en-US" sz="1400" dirty="0"/>
+              <a:t>This is false and has been noted to Anthology. </a:t>
+            </a:r>
+          </a:p>
+          <a:p>
+            <a:r>
+              <a:rPr lang="en-US" sz="1400" dirty="0"/>
+              <a:t>This false positive will not appear on your Accessibility Dashboard, only in the editor screen. </a:t>
+            </a:r>
+          </a:p>
+        </p:txBody>
+      </p:sp>
+      <p:pic>
+        <p:nvPicPr>
+          <p:cNvPr id="6" name="Picture 5" descr="Error stating the alt attribute text should not contain more than 120 characters. ">
+            <a:extLst>
+              <a:ext uri="{FF2B5EF4-FFF2-40B4-BE49-F238E27FC236}">
+                <a16:creationId xmlns:a16="http://schemas.microsoft.com/office/drawing/2014/main" id="{501BD7E1-2791-B618-E40A-01460FC711A6}"/>
+              </a:ext>
+            </a:extLst>
+          </p:cNvPr>
+          <p:cNvPicPr>
+            <a:picLocks noChangeAspect="1"/>
+          </p:cNvPicPr>
+          <p:nvPr/>
+        </p:nvPicPr>
+        <p:blipFill>
+          <a:blip r:embed="rId2"/>
+          <a:stretch>
+            <a:fillRect/>
+          </a:stretch>
+        </p:blipFill>
+        <p:spPr>
+          <a:xfrm>
+            <a:off x="5384918" y="1153392"/>
+            <a:ext cx="2048663" cy="2727614"/>
+          </a:xfrm>
+          <a:prstGeom prst="rect">
+            <a:avLst/>
+          </a:prstGeom>
+        </p:spPr>
+      </p:pic>
+      <p:sp>
+        <p:nvSpPr>
+          <p:cNvPr id="4" name="Footer Placeholder 3">
+            <a:extLst>
+              <a:ext uri="{FF2B5EF4-FFF2-40B4-BE49-F238E27FC236}">
+                <a16:creationId xmlns:a16="http://schemas.microsoft.com/office/drawing/2014/main" id="{88FB71A8-983D-235F-0167-1BB71C776735}"/>
+              </a:ext>
+              <a:ext uri="{C183D7F6-B498-43B3-948B-1728B52AA6E4}">
+                <adec:decorative xmlns:adec="http://schemas.microsoft.com/office/drawing/2017/decorative" val="1"/>
+              </a:ext>
+            </a:extLst>
+          </p:cNvPr>
+          <p:cNvSpPr>
+            <a:spLocks noGrp="1"/>
+          </p:cNvSpPr>
+          <p:nvPr>
+            <p:ph type="ftr" sz="quarter" idx="3"/>
+          </p:nvPr>
+        </p:nvSpPr>
+        <p:spPr/>
+        <p:txBody>
+          <a:bodyPr/>
+          <a:lstStyle/>
+          <a:p>
+            <a:r>
+              <a:rPr lang="en-US"/>
+              <a:t>Getting to 100: Fixing Your Anthology Ally Errors</a:t>
+            </a:r>
+            <a:endParaRPr lang="en-US" dirty="0"/>
+          </a:p>
+        </p:txBody>
+      </p:sp>
+      <p:sp>
+        <p:nvSpPr>
+          <p:cNvPr id="5" name="Slide Number Placeholder 4">
+            <a:extLst>
+              <a:ext uri="{FF2B5EF4-FFF2-40B4-BE49-F238E27FC236}">
+                <a16:creationId xmlns:a16="http://schemas.microsoft.com/office/drawing/2014/main" id="{3B262D99-A1F5-3C39-95E8-B01D43C85CA3}"/>
+              </a:ext>
+              <a:ext uri="{C183D7F6-B498-43B3-948B-1728B52AA6E4}">
+                <adec:decorative xmlns:adec="http://schemas.microsoft.com/office/drawing/2017/decorative" val="1"/>
+              </a:ext>
+            </a:extLst>
+          </p:cNvPr>
+          <p:cNvSpPr>
+            <a:spLocks noGrp="1"/>
+          </p:cNvSpPr>
+          <p:nvPr>
+            <p:ph type="sldNum" sz="quarter" idx="4"/>
+          </p:nvPr>
+        </p:nvSpPr>
+        <p:spPr/>
+        <p:txBody>
+          <a:bodyPr/>
+          <a:lstStyle/>
+          <a:p>
+            <a:fld id="{E2D72577-C5EA-2248-880D-8FE657DD8266}" type="slidenum">
+              <a:rPr lang="en-US" smtClean="0"/>
+              <a:pPr/>
+              <a:t>31</a:t>
+            </a:fld>
+            <a:endParaRPr lang="en-US"/>
+          </a:p>
+        </p:txBody>
+      </p:sp>
+    </p:spTree>
+    <p:extLst>
+      <p:ext uri="{BB962C8B-B14F-4D97-AF65-F5344CB8AC3E}">
+        <p14:creationId xmlns:p14="http://schemas.microsoft.com/office/powerpoint/2010/main" val="3211005345"/>
+      </p:ext>
+    </p:extLst>
+  </p:cSld>
+  <p:clrMapOvr>
+    <a:masterClrMapping/>
+  </p:clrMapOvr>
+</p:sld>
+</file>
+
+<file path=ppt/slides/slide32.xml><?xml version="1.0" encoding="utf-8"?>
+<p:sld xmlns:a="http://schemas.openxmlformats.org/drawingml/2006/main" xmlns:r="http://schemas.openxmlformats.org/officeDocument/2006/relationships" xmlns:p="http://schemas.openxmlformats.org/presentationml/2006/main">
+  <p:cSld>
+    <p:spTree>
+      <p:nvGrpSpPr>
+        <p:cNvPr id="1" name="">
+          <a:extLst>
+            <a:ext uri="{FF2B5EF4-FFF2-40B4-BE49-F238E27FC236}">
+              <a16:creationId xmlns:a16="http://schemas.microsoft.com/office/drawing/2014/main" id="{7D18F31D-FC9C-7B47-64FC-E832567FA3CC}"/>
+            </a:ext>
+          </a:extLst>
+        </p:cNvPr>
+        <p:cNvGrpSpPr/>
+        <p:nvPr/>
+      </p:nvGrpSpPr>
+      <p:grpSpPr>
+        <a:xfrm>
+          <a:off x="0" y="0"/>
+          <a:ext cx="0" cy="0"/>
+          <a:chOff x="0" y="0"/>
+          <a:chExt cx="0" cy="0"/>
+        </a:xfrm>
+      </p:grpSpPr>
+      <p:sp>
+        <p:nvSpPr>
+          <p:cNvPr id="2" name="Title 1">
+            <a:extLst>
+              <a:ext uri="{FF2B5EF4-FFF2-40B4-BE49-F238E27FC236}">
+                <a16:creationId xmlns:a16="http://schemas.microsoft.com/office/drawing/2014/main" id="{804E2711-5437-0051-CDCB-EA8FC74034CA}"/>
+              </a:ext>
+            </a:extLst>
+          </p:cNvPr>
+          <p:cNvSpPr>
+            <a:spLocks noGrp="1"/>
+          </p:cNvSpPr>
+          <p:nvPr>
+            <p:ph type="title"/>
+          </p:nvPr>
+        </p:nvSpPr>
+        <p:spPr/>
+        <p:txBody>
+          <a:bodyPr/>
+          <a:lstStyle/>
+          <a:p>
+            <a:r>
+              <a:rPr lang="en-US" dirty="0"/>
+              <a:t>Fix image upload alt text  – continued</a:t>
+            </a:r>
+          </a:p>
+        </p:txBody>
+      </p:sp>
+      <p:sp>
+        <p:nvSpPr>
+          <p:cNvPr id="3" name="Content Placeholder 2">
+            <a:extLst>
+              <a:ext uri="{FF2B5EF4-FFF2-40B4-BE49-F238E27FC236}">
+                <a16:creationId xmlns:a16="http://schemas.microsoft.com/office/drawing/2014/main" id="{B5BA2F07-47D7-66E8-1DC7-E9E21886AC5A}"/>
+              </a:ext>
+            </a:extLst>
+          </p:cNvPr>
+          <p:cNvSpPr>
+            <a:spLocks noGrp="1"/>
+          </p:cNvSpPr>
+          <p:nvPr>
+            <p:ph idx="1"/>
+          </p:nvPr>
+        </p:nvSpPr>
+        <p:spPr>
+          <a:xfrm>
+            <a:off x="457200" y="1268650"/>
+            <a:ext cx="3517323" cy="3474799"/>
+          </a:xfrm>
+        </p:spPr>
+        <p:txBody>
+          <a:bodyPr/>
+          <a:lstStyle/>
+          <a:p>
+            <a:r>
+              <a:rPr lang="en-US" sz="1400" dirty="0"/>
+              <a:t>Use this text:</a:t>
+            </a:r>
+          </a:p>
+          <a:p>
+            <a:pPr marL="517525" lvl="1"/>
+            <a:r>
+              <a:rPr lang="en-US" sz="1400" dirty="0"/>
+              <a:t>Grouped bar graph comparing Quiz 1 and Quiz 2 averages across three sections. Section 1: 85% and 82%. Section 2: 83% and 81%. Section 3: 85% and 82%.</a:t>
+            </a:r>
+          </a:p>
+          <a:p>
+            <a:r>
+              <a:rPr lang="en-US" sz="1400" dirty="0"/>
+              <a:t>Select Add. </a:t>
+            </a:r>
+          </a:p>
+          <a:p>
+            <a:r>
+              <a:rPr lang="en-US" sz="1400" dirty="0"/>
+              <a:t>Issue is resolved. </a:t>
+            </a:r>
+          </a:p>
+          <a:p>
+            <a:r>
+              <a:rPr lang="en-US" sz="1400" dirty="0"/>
+              <a:t>Using auto-generate is a good first step, but any text alternative must be human generated or human reviewed/edited. </a:t>
+            </a:r>
+          </a:p>
+          <a:p>
+            <a:r>
+              <a:rPr lang="en-US" sz="1400" dirty="0"/>
+              <a:t>This image cannot be marked decorative. </a:t>
+            </a:r>
+          </a:p>
+        </p:txBody>
+      </p:sp>
+      <p:pic>
+        <p:nvPicPr>
+          <p:cNvPr id="11" name="Picture 10" descr="100% score after fixing.">
+            <a:extLst>
+              <a:ext uri="{FF2B5EF4-FFF2-40B4-BE49-F238E27FC236}">
+                <a16:creationId xmlns:a16="http://schemas.microsoft.com/office/drawing/2014/main" id="{063670BD-BB1F-E73C-6B29-D238BA288FE9}"/>
+              </a:ext>
+            </a:extLst>
+          </p:cNvPr>
+          <p:cNvPicPr>
+            <a:picLocks noChangeAspect="1"/>
+          </p:cNvPicPr>
+          <p:nvPr/>
+        </p:nvPicPr>
+        <p:blipFill>
+          <a:blip r:embed="rId2"/>
+          <a:stretch>
+            <a:fillRect/>
+          </a:stretch>
+        </p:blipFill>
+        <p:spPr>
+          <a:xfrm>
+            <a:off x="4208317" y="2655084"/>
+            <a:ext cx="1461940" cy="1490889"/>
+          </a:xfrm>
+          <a:prstGeom prst="rect">
+            <a:avLst/>
+          </a:prstGeom>
+        </p:spPr>
+      </p:pic>
+      <p:pic>
+        <p:nvPicPr>
+          <p:cNvPr id="12" name="Picture 11" descr="Accessibility score perfect. &#10;">
+            <a:extLst>
+              <a:ext uri="{FF2B5EF4-FFF2-40B4-BE49-F238E27FC236}">
+                <a16:creationId xmlns:a16="http://schemas.microsoft.com/office/drawing/2014/main" id="{9C7841A3-E1A1-8B66-9B83-18FCA0AF65F6}"/>
+              </a:ext>
+            </a:extLst>
+          </p:cNvPr>
+          <p:cNvPicPr>
+            <a:picLocks noChangeAspect="1"/>
+          </p:cNvPicPr>
+          <p:nvPr/>
+        </p:nvPicPr>
+        <p:blipFill>
+          <a:blip r:embed="rId3"/>
+          <a:stretch>
+            <a:fillRect/>
+          </a:stretch>
+        </p:blipFill>
+        <p:spPr>
+          <a:xfrm>
+            <a:off x="4218709" y="4244687"/>
+            <a:ext cx="1499995" cy="581313"/>
+          </a:xfrm>
+          <a:prstGeom prst="rect">
+            <a:avLst/>
+          </a:prstGeom>
+        </p:spPr>
+      </p:pic>
+      <p:pic>
+        <p:nvPicPr>
+          <p:cNvPr id="7" name="Picture 6" descr="25% error notice due to missing image description. ">
+            <a:extLst>
+              <a:ext uri="{FF2B5EF4-FFF2-40B4-BE49-F238E27FC236}">
+                <a16:creationId xmlns:a16="http://schemas.microsoft.com/office/drawing/2014/main" id="{5F4A4F01-5D8D-44CA-8E90-39B8A6D4F34D}"/>
+              </a:ext>
+            </a:extLst>
+          </p:cNvPr>
+          <p:cNvPicPr>
+            <a:picLocks noChangeAspect="1"/>
+          </p:cNvPicPr>
+          <p:nvPr/>
+        </p:nvPicPr>
+        <p:blipFill>
+          <a:blip r:embed="rId4"/>
+          <a:stretch>
+            <a:fillRect/>
+          </a:stretch>
+        </p:blipFill>
+        <p:spPr>
+          <a:xfrm>
+            <a:off x="5818987" y="1246910"/>
+            <a:ext cx="1819728" cy="3584864"/>
+          </a:xfrm>
+          <a:prstGeom prst="rect">
+            <a:avLst/>
+          </a:prstGeom>
+        </p:spPr>
+      </p:pic>
+      <p:sp>
+        <p:nvSpPr>
+          <p:cNvPr id="4" name="Footer Placeholder 3">
+            <a:extLst>
+              <a:ext uri="{FF2B5EF4-FFF2-40B4-BE49-F238E27FC236}">
+                <a16:creationId xmlns:a16="http://schemas.microsoft.com/office/drawing/2014/main" id="{E6AFC264-622C-C953-2DA5-FA08F44E0514}"/>
+              </a:ext>
+              <a:ext uri="{C183D7F6-B498-43B3-948B-1728B52AA6E4}">
+                <adec:decorative xmlns:adec="http://schemas.microsoft.com/office/drawing/2017/decorative" val="1"/>
+              </a:ext>
+            </a:extLst>
+          </p:cNvPr>
+          <p:cNvSpPr>
+            <a:spLocks noGrp="1"/>
+          </p:cNvSpPr>
+          <p:nvPr>
+            <p:ph type="ftr" sz="quarter" idx="3"/>
+          </p:nvPr>
+        </p:nvSpPr>
+        <p:spPr/>
+        <p:txBody>
+          <a:bodyPr/>
+          <a:lstStyle/>
+          <a:p>
+            <a:r>
+              <a:rPr lang="en-US"/>
+              <a:t>Getting to 100: Fixing Your Anthology Ally Errors</a:t>
+            </a:r>
+            <a:endParaRPr lang="en-US" dirty="0"/>
+          </a:p>
+        </p:txBody>
+      </p:sp>
+      <p:sp>
+        <p:nvSpPr>
+          <p:cNvPr id="5" name="Slide Number Placeholder 4">
+            <a:extLst>
+              <a:ext uri="{FF2B5EF4-FFF2-40B4-BE49-F238E27FC236}">
+                <a16:creationId xmlns:a16="http://schemas.microsoft.com/office/drawing/2014/main" id="{7ECEBC6C-E794-36D5-5E5B-2E3706EC894F}"/>
+              </a:ext>
+              <a:ext uri="{C183D7F6-B498-43B3-948B-1728B52AA6E4}">
+                <adec:decorative xmlns:adec="http://schemas.microsoft.com/office/drawing/2017/decorative" val="1"/>
+              </a:ext>
+            </a:extLst>
+          </p:cNvPr>
+          <p:cNvSpPr>
+            <a:spLocks noGrp="1"/>
+          </p:cNvSpPr>
+          <p:nvPr>
+            <p:ph type="sldNum" sz="quarter" idx="4"/>
+          </p:nvPr>
+        </p:nvSpPr>
+        <p:spPr/>
+        <p:txBody>
+          <a:bodyPr/>
+          <a:lstStyle/>
+          <a:p>
+            <a:fld id="{E2D72577-C5EA-2248-880D-8FE657DD8266}" type="slidenum">
+              <a:rPr lang="en-US" smtClean="0"/>
+              <a:pPr/>
+              <a:t>32</a:t>
+            </a:fld>
+            <a:endParaRPr lang="en-US"/>
+          </a:p>
+        </p:txBody>
+      </p:sp>
+    </p:spTree>
+    <p:extLst>
+      <p:ext uri="{BB962C8B-B14F-4D97-AF65-F5344CB8AC3E}">
+        <p14:creationId xmlns:p14="http://schemas.microsoft.com/office/powerpoint/2010/main" val="2003864968"/>
+      </p:ext>
+    </p:extLst>
+  </p:cSld>
+  <p:clrMapOvr>
+    <a:masterClrMapping/>
+  </p:clrMapOvr>
+</p:sld>
+</file>
+
+<file path=ppt/slides/slide33.xml><?xml version="1.0" encoding="utf-8"?>
+<p:sld xmlns:a="http://schemas.openxmlformats.org/drawingml/2006/main" xmlns:r="http://schemas.openxmlformats.org/officeDocument/2006/relationships" xmlns:p="http://schemas.openxmlformats.org/presentationml/2006/main">
+  <p:cSld>
+    <p:spTree>
+      <p:nvGrpSpPr>
+        <p:cNvPr id="1" name="">
+          <a:extLst>
+            <a:ext uri="{FF2B5EF4-FFF2-40B4-BE49-F238E27FC236}">
+              <a16:creationId xmlns:a16="http://schemas.microsoft.com/office/drawing/2014/main" id="{34A482FC-9448-BEA1-AB36-27A77C8DF6FB}"/>
+            </a:ext>
+          </a:extLst>
+        </p:cNvPr>
+        <p:cNvGrpSpPr/>
+        <p:nvPr/>
+      </p:nvGrpSpPr>
+      <p:grpSpPr>
+        <a:xfrm>
+          <a:off x="0" y="0"/>
+          <a:ext cx="0" cy="0"/>
+          <a:chOff x="0" y="0"/>
+          <a:chExt cx="0" cy="0"/>
+        </a:xfrm>
+      </p:grpSpPr>
+      <p:sp>
+        <p:nvSpPr>
+          <p:cNvPr id="2" name="Title 1">
+            <a:extLst>
+              <a:ext uri="{FF2B5EF4-FFF2-40B4-BE49-F238E27FC236}">
+                <a16:creationId xmlns:a16="http://schemas.microsoft.com/office/drawing/2014/main" id="{B30E1173-32BF-0885-68FE-37493C866FA8}"/>
+              </a:ext>
+            </a:extLst>
+          </p:cNvPr>
+          <p:cNvSpPr>
+            <a:spLocks noGrp="1"/>
+          </p:cNvSpPr>
+          <p:nvPr>
+            <p:ph type="title"/>
+          </p:nvPr>
+        </p:nvSpPr>
+        <p:spPr/>
+        <p:txBody>
+          <a:bodyPr/>
+          <a:lstStyle/>
+          <a:p>
+            <a:r>
+              <a:rPr lang="en-US" dirty="0"/>
+              <a:t>Fix alt text in PDF</a:t>
+            </a:r>
+          </a:p>
+        </p:txBody>
+      </p:sp>
+      <p:sp>
+        <p:nvSpPr>
+          <p:cNvPr id="3" name="Content Placeholder 2">
+            <a:extLst>
+              <a:ext uri="{FF2B5EF4-FFF2-40B4-BE49-F238E27FC236}">
+                <a16:creationId xmlns:a16="http://schemas.microsoft.com/office/drawing/2014/main" id="{8999943F-4CF9-B7B5-1FF8-C38DC469AB53}"/>
+              </a:ext>
+            </a:extLst>
+          </p:cNvPr>
+          <p:cNvSpPr>
+            <a:spLocks noGrp="1"/>
+          </p:cNvSpPr>
+          <p:nvPr>
+            <p:ph idx="1"/>
+          </p:nvPr>
+        </p:nvSpPr>
+        <p:spPr>
+          <a:xfrm>
+            <a:off x="457200" y="1268652"/>
+            <a:ext cx="2296391" cy="2835758"/>
+          </a:xfrm>
+        </p:spPr>
+        <p:txBody>
+          <a:bodyPr/>
+          <a:lstStyle/>
+          <a:p>
+            <a:r>
+              <a:rPr lang="en-US" sz="1400" dirty="0"/>
+              <a:t>Review issue from Files interface or the Accessibility Dashboard. </a:t>
+            </a:r>
+          </a:p>
+          <a:p>
+            <a:r>
+              <a:rPr lang="en-US" sz="1400" dirty="0"/>
+              <a:t>To fix issue, we will use Acrobat Pro. </a:t>
+            </a:r>
+          </a:p>
+        </p:txBody>
+      </p:sp>
+      <p:sp>
+        <p:nvSpPr>
+          <p:cNvPr id="4" name="Footer Placeholder 3">
+            <a:extLst>
+              <a:ext uri="{FF2B5EF4-FFF2-40B4-BE49-F238E27FC236}">
+                <a16:creationId xmlns:a16="http://schemas.microsoft.com/office/drawing/2014/main" id="{3DBBC6F5-E06C-BE20-BF07-0C27D90C0448}"/>
+              </a:ext>
+              <a:ext uri="{C183D7F6-B498-43B3-948B-1728B52AA6E4}">
+                <adec:decorative xmlns:adec="http://schemas.microsoft.com/office/drawing/2017/decorative" val="1"/>
+              </a:ext>
+            </a:extLst>
+          </p:cNvPr>
+          <p:cNvSpPr>
+            <a:spLocks noGrp="1"/>
+          </p:cNvSpPr>
+          <p:nvPr>
+            <p:ph type="ftr" sz="quarter" idx="3"/>
+          </p:nvPr>
+        </p:nvSpPr>
+        <p:spPr/>
+        <p:txBody>
+          <a:bodyPr/>
+          <a:lstStyle/>
+          <a:p>
+            <a:r>
+              <a:rPr lang="en-US"/>
+              <a:t>Getting to 100: Fixing Your Anthology Ally Errors</a:t>
+            </a:r>
+            <a:endParaRPr lang="en-US" dirty="0"/>
+          </a:p>
+        </p:txBody>
+      </p:sp>
+      <p:sp>
+        <p:nvSpPr>
+          <p:cNvPr id="5" name="Slide Number Placeholder 4">
+            <a:extLst>
+              <a:ext uri="{FF2B5EF4-FFF2-40B4-BE49-F238E27FC236}">
+                <a16:creationId xmlns:a16="http://schemas.microsoft.com/office/drawing/2014/main" id="{11CD0F29-A444-B117-DE01-A65141625F56}"/>
+              </a:ext>
+              <a:ext uri="{C183D7F6-B498-43B3-948B-1728B52AA6E4}">
+                <adec:decorative xmlns:adec="http://schemas.microsoft.com/office/drawing/2017/decorative" val="1"/>
+              </a:ext>
+            </a:extLst>
+          </p:cNvPr>
+          <p:cNvSpPr>
+            <a:spLocks noGrp="1"/>
+          </p:cNvSpPr>
+          <p:nvPr>
+            <p:ph type="sldNum" sz="quarter" idx="4"/>
+          </p:nvPr>
+        </p:nvSpPr>
+        <p:spPr/>
+        <p:txBody>
+          <a:bodyPr/>
+          <a:lstStyle/>
+          <a:p>
+            <a:fld id="{E2D72577-C5EA-2248-880D-8FE657DD8266}" type="slidenum">
+              <a:rPr lang="en-US" smtClean="0"/>
+              <a:pPr/>
+              <a:t>33</a:t>
+            </a:fld>
+            <a:endParaRPr lang="en-US"/>
+          </a:p>
+        </p:txBody>
+      </p:sp>
+      <p:pic>
+        <p:nvPicPr>
+          <p:cNvPr id="7" name="Picture 6" descr="PDF showing two images without description. ">
+            <a:extLst>
+              <a:ext uri="{FF2B5EF4-FFF2-40B4-BE49-F238E27FC236}">
+                <a16:creationId xmlns:a16="http://schemas.microsoft.com/office/drawing/2014/main" id="{8147BFA0-B564-FBE5-B459-52AA09FE11C0}"/>
+              </a:ext>
+            </a:extLst>
+          </p:cNvPr>
+          <p:cNvPicPr>
+            <a:picLocks noChangeAspect="1"/>
+          </p:cNvPicPr>
+          <p:nvPr/>
+        </p:nvPicPr>
+        <p:blipFill>
+          <a:blip r:embed="rId2"/>
+          <a:stretch>
+            <a:fillRect/>
+          </a:stretch>
+        </p:blipFill>
+        <p:spPr>
+          <a:xfrm>
+            <a:off x="2878282" y="1270200"/>
+            <a:ext cx="4857750" cy="2896908"/>
+          </a:xfrm>
+          <a:prstGeom prst="rect">
+            <a:avLst/>
+          </a:prstGeom>
+        </p:spPr>
+      </p:pic>
+    </p:spTree>
+    <p:extLst>
+      <p:ext uri="{BB962C8B-B14F-4D97-AF65-F5344CB8AC3E}">
+        <p14:creationId xmlns:p14="http://schemas.microsoft.com/office/powerpoint/2010/main" val="3352927550"/>
+      </p:ext>
+    </p:extLst>
+  </p:cSld>
+  <p:clrMapOvr>
+    <a:masterClrMapping/>
+  </p:clrMapOvr>
+</p:sld>
+</file>
+
+<file path=ppt/slides/slide34.xml><?xml version="1.0" encoding="utf-8"?>
+<p:sld xmlns:a="http://schemas.openxmlformats.org/drawingml/2006/main" xmlns:r="http://schemas.openxmlformats.org/officeDocument/2006/relationships" xmlns:p="http://schemas.openxmlformats.org/presentationml/2006/main">
+  <p:cSld>
+    <p:spTree>
+      <p:nvGrpSpPr>
+        <p:cNvPr id="1" name=""/>
+        <p:cNvGrpSpPr/>
+        <p:nvPr/>
+      </p:nvGrpSpPr>
+      <p:grpSpPr>
+        <a:xfrm>
+          <a:off x="0" y="0"/>
+          <a:ext cx="0" cy="0"/>
+          <a:chOff x="0" y="0"/>
+          <a:chExt cx="0" cy="0"/>
+        </a:xfrm>
+      </p:grpSpPr>
+      <p:sp>
+        <p:nvSpPr>
+          <p:cNvPr id="2" name="Title 1">
+            <a:extLst>
+              <a:ext uri="{FF2B5EF4-FFF2-40B4-BE49-F238E27FC236}">
+                <a16:creationId xmlns:a16="http://schemas.microsoft.com/office/drawing/2014/main" id="{C55990BA-779E-A12D-EF31-DF95F863E966}"/>
+              </a:ext>
+            </a:extLst>
+          </p:cNvPr>
+          <p:cNvSpPr>
+            <a:spLocks noGrp="1"/>
+          </p:cNvSpPr>
+          <p:nvPr>
+            <p:ph type="title"/>
+          </p:nvPr>
+        </p:nvSpPr>
+        <p:spPr/>
+        <p:txBody>
+          <a:bodyPr/>
+          <a:lstStyle/>
+          <a:p>
+            <a:r>
+              <a:rPr lang="en-US" dirty="0"/>
+              <a:t>Document uploads alt text detection</a:t>
+            </a:r>
+          </a:p>
+        </p:txBody>
+      </p:sp>
+      <p:sp>
+        <p:nvSpPr>
+          <p:cNvPr id="3" name="Content Placeholder 2">
+            <a:extLst>
+              <a:ext uri="{FF2B5EF4-FFF2-40B4-BE49-F238E27FC236}">
+                <a16:creationId xmlns:a16="http://schemas.microsoft.com/office/drawing/2014/main" id="{274041A6-15E8-B4FD-DF88-A6FCE42C14A3}"/>
+              </a:ext>
+            </a:extLst>
+          </p:cNvPr>
+          <p:cNvSpPr>
+            <a:spLocks noGrp="1"/>
+          </p:cNvSpPr>
+          <p:nvPr>
+            <p:ph idx="1"/>
+          </p:nvPr>
+        </p:nvSpPr>
+        <p:spPr/>
+        <p:txBody>
+          <a:bodyPr/>
+          <a:lstStyle/>
+          <a:p>
+            <a:r>
+              <a:rPr lang="en-US" dirty="0"/>
+              <a:t>Same detection will be made in Word, PowerPoint, and PDF documents. </a:t>
+            </a:r>
+          </a:p>
+          <a:p>
+            <a:r>
+              <a:rPr lang="en-US" dirty="0"/>
+              <a:t>To fix the issues, we’ll need to fix in the documents, and re-upload them. </a:t>
+            </a:r>
+          </a:p>
+          <a:p>
+            <a:endParaRPr lang="en-US" dirty="0"/>
+          </a:p>
+        </p:txBody>
+      </p:sp>
+      <p:sp>
+        <p:nvSpPr>
+          <p:cNvPr id="4" name="Footer Placeholder 3">
+            <a:extLst>
+              <a:ext uri="{FF2B5EF4-FFF2-40B4-BE49-F238E27FC236}">
+                <a16:creationId xmlns:a16="http://schemas.microsoft.com/office/drawing/2014/main" id="{273C3DA4-D1CC-995D-8C42-293A45B3923D}"/>
+              </a:ext>
+            </a:extLst>
+          </p:cNvPr>
+          <p:cNvSpPr>
+            <a:spLocks noGrp="1"/>
+          </p:cNvSpPr>
+          <p:nvPr>
+            <p:ph type="ftr" sz="quarter" idx="3"/>
+          </p:nvPr>
+        </p:nvSpPr>
+        <p:spPr/>
+        <p:txBody>
+          <a:bodyPr/>
+          <a:lstStyle/>
+          <a:p>
+            <a:r>
+              <a:rPr lang="en-US"/>
+              <a:t>Getting to 100: Fixing Your Anthology Ally Errors</a:t>
+            </a:r>
+            <a:endParaRPr lang="en-US" dirty="0"/>
+          </a:p>
+        </p:txBody>
+      </p:sp>
+      <p:sp>
+        <p:nvSpPr>
+          <p:cNvPr id="5" name="Slide Number Placeholder 4">
+            <a:extLst>
+              <a:ext uri="{FF2B5EF4-FFF2-40B4-BE49-F238E27FC236}">
+                <a16:creationId xmlns:a16="http://schemas.microsoft.com/office/drawing/2014/main" id="{97211AD4-9B46-DCB6-30B2-7D37A40CE0FC}"/>
+              </a:ext>
+            </a:extLst>
+          </p:cNvPr>
+          <p:cNvSpPr>
+            <a:spLocks noGrp="1"/>
+          </p:cNvSpPr>
+          <p:nvPr>
+            <p:ph type="sldNum" sz="quarter" idx="4"/>
+          </p:nvPr>
+        </p:nvSpPr>
+        <p:spPr/>
+        <p:txBody>
+          <a:bodyPr/>
+          <a:lstStyle/>
+          <a:p>
+            <a:fld id="{E2D72577-C5EA-2248-880D-8FE657DD8266}" type="slidenum">
+              <a:rPr lang="en-US" smtClean="0"/>
+              <a:pPr/>
+              <a:t>34</a:t>
+            </a:fld>
+            <a:endParaRPr lang="en-US"/>
+          </a:p>
+        </p:txBody>
+      </p:sp>
+    </p:spTree>
+    <p:extLst>
+      <p:ext uri="{BB962C8B-B14F-4D97-AF65-F5344CB8AC3E}">
+        <p14:creationId xmlns:p14="http://schemas.microsoft.com/office/powerpoint/2010/main" val="1879899772"/>
       </p:ext>
     </p:extLst>
   </p:cSld>
@@ -14282,14 +21026,14 @@
           </a:ln>
           <a:extLst>
             <a:ext uri="{909E8E84-426E-40dd-AFC4-6F175D3DCCD1}">
-              <a14:hiddenFill xmlns="" xmlns:a14="http://schemas.microsoft.com/office/drawing/2010/main">
+              <a14:hiddenFill xmlns:a14="http://schemas.microsoft.com/office/drawing/2010/main" xmlns="">
                 <a:solidFill>
                   <a:srgbClr val="FFFFFF"/>
                 </a:solidFill>
               </a14:hiddenFill>
             </a:ext>
             <a:ext uri="{91240B29-F687-4f45-9708-019B960494DF}">
-              <a14:hiddenLine xmlns="" xmlns:a14="http://schemas.microsoft.com/office/drawing/2010/main" w="9525">
+              <a14:hiddenLine xmlns:a14="http://schemas.microsoft.com/office/drawing/2010/main" xmlns="" w="9525">
                 <a:solidFill>
                   <a:srgbClr val="000000"/>
                 </a:solidFill>
@@ -14299,7 +21043,7 @@
               </a14:hiddenLine>
             </a:ext>
             <a:ext uri="{FAA26D3D-D897-4be2-8F04-BA451C77F1D7}">
-              <ma14:placeholderFlag xmlns="" xmlns:ma14="http://schemas.microsoft.com/office/mac/drawingml/2011/main" val="1"/>
+              <ma14:placeholderFlag xmlns:ma14="http://schemas.microsoft.com/office/mac/drawingml/2011/main" xmlns="" val="1"/>
             </a:ext>
           </a:extLst>
         </p:spPr>
@@ -16565,15 +23309,6 @@
 </file>
 
 <file path=customXml/item1.xml><?xml version="1.0" encoding="utf-8"?>
-<?mso-contentType ?>
-<FormTemplates xmlns="http://schemas.microsoft.com/sharepoint/v3/contenttype/forms">
-  <Display>DocumentLibraryForm</Display>
-  <Edit>DocumentLibraryForm</Edit>
-  <New>DocumentLibraryForm</New>
-</FormTemplates>
-</file>
-
-<file path=customXml/item2.xml><?xml version="1.0" encoding="utf-8"?>
 <ct:contentTypeSchema xmlns:ct="http://schemas.microsoft.com/office/2006/metadata/contentType" xmlns:ma="http://schemas.microsoft.com/office/2006/metadata/properties/metaAttributes" ct:_="" ma:_="" ma:contentTypeName="Document" ma:contentTypeID="0x01010053698CD8A0156A478DE0CE5807392D45" ma:contentTypeVersion="15" ma:contentTypeDescription="Create a new document." ma:contentTypeScope="" ma:versionID="e956de3bc8ed0fdda30dec3de66f80de">
   <xsd:schema xmlns:xsd="http://www.w3.org/2001/XMLSchema" xmlns:xs="http://www.w3.org/2001/XMLSchema" xmlns:p="http://schemas.microsoft.com/office/2006/metadata/properties" xmlns:ns2="5d92d4c6-b949-4044-83d2-b3b09467276d" xmlns:ns3="f9ce0dfa-68e7-4e82-ad64-6f7fa7e3fe98" targetNamespace="http://schemas.microsoft.com/office/2006/metadata/properties" ma:root="true" ma:fieldsID="f49bc6e5e0104b82c3a43cbdfb8d7f7b" ns2:_="" ns3:_="">
     <xsd:import namespace="5d92d4c6-b949-4044-83d2-b3b09467276d"/>
@@ -16808,6 +23543,15 @@
 </ct:contentTypeSchema>
 </file>
 
+<file path=customXml/item2.xml><?xml version="1.0" encoding="utf-8"?>
+<?mso-contentType ?>
+<FormTemplates xmlns="http://schemas.microsoft.com/sharepoint/v3/contenttype/forms">
+  <Display>DocumentLibraryForm</Display>
+  <Edit>DocumentLibraryForm</Edit>
+  <New>DocumentLibraryForm</New>
+</FormTemplates>
+</file>
+
 <file path=customXml/item3.xml><?xml version="1.0" encoding="utf-8"?>
 <p:properties xmlns:p="http://schemas.microsoft.com/office/2006/metadata/properties" xmlns:xsi="http://www.w3.org/2001/XMLSchema-instance" xmlns:pc="http://schemas.microsoft.com/office/infopath/2007/PartnerControls">
   <documentManagement>
@@ -16827,14 +23571,6 @@
 </file>
 
 <file path=customXml/itemProps1.xml><?xml version="1.0" encoding="utf-8"?>
-<ds:datastoreItem xmlns:ds="http://schemas.openxmlformats.org/officeDocument/2006/customXml" ds:itemID="{CB793142-75E1-4EAA-8F3D-0EAFB138F1D1}">
-  <ds:schemaRefs>
-    <ds:schemaRef ds:uri="http://schemas.microsoft.com/sharepoint/v3/contenttype/forms"/>
-  </ds:schemaRefs>
-</ds:datastoreItem>
-</file>
-
-<file path=customXml/itemProps2.xml><?xml version="1.0" encoding="utf-8"?>
 <ds:datastoreItem xmlns:ds="http://schemas.openxmlformats.org/officeDocument/2006/customXml" ds:itemID="{D81FBAC5-EAB8-4F83-8F08-F3586FD1B50E}">
   <ds:schemaRefs>
     <ds:schemaRef ds:uri="http://schemas.microsoft.com/office/2006/metadata/contentType"/>
@@ -16849,6 +23585,14 @@
     <ds:schemaRef ds:uri="http://purl.org/dc/elements/1.1/"/>
     <ds:schemaRef ds:uri="http://purl.org/dc/terms/"/>
     <ds:schemaRef ds:uri="http://schemas.microsoft.com/internal/obd"/>
+  </ds:schemaRefs>
+</ds:datastoreItem>
+</file>
+
+<file path=customXml/itemProps2.xml><?xml version="1.0" encoding="utf-8"?>
+<ds:datastoreItem xmlns:ds="http://schemas.openxmlformats.org/officeDocument/2006/customXml" ds:itemID="{CB793142-75E1-4EAA-8F3D-0EAFB138F1D1}">
+  <ds:schemaRefs>
+    <ds:schemaRef ds:uri="http://schemas.microsoft.com/sharepoint/v3/contenttype/forms"/>
   </ds:schemaRefs>
 </ds:datastoreItem>
 </file>
